--- a/articles/mod-PowerPoint.pptx
+++ b/articles/mod-PowerPoint.pptx
@@ -24,6 +24,8 @@
     <p:sldId id="266" r:id="rId18"/>
     <p:sldId id="267" r:id="rId19"/>
     <p:sldId id="268" r:id="rId20"/>
+    <p:sldId id="269" r:id="rId21"/>
+    <p:sldId id="270" r:id="rId22"/>
   </p:sldIdLst>
   <p:sldSz cx="12192000" cy="6858000"/>
   <p:notesSz cx="6858000" cy="9144000"/>
@@ -3659,2552 +3661,37 @@
           <a:p>
             <a:r>
               <a:rPr/>
-              <a:t>Parameter Estimates</a:t>
+              <a:t>Model structure</a:t>
             </a:r>
           </a:p>
         </p:txBody>
       </p:sp>
-      <p:graphicFrame>
-        <p:nvGraphicFramePr>
-          <p:cNvPr id="3" name="Text Placeholder 2"/>
-          <p:cNvGraphicFramePr>
-            <a:graphicFrameLocks noGrp="true"/>
-          </p:cNvGraphicFramePr>
-          <p:nvPr/>
-        </p:nvGraphicFramePr>
-        <p:xfrm rot="0">
-          <a:off x="623392" y="1196752"/>
-          <a:ext cx="10945216" cy="5184576"/>
-        </p:xfrm>
-        <a:graphic>
-          <a:graphicData uri="http://schemas.openxmlformats.org/drawingml/2006/table">
-            <a:tbl>
-              <a:tblPr/>
-              <a:tblGrid>
-                <a:gridCol w="993857"/>
-                <a:gridCol w="660706"/>
-                <a:gridCol w="838468"/>
-                <a:gridCol w="667527"/>
-                <a:gridCol w="2070530"/>
-                <a:gridCol w="975713"/>
-                <a:gridCol w="1141675"/>
-              </a:tblGrid>
-              <a:tr h="405130">
-                <a:tc>
-                  <a:txBody>
-                    <a:bodyPr/>
-                    <a:lstStyle/>
-                    <a:p>
-                      <a:pPr algn="l" marL="63500" marR="63500">
-                        <a:lnSpc>
-                          <a:spcPct val="100000"/>
-                        </a:lnSpc>
-                        <a:spcBef>
-                          <a:spcPts val="500"/>
-                        </a:spcBef>
-                        <a:spcAft>
-                          <a:spcPts val="500"/>
-                        </a:spcAft>
-                        <a:buNone/>
-                      </a:pPr>
-                      <a:r>
-                        <a:rPr cap="none" sz="1100" i="0" b="0" u="none" strike="noStrike">
-                          <a:solidFill>
-                            <a:srgbClr val="000000">
-                              <a:alpha val="100000"/>
-                            </a:srgbClr>
-                          </a:solidFill>
-                          <a:latin typeface="DejaVu Sans"/>
-                          <a:cs typeface="DejaVu Sans"/>
-                          <a:ea typeface="DejaVu Sans"/>
-                          <a:sym typeface="DejaVu Sans"/>
-                        </a:rPr>
-                        <a:t>Parameter</a:t>
-                      </a:r>
-                    </a:p>
-                  </a:txBody>
-                  <a:tcPr anchor="ctr" marB="63500" marT="63500" marR="0" marL="0">
-                    <a:lnL algn="ctr" cmpd="sng" cap="flat" w="0">
-                      <a:noFill/>
-                      <a:prstDash val="solid"/>
-                    </a:lnL>
-                    <a:lnR algn="ctr" cmpd="sng" cap="flat" w="0">
-                      <a:noFill/>
-                      <a:prstDash val="solid"/>
-                    </a:lnR>
-                    <a:lnT algn="ctr" cmpd="sng" cap="flat" w="19050">
-                      <a:solidFill>
-                        <a:srgbClr val="666666">
-                          <a:alpha val="100000"/>
-                        </a:srgbClr>
-                      </a:solidFill>
-                      <a:prstDash val="solid"/>
-                    </a:lnT>
-                    <a:lnB algn="ctr" cmpd="sng" cap="flat" w="19050">
-                      <a:solidFill>
-                        <a:srgbClr val="666666">
-                          <a:alpha val="100000"/>
-                        </a:srgbClr>
-                      </a:solidFill>
-                      <a:prstDash val="solid"/>
-                    </a:lnB>
-                    <a:solidFill>
-                      <a:srgbClr val="FFFFFF">
-                        <a:alpha val="0"/>
-                      </a:srgbClr>
-                    </a:solidFill>
-                  </a:tcPr>
-                </a:tc>
-                <a:tc>
-                  <a:txBody>
-                    <a:bodyPr/>
-                    <a:lstStyle/>
-                    <a:p>
-                      <a:pPr algn="l" marL="63500" marR="63500">
-                        <a:lnSpc>
-                          <a:spcPct val="100000"/>
-                        </a:lnSpc>
-                        <a:spcBef>
-                          <a:spcPts val="500"/>
-                        </a:spcBef>
-                        <a:spcAft>
-                          <a:spcPts val="500"/>
-                        </a:spcAft>
-                        <a:buNone/>
-                      </a:pPr>
-                      <a:r>
-                        <a:rPr cap="none" sz="1100" i="0" b="0" u="none" strike="noStrike">
-                          <a:solidFill>
-                            <a:srgbClr val="000000">
-                              <a:alpha val="100000"/>
-                            </a:srgbClr>
-                          </a:solidFill>
-                          <a:latin typeface="DejaVu Sans"/>
-                          <a:cs typeface="DejaVu Sans"/>
-                          <a:ea typeface="DejaVu Sans"/>
-                          <a:sym typeface="DejaVu Sans"/>
-                        </a:rPr>
-                        <a:t>Est.</a:t>
-                      </a:r>
-                    </a:p>
-                  </a:txBody>
-                  <a:tcPr anchor="ctr" marB="63500" marT="63500" marR="0" marL="0">
-                    <a:lnL algn="ctr" cmpd="sng" cap="flat" w="0">
-                      <a:noFill/>
-                      <a:prstDash val="solid"/>
-                    </a:lnL>
-                    <a:lnR algn="ctr" cmpd="sng" cap="flat" w="0">
-                      <a:noFill/>
-                      <a:prstDash val="solid"/>
-                    </a:lnR>
-                    <a:lnT algn="ctr" cmpd="sng" cap="flat" w="19050">
-                      <a:solidFill>
-                        <a:srgbClr val="666666">
-                          <a:alpha val="100000"/>
-                        </a:srgbClr>
-                      </a:solidFill>
-                      <a:prstDash val="solid"/>
-                    </a:lnT>
-                    <a:lnB algn="ctr" cmpd="sng" cap="flat" w="19050">
-                      <a:solidFill>
-                        <a:srgbClr val="666666">
-                          <a:alpha val="100000"/>
-                        </a:srgbClr>
-                      </a:solidFill>
-                      <a:prstDash val="solid"/>
-                    </a:lnB>
-                    <a:solidFill>
-                      <a:srgbClr val="FFFFFF">
-                        <a:alpha val="0"/>
-                      </a:srgbClr>
-                    </a:solidFill>
-                  </a:tcPr>
-                </a:tc>
-                <a:tc>
-                  <a:txBody>
-                    <a:bodyPr/>
-                    <a:lstStyle/>
-                    <a:p>
-                      <a:pPr algn="l" marL="63500" marR="63500">
-                        <a:lnSpc>
-                          <a:spcPct val="100000"/>
-                        </a:lnSpc>
-                        <a:spcBef>
-                          <a:spcPts val="500"/>
-                        </a:spcBef>
-                        <a:spcAft>
-                          <a:spcPts val="500"/>
-                        </a:spcAft>
-                        <a:buNone/>
-                      </a:pPr>
-                      <a:r>
-                        <a:rPr cap="none" sz="1100" i="0" b="0" u="none" strike="noStrike">
-                          <a:solidFill>
-                            <a:srgbClr val="000000">
-                              <a:alpha val="100000"/>
-                            </a:srgbClr>
-                          </a:solidFill>
-                          <a:latin typeface="DejaVu Sans"/>
-                          <a:cs typeface="DejaVu Sans"/>
-                          <a:ea typeface="DejaVu Sans"/>
-                          <a:sym typeface="DejaVu Sans"/>
-                        </a:rPr>
-                        <a:t>SE</a:t>
-                      </a:r>
-                    </a:p>
-                  </a:txBody>
-                  <a:tcPr anchor="ctr" marB="63500" marT="63500" marR="0" marL="0">
-                    <a:lnL algn="ctr" cmpd="sng" cap="flat" w="0">
-                      <a:noFill/>
-                      <a:prstDash val="solid"/>
-                    </a:lnL>
-                    <a:lnR algn="ctr" cmpd="sng" cap="flat" w="0">
-                      <a:noFill/>
-                      <a:prstDash val="solid"/>
-                    </a:lnR>
-                    <a:lnT algn="ctr" cmpd="sng" cap="flat" w="19050">
-                      <a:solidFill>
-                        <a:srgbClr val="666666">
-                          <a:alpha val="100000"/>
-                        </a:srgbClr>
-                      </a:solidFill>
-                      <a:prstDash val="solid"/>
-                    </a:lnT>
-                    <a:lnB algn="ctr" cmpd="sng" cap="flat" w="19050">
-                      <a:solidFill>
-                        <a:srgbClr val="666666">
-                          <a:alpha val="100000"/>
-                        </a:srgbClr>
-                      </a:solidFill>
-                      <a:prstDash val="solid"/>
-                    </a:lnB>
-                    <a:solidFill>
-                      <a:srgbClr val="FFFFFF">
-                        <a:alpha val="0"/>
-                      </a:srgbClr>
-                    </a:solidFill>
-                  </a:tcPr>
-                </a:tc>
-                <a:tc>
-                  <a:txBody>
-                    <a:bodyPr/>
-                    <a:lstStyle/>
-                    <a:p>
-                      <a:pPr algn="l" marL="63500" marR="63500">
-                        <a:lnSpc>
-                          <a:spcPct val="100000"/>
-                        </a:lnSpc>
-                        <a:spcBef>
-                          <a:spcPts val="500"/>
-                        </a:spcBef>
-                        <a:spcAft>
-                          <a:spcPts val="500"/>
-                        </a:spcAft>
-                        <a:buNone/>
-                      </a:pPr>
-                      <a:r>
-                        <a:rPr cap="none" sz="1100" i="0" b="0" u="none" strike="noStrike">
-                          <a:solidFill>
-                            <a:srgbClr val="000000">
-                              <a:alpha val="100000"/>
-                            </a:srgbClr>
-                          </a:solidFill>
-                          <a:latin typeface="DejaVu Sans"/>
-                          <a:cs typeface="DejaVu Sans"/>
-                          <a:ea typeface="DejaVu Sans"/>
-                          <a:sym typeface="DejaVu Sans"/>
-                        </a:rPr>
-                        <a:t>%RSE</a:t>
-                      </a:r>
-                    </a:p>
-                  </a:txBody>
-                  <a:tcPr anchor="ctr" marB="63500" marT="63500" marR="0" marL="0">
-                    <a:lnL algn="ctr" cmpd="sng" cap="flat" w="0">
-                      <a:noFill/>
-                      <a:prstDash val="solid"/>
-                    </a:lnL>
-                    <a:lnR algn="ctr" cmpd="sng" cap="flat" w="0">
-                      <a:noFill/>
-                      <a:prstDash val="solid"/>
-                    </a:lnR>
-                    <a:lnT algn="ctr" cmpd="sng" cap="flat" w="19050">
-                      <a:solidFill>
-                        <a:srgbClr val="666666">
-                          <a:alpha val="100000"/>
-                        </a:srgbClr>
-                      </a:solidFill>
-                      <a:prstDash val="solid"/>
-                    </a:lnT>
-                    <a:lnB algn="ctr" cmpd="sng" cap="flat" w="19050">
-                      <a:solidFill>
-                        <a:srgbClr val="666666">
-                          <a:alpha val="100000"/>
-                        </a:srgbClr>
-                      </a:solidFill>
-                      <a:prstDash val="solid"/>
-                    </a:lnB>
-                    <a:solidFill>
-                      <a:srgbClr val="FFFFFF">
-                        <a:alpha val="0"/>
-                      </a:srgbClr>
-                    </a:solidFill>
-                  </a:tcPr>
-                </a:tc>
-                <a:tc>
-                  <a:txBody>
-                    <a:bodyPr/>
-                    <a:lstStyle/>
-                    <a:p>
-                      <a:pPr algn="l" marL="63500" marR="63500">
-                        <a:lnSpc>
-                          <a:spcPct val="100000"/>
-                        </a:lnSpc>
-                        <a:spcBef>
-                          <a:spcPts val="500"/>
-                        </a:spcBef>
-                        <a:spcAft>
-                          <a:spcPts val="500"/>
-                        </a:spcAft>
-                        <a:buNone/>
-                      </a:pPr>
-                      <a:r>
-                        <a:rPr cap="none" sz="1100" i="0" b="0" u="none" strike="noStrike">
-                          <a:solidFill>
-                            <a:srgbClr val="000000">
-                              <a:alpha val="100000"/>
-                            </a:srgbClr>
-                          </a:solidFill>
-                          <a:latin typeface="DejaVu Sans"/>
-                          <a:cs typeface="DejaVu Sans"/>
-                          <a:ea typeface="DejaVu Sans"/>
-                          <a:sym typeface="DejaVu Sans"/>
-                        </a:rPr>
-                        <a:t>Back-transformed(95%CI)</a:t>
-                      </a:r>
-                    </a:p>
-                  </a:txBody>
-                  <a:tcPr anchor="ctr" marB="63500" marT="63500" marR="0" marL="0">
-                    <a:lnL algn="ctr" cmpd="sng" cap="flat" w="0">
-                      <a:noFill/>
-                      <a:prstDash val="solid"/>
-                    </a:lnL>
-                    <a:lnR algn="ctr" cmpd="sng" cap="flat" w="0">
-                      <a:noFill/>
-                      <a:prstDash val="solid"/>
-                    </a:lnR>
-                    <a:lnT algn="ctr" cmpd="sng" cap="flat" w="19050">
-                      <a:solidFill>
-                        <a:srgbClr val="666666">
-                          <a:alpha val="100000"/>
-                        </a:srgbClr>
-                      </a:solidFill>
-                      <a:prstDash val="solid"/>
-                    </a:lnT>
-                    <a:lnB algn="ctr" cmpd="sng" cap="flat" w="19050">
-                      <a:solidFill>
-                        <a:srgbClr val="666666">
-                          <a:alpha val="100000"/>
-                        </a:srgbClr>
-                      </a:solidFill>
-                      <a:prstDash val="solid"/>
-                    </a:lnB>
-                    <a:solidFill>
-                      <a:srgbClr val="FFFFFF">
-                        <a:alpha val="0"/>
-                      </a:srgbClr>
-                    </a:solidFill>
-                  </a:tcPr>
-                </a:tc>
-                <a:tc>
-                  <a:txBody>
-                    <a:bodyPr/>
-                    <a:lstStyle/>
-                    <a:p>
-                      <a:pPr algn="l" marL="63500" marR="63500">
-                        <a:lnSpc>
-                          <a:spcPct val="100000"/>
-                        </a:lnSpc>
-                        <a:spcBef>
-                          <a:spcPts val="500"/>
-                        </a:spcBef>
-                        <a:spcAft>
-                          <a:spcPts val="500"/>
-                        </a:spcAft>
-                        <a:buNone/>
-                      </a:pPr>
-                      <a:r>
-                        <a:rPr cap="none" sz="1100" i="0" b="0" u="none" strike="noStrike">
-                          <a:solidFill>
-                            <a:srgbClr val="000000">
-                              <a:alpha val="100000"/>
-                            </a:srgbClr>
-                          </a:solidFill>
-                          <a:latin typeface="DejaVu Sans"/>
-                          <a:cs typeface="DejaVu Sans"/>
-                          <a:ea typeface="DejaVu Sans"/>
-                          <a:sym typeface="DejaVu Sans"/>
-                        </a:rPr>
-                        <a:t>BSV(CV%)</a:t>
-                      </a:r>
-                    </a:p>
-                  </a:txBody>
-                  <a:tcPr anchor="ctr" marB="63500" marT="63500" marR="0" marL="0">
-                    <a:lnL algn="ctr" cmpd="sng" cap="flat" w="0">
-                      <a:noFill/>
-                      <a:prstDash val="solid"/>
-                    </a:lnL>
-                    <a:lnR algn="ctr" cmpd="sng" cap="flat" w="0">
-                      <a:noFill/>
-                      <a:prstDash val="solid"/>
-                    </a:lnR>
-                    <a:lnT algn="ctr" cmpd="sng" cap="flat" w="19050">
-                      <a:solidFill>
-                        <a:srgbClr val="666666">
-                          <a:alpha val="100000"/>
-                        </a:srgbClr>
-                      </a:solidFill>
-                      <a:prstDash val="solid"/>
-                    </a:lnT>
-                    <a:lnB algn="ctr" cmpd="sng" cap="flat" w="19050">
-                      <a:solidFill>
-                        <a:srgbClr val="666666">
-                          <a:alpha val="100000"/>
-                        </a:srgbClr>
-                      </a:solidFill>
-                      <a:prstDash val="solid"/>
-                    </a:lnB>
-                    <a:solidFill>
-                      <a:srgbClr val="FFFFFF">
-                        <a:alpha val="0"/>
-                      </a:srgbClr>
-                    </a:solidFill>
-                  </a:tcPr>
-                </a:tc>
-                <a:tc>
-                  <a:txBody>
-                    <a:bodyPr/>
-                    <a:lstStyle/>
-                    <a:p>
-                      <a:pPr algn="l" marL="63500" marR="63500">
-                        <a:lnSpc>
-                          <a:spcPct val="100000"/>
-                        </a:lnSpc>
-                        <a:spcBef>
-                          <a:spcPts val="500"/>
-                        </a:spcBef>
-                        <a:spcAft>
-                          <a:spcPts val="500"/>
-                        </a:spcAft>
-                        <a:buNone/>
-                      </a:pPr>
-                      <a:r>
-                        <a:rPr cap="none" sz="1100" i="0" b="0" u="none" strike="noStrike">
-                          <a:solidFill>
-                            <a:srgbClr val="000000">
-                              <a:alpha val="100000"/>
-                            </a:srgbClr>
-                          </a:solidFill>
-                          <a:latin typeface="DejaVu Sans"/>
-                          <a:cs typeface="DejaVu Sans"/>
-                          <a:ea typeface="DejaVu Sans"/>
-                          <a:sym typeface="DejaVu Sans"/>
-                        </a:rPr>
-                        <a:t>Shrink(SD)%</a:t>
-                      </a:r>
-                    </a:p>
-                  </a:txBody>
-                  <a:tcPr anchor="ctr" marB="63500" marT="63500" marR="0" marL="0">
-                    <a:lnL algn="ctr" cmpd="sng" cap="flat" w="0">
-                      <a:noFill/>
-                      <a:prstDash val="solid"/>
-                    </a:lnL>
-                    <a:lnR algn="ctr" cmpd="sng" cap="flat" w="0">
-                      <a:noFill/>
-                      <a:prstDash val="solid"/>
-                    </a:lnR>
-                    <a:lnT algn="ctr" cmpd="sng" cap="flat" w="19050">
-                      <a:solidFill>
-                        <a:srgbClr val="666666">
-                          <a:alpha val="100000"/>
-                        </a:srgbClr>
-                      </a:solidFill>
-                      <a:prstDash val="solid"/>
-                    </a:lnT>
-                    <a:lnB algn="ctr" cmpd="sng" cap="flat" w="19050">
-                      <a:solidFill>
-                        <a:srgbClr val="666666">
-                          <a:alpha val="100000"/>
-                        </a:srgbClr>
-                      </a:solidFill>
-                      <a:prstDash val="solid"/>
-                    </a:lnB>
-                    <a:solidFill>
-                      <a:srgbClr val="FFFFFF">
-                        <a:alpha val="0"/>
-                      </a:srgbClr>
-                    </a:solidFill>
-                  </a:tcPr>
-                </a:tc>
-              </a:tr>
-              <a:tr h="401320">
-                <a:tc>
-                  <a:txBody>
-                    <a:bodyPr/>
-                    <a:lstStyle/>
-                    <a:p>
-                      <a:pPr algn="l" marL="63500" marR="63500">
-                        <a:lnSpc>
-                          <a:spcPct val="100000"/>
-                        </a:lnSpc>
-                        <a:spcBef>
-                          <a:spcPts val="500"/>
-                        </a:spcBef>
-                        <a:spcAft>
-                          <a:spcPts val="500"/>
-                        </a:spcAft>
-                        <a:buNone/>
-                      </a:pPr>
-                      <a:r>
-                        <a:rPr cap="none" sz="1200" i="0" b="0" u="none" strike="noStrike">
-                          <a:solidFill>
-                            <a:srgbClr val="000000">
-                              <a:alpha val="100000"/>
-                            </a:srgbClr>
-                          </a:solidFill>
-                          <a:latin typeface="Helvetica"/>
-                          <a:cs typeface="Helvetica"/>
-                          <a:ea typeface="Helvetica"/>
-                          <a:sym typeface="Helvetica"/>
-                        </a:rPr>
-                        <a:t>log Cl</a:t>
-                      </a:r>
-                    </a:p>
-                  </a:txBody>
-                  <a:tcPr anchor="ctr" marB="63500" marT="63500" marR="0" marL="0">
-                    <a:lnL algn="ctr" cmpd="sng" cap="flat" w="0">
-                      <a:noFill/>
-                      <a:prstDash val="solid"/>
-                    </a:lnL>
-                    <a:lnR algn="ctr" cmpd="sng" cap="flat" w="0">
-                      <a:noFill/>
-                      <a:prstDash val="solid"/>
-                    </a:lnR>
-                    <a:lnT algn="ctr" cmpd="sng" cap="flat" w="0">
-                      <a:noFill/>
-                      <a:prstDash val="solid"/>
-                    </a:lnT>
-                    <a:lnB algn="ctr" cmpd="sng" cap="flat" w="0">
-                      <a:noFill/>
-                      <a:prstDash val="solid"/>
-                    </a:lnB>
-                    <a:solidFill>
-                      <a:srgbClr val="FFFFFF">
-                        <a:alpha val="0"/>
-                      </a:srgbClr>
-                    </a:solidFill>
-                  </a:tcPr>
-                </a:tc>
-                <a:tc>
-                  <a:txBody>
-                    <a:bodyPr/>
-                    <a:lstStyle/>
-                    <a:p>
-                      <a:pPr algn="l" marL="63500" marR="63500">
-                        <a:lnSpc>
-                          <a:spcPct val="100000"/>
-                        </a:lnSpc>
-                        <a:spcBef>
-                          <a:spcPts val="500"/>
-                        </a:spcBef>
-                        <a:spcAft>
-                          <a:spcPts val="500"/>
-                        </a:spcAft>
-                        <a:buNone/>
-                      </a:pPr>
-                      <a:r>
-                        <a:rPr cap="none" sz="1100" i="0" b="0" u="none" strike="noStrike">
-                          <a:solidFill>
-                            <a:srgbClr val="000000">
-                              <a:alpha val="100000"/>
-                            </a:srgbClr>
-                          </a:solidFill>
-                          <a:latin typeface="DejaVu Sans"/>
-                          <a:cs typeface="DejaVu Sans"/>
-                          <a:ea typeface="DejaVu Sans"/>
-                          <a:sym typeface="DejaVu Sans"/>
-                        </a:rPr>
-                        <a:t>1.37</a:t>
-                      </a:r>
-                    </a:p>
-                  </a:txBody>
-                  <a:tcPr anchor="ctr" marB="63500" marT="63500" marR="0" marL="0">
-                    <a:lnL algn="ctr" cmpd="sng" cap="flat" w="0">
-                      <a:noFill/>
-                      <a:prstDash val="solid"/>
-                    </a:lnL>
-                    <a:lnR algn="ctr" cmpd="sng" cap="flat" w="0">
-                      <a:noFill/>
-                      <a:prstDash val="solid"/>
-                    </a:lnR>
-                    <a:lnT algn="ctr" cmpd="sng" cap="flat" w="0">
-                      <a:noFill/>
-                      <a:prstDash val="solid"/>
-                    </a:lnT>
-                    <a:lnB algn="ctr" cmpd="sng" cap="flat" w="0">
-                      <a:noFill/>
-                      <a:prstDash val="solid"/>
-                    </a:lnB>
-                    <a:solidFill>
-                      <a:srgbClr val="FFFFFF">
-                        <a:alpha val="0"/>
-                      </a:srgbClr>
-                    </a:solidFill>
-                  </a:tcPr>
-                </a:tc>
-                <a:tc>
-                  <a:txBody>
-                    <a:bodyPr/>
-                    <a:lstStyle/>
-                    <a:p>
-                      <a:pPr algn="l" marL="63500" marR="63500">
-                        <a:lnSpc>
-                          <a:spcPct val="100000"/>
-                        </a:lnSpc>
-                        <a:spcBef>
-                          <a:spcPts val="500"/>
-                        </a:spcBef>
-                        <a:spcAft>
-                          <a:spcPts val="500"/>
-                        </a:spcAft>
-                        <a:buNone/>
-                      </a:pPr>
-                      <a:r>
-                        <a:rPr cap="none" sz="1100" i="0" b="0" u="none" strike="noStrike">
-                          <a:solidFill>
-                            <a:srgbClr val="000000">
-                              <a:alpha val="100000"/>
-                            </a:srgbClr>
-                          </a:solidFill>
-                          <a:latin typeface="DejaVu Sans"/>
-                          <a:cs typeface="DejaVu Sans"/>
-                          <a:ea typeface="DejaVu Sans"/>
-                          <a:sym typeface="DejaVu Sans"/>
-                        </a:rPr>
-                        <a:t>0.0298</a:t>
-                      </a:r>
-                    </a:p>
-                  </a:txBody>
-                  <a:tcPr anchor="ctr" marB="63500" marT="63500" marR="0" marL="0">
-                    <a:lnL algn="ctr" cmpd="sng" cap="flat" w="0">
-                      <a:noFill/>
-                      <a:prstDash val="solid"/>
-                    </a:lnL>
-                    <a:lnR algn="ctr" cmpd="sng" cap="flat" w="0">
-                      <a:noFill/>
-                      <a:prstDash val="solid"/>
-                    </a:lnR>
-                    <a:lnT algn="ctr" cmpd="sng" cap="flat" w="0">
-                      <a:noFill/>
-                      <a:prstDash val="solid"/>
-                    </a:lnT>
-                    <a:lnB algn="ctr" cmpd="sng" cap="flat" w="0">
-                      <a:noFill/>
-                      <a:prstDash val="solid"/>
-                    </a:lnB>
-                    <a:solidFill>
-                      <a:srgbClr val="FFFFFF">
-                        <a:alpha val="0"/>
-                      </a:srgbClr>
-                    </a:solidFill>
-                  </a:tcPr>
-                </a:tc>
-                <a:tc>
-                  <a:txBody>
-                    <a:bodyPr/>
-                    <a:lstStyle/>
-                    <a:p>
-                      <a:pPr algn="l" marL="63500" marR="63500">
-                        <a:lnSpc>
-                          <a:spcPct val="100000"/>
-                        </a:lnSpc>
-                        <a:spcBef>
-                          <a:spcPts val="500"/>
-                        </a:spcBef>
-                        <a:spcAft>
-                          <a:spcPts val="500"/>
-                        </a:spcAft>
-                        <a:buNone/>
-                      </a:pPr>
-                      <a:r>
-                        <a:rPr cap="none" sz="1100" i="0" b="0" u="none" strike="noStrike">
-                          <a:solidFill>
-                            <a:srgbClr val="000000">
-                              <a:alpha val="100000"/>
-                            </a:srgbClr>
-                          </a:solidFill>
-                          <a:latin typeface="DejaVu Sans"/>
-                          <a:cs typeface="DejaVu Sans"/>
-                          <a:ea typeface="DejaVu Sans"/>
-                          <a:sym typeface="DejaVu Sans"/>
-                        </a:rPr>
-                        <a:t>2.17</a:t>
-                      </a:r>
-                    </a:p>
-                  </a:txBody>
-                  <a:tcPr anchor="ctr" marB="63500" marT="63500" marR="0" marL="0">
-                    <a:lnL algn="ctr" cmpd="sng" cap="flat" w="0">
-                      <a:noFill/>
-                      <a:prstDash val="solid"/>
-                    </a:lnL>
-                    <a:lnR algn="ctr" cmpd="sng" cap="flat" w="0">
-                      <a:noFill/>
-                      <a:prstDash val="solid"/>
-                    </a:lnR>
-                    <a:lnT algn="ctr" cmpd="sng" cap="flat" w="0">
-                      <a:noFill/>
-                      <a:prstDash val="solid"/>
-                    </a:lnT>
-                    <a:lnB algn="ctr" cmpd="sng" cap="flat" w="0">
-                      <a:noFill/>
-                      <a:prstDash val="solid"/>
-                    </a:lnB>
-                    <a:solidFill>
-                      <a:srgbClr val="FFFFFF">
-                        <a:alpha val="0"/>
-                      </a:srgbClr>
-                    </a:solidFill>
-                  </a:tcPr>
-                </a:tc>
-                <a:tc>
-                  <a:txBody>
-                    <a:bodyPr/>
-                    <a:lstStyle/>
-                    <a:p>
-                      <a:pPr algn="l" marL="63500" marR="63500">
-                        <a:lnSpc>
-                          <a:spcPct val="100000"/>
-                        </a:lnSpc>
-                        <a:spcBef>
-                          <a:spcPts val="500"/>
-                        </a:spcBef>
-                        <a:spcAft>
-                          <a:spcPts val="500"/>
-                        </a:spcAft>
-                        <a:buNone/>
-                      </a:pPr>
-                      <a:r>
-                        <a:rPr cap="none" sz="1100" i="0" b="0" u="none" strike="noStrike">
-                          <a:solidFill>
-                            <a:srgbClr val="000000">
-                              <a:alpha val="100000"/>
-                            </a:srgbClr>
-                          </a:solidFill>
-                          <a:latin typeface="DejaVu Sans"/>
-                          <a:cs typeface="DejaVu Sans"/>
-                          <a:ea typeface="DejaVu Sans"/>
-                          <a:sym typeface="DejaVu Sans"/>
-                        </a:rPr>
-                        <a:t>3.94 (3.71, 4.17)</a:t>
-                      </a:r>
-                    </a:p>
-                  </a:txBody>
-                  <a:tcPr anchor="ctr" marB="63500" marT="63500" marR="0" marL="0">
-                    <a:lnL algn="ctr" cmpd="sng" cap="flat" w="0">
-                      <a:noFill/>
-                      <a:prstDash val="solid"/>
-                    </a:lnL>
-                    <a:lnR algn="ctr" cmpd="sng" cap="flat" w="0">
-                      <a:noFill/>
-                      <a:prstDash val="solid"/>
-                    </a:lnR>
-                    <a:lnT algn="ctr" cmpd="sng" cap="flat" w="0">
-                      <a:noFill/>
-                      <a:prstDash val="solid"/>
-                    </a:lnT>
-                    <a:lnB algn="ctr" cmpd="sng" cap="flat" w="0">
-                      <a:noFill/>
-                      <a:prstDash val="solid"/>
-                    </a:lnB>
-                    <a:solidFill>
-                      <a:srgbClr val="FFFFFF">
-                        <a:alpha val="0"/>
-                      </a:srgbClr>
-                    </a:solidFill>
-                  </a:tcPr>
-                </a:tc>
-                <a:tc>
-                  <a:txBody>
-                    <a:bodyPr/>
-                    <a:lstStyle/>
-                    <a:p>
-                      <a:pPr algn="l" marL="63500" marR="63500">
-                        <a:lnSpc>
-                          <a:spcPct val="100000"/>
-                        </a:lnSpc>
-                        <a:spcBef>
-                          <a:spcPts val="500"/>
-                        </a:spcBef>
-                        <a:spcAft>
-                          <a:spcPts val="500"/>
-                        </a:spcAft>
-                        <a:buNone/>
-                      </a:pPr>
-                      <a:r>
-                        <a:rPr cap="none" sz="1100" i="0" b="0" u="none" strike="noStrike">
-                          <a:solidFill>
-                            <a:srgbClr val="000000">
-                              <a:alpha val="100000"/>
-                            </a:srgbClr>
-                          </a:solidFill>
-                          <a:latin typeface="DejaVu Sans"/>
-                          <a:cs typeface="DejaVu Sans"/>
-                          <a:ea typeface="DejaVu Sans"/>
-                          <a:sym typeface="DejaVu Sans"/>
-                        </a:rPr>
-                        <a:t>32.6</a:t>
-                      </a:r>
-                    </a:p>
-                  </a:txBody>
-                  <a:tcPr anchor="ctr" marB="63500" marT="63500" marR="0" marL="0">
-                    <a:lnL algn="ctr" cmpd="sng" cap="flat" w="0">
-                      <a:noFill/>
-                      <a:prstDash val="solid"/>
-                    </a:lnL>
-                    <a:lnR algn="ctr" cmpd="sng" cap="flat" w="0">
-                      <a:noFill/>
-                      <a:prstDash val="solid"/>
-                    </a:lnR>
-                    <a:lnT algn="ctr" cmpd="sng" cap="flat" w="0">
-                      <a:noFill/>
-                      <a:prstDash val="solid"/>
-                    </a:lnT>
-                    <a:lnB algn="ctr" cmpd="sng" cap="flat" w="0">
-                      <a:noFill/>
-                      <a:prstDash val="solid"/>
-                    </a:lnB>
-                    <a:solidFill>
-                      <a:srgbClr val="FFFFFF">
-                        <a:alpha val="0"/>
-                      </a:srgbClr>
-                    </a:solidFill>
-                  </a:tcPr>
-                </a:tc>
-                <a:tc>
-                  <a:txBody>
-                    <a:bodyPr/>
-                    <a:lstStyle/>
-                    <a:p>
-                      <a:pPr algn="l" marL="63500" marR="63500">
-                        <a:lnSpc>
-                          <a:spcPct val="100000"/>
-                        </a:lnSpc>
-                        <a:spcBef>
-                          <a:spcPts val="500"/>
-                        </a:spcBef>
-                        <a:spcAft>
-                          <a:spcPts val="500"/>
-                        </a:spcAft>
-                        <a:buNone/>
-                      </a:pPr>
-                      <a:r>
-                        <a:rPr cap="none" sz="1100" i="0" b="0" u="none" strike="noStrike">
-                          <a:solidFill>
-                            <a:srgbClr val="000000">
-                              <a:alpha val="100000"/>
-                            </a:srgbClr>
-                          </a:solidFill>
-                          <a:latin typeface="DejaVu Sans"/>
-                          <a:cs typeface="DejaVu Sans"/>
-                          <a:ea typeface="DejaVu Sans"/>
-                          <a:sym typeface="DejaVu Sans"/>
-                        </a:rPr>
-                        <a:t>1.94&lt;</a:t>
-                      </a:r>
-                    </a:p>
-                  </a:txBody>
-                  <a:tcPr anchor="ctr" marB="63500" marT="63500" marR="0" marL="0">
-                    <a:lnL algn="ctr" cmpd="sng" cap="flat" w="0">
-                      <a:noFill/>
-                      <a:prstDash val="solid"/>
-                    </a:lnL>
-                    <a:lnR algn="ctr" cmpd="sng" cap="flat" w="0">
-                      <a:noFill/>
-                      <a:prstDash val="solid"/>
-                    </a:lnR>
-                    <a:lnT algn="ctr" cmpd="sng" cap="flat" w="0">
-                      <a:noFill/>
-                      <a:prstDash val="solid"/>
-                    </a:lnT>
-                    <a:lnB algn="ctr" cmpd="sng" cap="flat" w="0">
-                      <a:noFill/>
-                      <a:prstDash val="solid"/>
-                    </a:lnB>
-                    <a:solidFill>
-                      <a:srgbClr val="FFFFFF">
-                        <a:alpha val="0"/>
-                      </a:srgbClr>
-                    </a:solidFill>
-                  </a:tcPr>
-                </a:tc>
-              </a:tr>
-              <a:tr h="401320">
-                <a:tc>
-                  <a:txBody>
-                    <a:bodyPr/>
-                    <a:lstStyle/>
-                    <a:p>
-                      <a:pPr algn="l" marL="63500" marR="63500">
-                        <a:lnSpc>
-                          <a:spcPct val="100000"/>
-                        </a:lnSpc>
-                        <a:spcBef>
-                          <a:spcPts val="500"/>
-                        </a:spcBef>
-                        <a:spcAft>
-                          <a:spcPts val="500"/>
-                        </a:spcAft>
-                        <a:buNone/>
-                      </a:pPr>
-                      <a:r>
-                        <a:rPr cap="none" sz="1200" i="0" b="0" u="none" strike="noStrike">
-                          <a:solidFill>
-                            <a:srgbClr val="000000">
-                              <a:alpha val="100000"/>
-                            </a:srgbClr>
-                          </a:solidFill>
-                          <a:latin typeface="Helvetica"/>
-                          <a:cs typeface="Helvetica"/>
-                          <a:ea typeface="Helvetica"/>
-                          <a:sym typeface="Helvetica"/>
-                        </a:rPr>
-                        <a:t>log Vc</a:t>
-                      </a:r>
-                    </a:p>
-                  </a:txBody>
-                  <a:tcPr anchor="ctr" marB="63500" marT="63500" marR="0" marL="0">
-                    <a:lnL algn="ctr" cmpd="sng" cap="flat" w="0">
-                      <a:noFill/>
-                      <a:prstDash val="solid"/>
-                    </a:lnL>
-                    <a:lnR algn="ctr" cmpd="sng" cap="flat" w="0">
-                      <a:noFill/>
-                      <a:prstDash val="solid"/>
-                    </a:lnR>
-                    <a:lnT algn="ctr" cmpd="sng" cap="flat" w="0">
-                      <a:noFill/>
-                      <a:prstDash val="solid"/>
-                    </a:lnT>
-                    <a:lnB algn="ctr" cmpd="sng" cap="flat" w="0">
-                      <a:noFill/>
-                      <a:prstDash val="solid"/>
-                    </a:lnB>
-                    <a:solidFill>
-                      <a:srgbClr val="FFFFFF">
-                        <a:alpha val="0"/>
-                      </a:srgbClr>
-                    </a:solidFill>
-                  </a:tcPr>
-                </a:tc>
-                <a:tc>
-                  <a:txBody>
-                    <a:bodyPr/>
-                    <a:lstStyle/>
-                    <a:p>
-                      <a:pPr algn="l" marL="63500" marR="63500">
-                        <a:lnSpc>
-                          <a:spcPct val="100000"/>
-                        </a:lnSpc>
-                        <a:spcBef>
-                          <a:spcPts val="500"/>
-                        </a:spcBef>
-                        <a:spcAft>
-                          <a:spcPts val="500"/>
-                        </a:spcAft>
-                        <a:buNone/>
-                      </a:pPr>
-                      <a:r>
-                        <a:rPr cap="none" sz="1100" i="0" b="0" u="none" strike="noStrike">
-                          <a:solidFill>
-                            <a:srgbClr val="000000">
-                              <a:alpha val="100000"/>
-                            </a:srgbClr>
-                          </a:solidFill>
-                          <a:latin typeface="DejaVu Sans"/>
-                          <a:cs typeface="DejaVu Sans"/>
-                          <a:ea typeface="DejaVu Sans"/>
-                          <a:sym typeface="DejaVu Sans"/>
-                        </a:rPr>
-                        <a:t>4.20</a:t>
-                      </a:r>
-                    </a:p>
-                  </a:txBody>
-                  <a:tcPr anchor="ctr" marB="63500" marT="63500" marR="0" marL="0">
-                    <a:lnL algn="ctr" cmpd="sng" cap="flat" w="0">
-                      <a:noFill/>
-                      <a:prstDash val="solid"/>
-                    </a:lnL>
-                    <a:lnR algn="ctr" cmpd="sng" cap="flat" w="0">
-                      <a:noFill/>
-                      <a:prstDash val="solid"/>
-                    </a:lnR>
-                    <a:lnT algn="ctr" cmpd="sng" cap="flat" w="0">
-                      <a:noFill/>
-                      <a:prstDash val="solid"/>
-                    </a:lnT>
-                    <a:lnB algn="ctr" cmpd="sng" cap="flat" w="0">
-                      <a:noFill/>
-                      <a:prstDash val="solid"/>
-                    </a:lnB>
-                    <a:solidFill>
-                      <a:srgbClr val="FFFFFF">
-                        <a:alpha val="0"/>
-                      </a:srgbClr>
-                    </a:solidFill>
-                  </a:tcPr>
-                </a:tc>
-                <a:tc>
-                  <a:txBody>
-                    <a:bodyPr/>
-                    <a:lstStyle/>
-                    <a:p>
-                      <a:pPr algn="l" marL="63500" marR="63500">
-                        <a:lnSpc>
-                          <a:spcPct val="100000"/>
-                        </a:lnSpc>
-                        <a:spcBef>
-                          <a:spcPts val="500"/>
-                        </a:spcBef>
-                        <a:spcAft>
-                          <a:spcPts val="500"/>
-                        </a:spcAft>
-                        <a:buNone/>
-                      </a:pPr>
-                      <a:r>
-                        <a:rPr cap="none" sz="1100" i="0" b="0" u="none" strike="noStrike">
-                          <a:solidFill>
-                            <a:srgbClr val="000000">
-                              <a:alpha val="100000"/>
-                            </a:srgbClr>
-                          </a:solidFill>
-                          <a:latin typeface="DejaVu Sans"/>
-                          <a:cs typeface="DejaVu Sans"/>
-                          <a:ea typeface="DejaVu Sans"/>
-                          <a:sym typeface="DejaVu Sans"/>
-                        </a:rPr>
-                        <a:t>0.0295</a:t>
-                      </a:r>
-                    </a:p>
-                  </a:txBody>
-                  <a:tcPr anchor="ctr" marB="63500" marT="63500" marR="0" marL="0">
-                    <a:lnL algn="ctr" cmpd="sng" cap="flat" w="0">
-                      <a:noFill/>
-                      <a:prstDash val="solid"/>
-                    </a:lnL>
-                    <a:lnR algn="ctr" cmpd="sng" cap="flat" w="0">
-                      <a:noFill/>
-                      <a:prstDash val="solid"/>
-                    </a:lnR>
-                    <a:lnT algn="ctr" cmpd="sng" cap="flat" w="0">
-                      <a:noFill/>
-                      <a:prstDash val="solid"/>
-                    </a:lnT>
-                    <a:lnB algn="ctr" cmpd="sng" cap="flat" w="0">
-                      <a:noFill/>
-                      <a:prstDash val="solid"/>
-                    </a:lnB>
-                    <a:solidFill>
-                      <a:srgbClr val="FFFFFF">
-                        <a:alpha val="0"/>
-                      </a:srgbClr>
-                    </a:solidFill>
-                  </a:tcPr>
-                </a:tc>
-                <a:tc>
-                  <a:txBody>
-                    <a:bodyPr/>
-                    <a:lstStyle/>
-                    <a:p>
-                      <a:pPr algn="l" marL="63500" marR="63500">
-                        <a:lnSpc>
-                          <a:spcPct val="100000"/>
-                        </a:lnSpc>
-                        <a:spcBef>
-                          <a:spcPts val="500"/>
-                        </a:spcBef>
-                        <a:spcAft>
-                          <a:spcPts val="500"/>
-                        </a:spcAft>
-                        <a:buNone/>
-                      </a:pPr>
-                      <a:r>
-                        <a:rPr cap="none" sz="1100" i="0" b="0" u="none" strike="noStrike">
-                          <a:solidFill>
-                            <a:srgbClr val="000000">
-                              <a:alpha val="100000"/>
-                            </a:srgbClr>
-                          </a:solidFill>
-                          <a:latin typeface="DejaVu Sans"/>
-                          <a:cs typeface="DejaVu Sans"/>
-                          <a:ea typeface="DejaVu Sans"/>
-                          <a:sym typeface="DejaVu Sans"/>
-                        </a:rPr>
-                        <a:t>0.703</a:t>
-                      </a:r>
-                    </a:p>
-                  </a:txBody>
-                  <a:tcPr anchor="ctr" marB="63500" marT="63500" marR="0" marL="0">
-                    <a:lnL algn="ctr" cmpd="sng" cap="flat" w="0">
-                      <a:noFill/>
-                      <a:prstDash val="solid"/>
-                    </a:lnL>
-                    <a:lnR algn="ctr" cmpd="sng" cap="flat" w="0">
-                      <a:noFill/>
-                      <a:prstDash val="solid"/>
-                    </a:lnR>
-                    <a:lnT algn="ctr" cmpd="sng" cap="flat" w="0">
-                      <a:noFill/>
-                      <a:prstDash val="solid"/>
-                    </a:lnT>
-                    <a:lnB algn="ctr" cmpd="sng" cap="flat" w="0">
-                      <a:noFill/>
-                      <a:prstDash val="solid"/>
-                    </a:lnB>
-                    <a:solidFill>
-                      <a:srgbClr val="FFFFFF">
-                        <a:alpha val="0"/>
-                      </a:srgbClr>
-                    </a:solidFill>
-                  </a:tcPr>
-                </a:tc>
-                <a:tc>
-                  <a:txBody>
-                    <a:bodyPr/>
-                    <a:lstStyle/>
-                    <a:p>
-                      <a:pPr algn="l" marL="63500" marR="63500">
-                        <a:lnSpc>
-                          <a:spcPct val="100000"/>
-                        </a:lnSpc>
-                        <a:spcBef>
-                          <a:spcPts val="500"/>
-                        </a:spcBef>
-                        <a:spcAft>
-                          <a:spcPts val="500"/>
-                        </a:spcAft>
-                        <a:buNone/>
-                      </a:pPr>
-                      <a:r>
-                        <a:rPr cap="none" sz="1100" i="0" b="0" u="none" strike="noStrike">
-                          <a:solidFill>
-                            <a:srgbClr val="000000">
-                              <a:alpha val="100000"/>
-                            </a:srgbClr>
-                          </a:solidFill>
-                          <a:latin typeface="DejaVu Sans"/>
-                          <a:cs typeface="DejaVu Sans"/>
-                          <a:ea typeface="DejaVu Sans"/>
-                          <a:sym typeface="DejaVu Sans"/>
-                        </a:rPr>
-                        <a:t>66.6 (62.8, 70.5)</a:t>
-                      </a:r>
-                    </a:p>
-                  </a:txBody>
-                  <a:tcPr anchor="ctr" marB="63500" marT="63500" marR="0" marL="0">
-                    <a:lnL algn="ctr" cmpd="sng" cap="flat" w="0">
-                      <a:noFill/>
-                      <a:prstDash val="solid"/>
-                    </a:lnL>
-                    <a:lnR algn="ctr" cmpd="sng" cap="flat" w="0">
-                      <a:noFill/>
-                      <a:prstDash val="solid"/>
-                    </a:lnR>
-                    <a:lnT algn="ctr" cmpd="sng" cap="flat" w="0">
-                      <a:noFill/>
-                      <a:prstDash val="solid"/>
-                    </a:lnT>
-                    <a:lnB algn="ctr" cmpd="sng" cap="flat" w="0">
-                      <a:noFill/>
-                      <a:prstDash val="solid"/>
-                    </a:lnB>
-                    <a:solidFill>
-                      <a:srgbClr val="FFFFFF">
-                        <a:alpha val="0"/>
-                      </a:srgbClr>
-                    </a:solidFill>
-                  </a:tcPr>
-                </a:tc>
-                <a:tc>
-                  <a:txBody>
-                    <a:bodyPr/>
-                    <a:lstStyle/>
-                    <a:p>
-                      <a:pPr algn="l" marL="63500" marR="63500">
-                        <a:lnSpc>
-                          <a:spcPct val="100000"/>
-                        </a:lnSpc>
-                        <a:spcBef>
-                          <a:spcPts val="500"/>
-                        </a:spcBef>
-                        <a:spcAft>
-                          <a:spcPts val="500"/>
-                        </a:spcAft>
-                        <a:buNone/>
-                      </a:pPr>
-                      <a:r>
-                        <a:rPr cap="none" sz="1100" i="0" b="0" u="none" strike="noStrike">
-                          <a:solidFill>
-                            <a:srgbClr val="000000">
-                              <a:alpha val="100000"/>
-                            </a:srgbClr>
-                          </a:solidFill>
-                          <a:latin typeface="DejaVu Sans"/>
-                          <a:cs typeface="DejaVu Sans"/>
-                          <a:ea typeface="DejaVu Sans"/>
-                          <a:sym typeface="DejaVu Sans"/>
-                        </a:rPr>
-                        <a:t>32.3</a:t>
-                      </a:r>
-                    </a:p>
-                  </a:txBody>
-                  <a:tcPr anchor="ctr" marB="63500" marT="63500" marR="0" marL="0">
-                    <a:lnL algn="ctr" cmpd="sng" cap="flat" w="0">
-                      <a:noFill/>
-                      <a:prstDash val="solid"/>
-                    </a:lnL>
-                    <a:lnR algn="ctr" cmpd="sng" cap="flat" w="0">
-                      <a:noFill/>
-                      <a:prstDash val="solid"/>
-                    </a:lnR>
-                    <a:lnT algn="ctr" cmpd="sng" cap="flat" w="0">
-                      <a:noFill/>
-                      <a:prstDash val="solid"/>
-                    </a:lnT>
-                    <a:lnB algn="ctr" cmpd="sng" cap="flat" w="0">
-                      <a:noFill/>
-                      <a:prstDash val="solid"/>
-                    </a:lnB>
-                    <a:solidFill>
-                      <a:srgbClr val="FFFFFF">
-                        <a:alpha val="0"/>
-                      </a:srgbClr>
-                    </a:solidFill>
-                  </a:tcPr>
-                </a:tc>
-                <a:tc>
-                  <a:txBody>
-                    <a:bodyPr/>
-                    <a:lstStyle/>
-                    <a:p>
-                      <a:pPr algn="l" marL="63500" marR="63500">
-                        <a:lnSpc>
-                          <a:spcPct val="100000"/>
-                        </a:lnSpc>
-                        <a:spcBef>
-                          <a:spcPts val="500"/>
-                        </a:spcBef>
-                        <a:spcAft>
-                          <a:spcPts val="500"/>
-                        </a:spcAft>
-                        <a:buNone/>
-                      </a:pPr>
-                      <a:r>
-                        <a:rPr cap="none" sz="1100" i="0" b="0" u="none" strike="noStrike">
-                          <a:solidFill>
-                            <a:srgbClr val="000000">
-                              <a:alpha val="100000"/>
-                            </a:srgbClr>
-                          </a:solidFill>
-                          <a:latin typeface="DejaVu Sans"/>
-                          <a:cs typeface="DejaVu Sans"/>
-                          <a:ea typeface="DejaVu Sans"/>
-                          <a:sym typeface="DejaVu Sans"/>
-                        </a:rPr>
-                        <a:t>2.46&lt;</a:t>
-                      </a:r>
-                    </a:p>
-                  </a:txBody>
-                  <a:tcPr anchor="ctr" marB="63500" marT="63500" marR="0" marL="0">
-                    <a:lnL algn="ctr" cmpd="sng" cap="flat" w="0">
-                      <a:noFill/>
-                      <a:prstDash val="solid"/>
-                    </a:lnL>
-                    <a:lnR algn="ctr" cmpd="sng" cap="flat" w="0">
-                      <a:noFill/>
-                      <a:prstDash val="solid"/>
-                    </a:lnR>
-                    <a:lnT algn="ctr" cmpd="sng" cap="flat" w="0">
-                      <a:noFill/>
-                      <a:prstDash val="solid"/>
-                    </a:lnT>
-                    <a:lnB algn="ctr" cmpd="sng" cap="flat" w="0">
-                      <a:noFill/>
-                      <a:prstDash val="solid"/>
-                    </a:lnB>
-                    <a:solidFill>
-                      <a:srgbClr val="FFFFFF">
-                        <a:alpha val="0"/>
-                      </a:srgbClr>
-                    </a:solidFill>
-                  </a:tcPr>
-                </a:tc>
-              </a:tr>
-              <a:tr h="401320">
-                <a:tc>
-                  <a:txBody>
-                    <a:bodyPr/>
-                    <a:lstStyle/>
-                    <a:p>
-                      <a:pPr algn="l" marL="63500" marR="63500">
-                        <a:lnSpc>
-                          <a:spcPct val="100000"/>
-                        </a:lnSpc>
-                        <a:spcBef>
-                          <a:spcPts val="500"/>
-                        </a:spcBef>
-                        <a:spcAft>
-                          <a:spcPts val="500"/>
-                        </a:spcAft>
-                        <a:buNone/>
-                      </a:pPr>
-                      <a:r>
-                        <a:rPr cap="none" sz="1200" i="0" b="0" u="none" strike="noStrike">
-                          <a:solidFill>
-                            <a:srgbClr val="000000">
-                              <a:alpha val="100000"/>
-                            </a:srgbClr>
-                          </a:solidFill>
-                          <a:latin typeface="Helvetica"/>
-                          <a:cs typeface="Helvetica"/>
-                          <a:ea typeface="Helvetica"/>
-                          <a:sym typeface="Helvetica"/>
-                        </a:rPr>
-                        <a:t>log Q</a:t>
-                      </a:r>
-                    </a:p>
-                  </a:txBody>
-                  <a:tcPr anchor="ctr" marB="63500" marT="63500" marR="0" marL="0">
-                    <a:lnL algn="ctr" cmpd="sng" cap="flat" w="0">
-                      <a:noFill/>
-                      <a:prstDash val="solid"/>
-                    </a:lnL>
-                    <a:lnR algn="ctr" cmpd="sng" cap="flat" w="0">
-                      <a:noFill/>
-                      <a:prstDash val="solid"/>
-                    </a:lnR>
-                    <a:lnT algn="ctr" cmpd="sng" cap="flat" w="0">
-                      <a:noFill/>
-                      <a:prstDash val="solid"/>
-                    </a:lnT>
-                    <a:lnB algn="ctr" cmpd="sng" cap="flat" w="0">
-                      <a:noFill/>
-                      <a:prstDash val="solid"/>
-                    </a:lnB>
-                    <a:solidFill>
-                      <a:srgbClr val="FFFFFF">
-                        <a:alpha val="0"/>
-                      </a:srgbClr>
-                    </a:solidFill>
-                  </a:tcPr>
-                </a:tc>
-                <a:tc>
-                  <a:txBody>
-                    <a:bodyPr/>
-                    <a:lstStyle/>
-                    <a:p>
-                      <a:pPr algn="l" marL="63500" marR="63500">
-                        <a:lnSpc>
-                          <a:spcPct val="100000"/>
-                        </a:lnSpc>
-                        <a:spcBef>
-                          <a:spcPts val="500"/>
-                        </a:spcBef>
-                        <a:spcAft>
-                          <a:spcPts val="500"/>
-                        </a:spcAft>
-                        <a:buNone/>
-                      </a:pPr>
-                      <a:r>
-                        <a:rPr cap="none" sz="1100" i="0" b="0" u="none" strike="noStrike">
-                          <a:solidFill>
-                            <a:srgbClr val="000000">
-                              <a:alpha val="100000"/>
-                            </a:srgbClr>
-                          </a:solidFill>
-                          <a:latin typeface="DejaVu Sans"/>
-                          <a:cs typeface="DejaVu Sans"/>
-                          <a:ea typeface="DejaVu Sans"/>
-                          <a:sym typeface="DejaVu Sans"/>
-                        </a:rPr>
-                        <a:t>1.38</a:t>
-                      </a:r>
-                    </a:p>
-                  </a:txBody>
-                  <a:tcPr anchor="ctr" marB="63500" marT="63500" marR="0" marL="0">
-                    <a:lnL algn="ctr" cmpd="sng" cap="flat" w="0">
-                      <a:noFill/>
-                      <a:prstDash val="solid"/>
-                    </a:lnL>
-                    <a:lnR algn="ctr" cmpd="sng" cap="flat" w="0">
-                      <a:noFill/>
-                      <a:prstDash val="solid"/>
-                    </a:lnR>
-                    <a:lnT algn="ctr" cmpd="sng" cap="flat" w="0">
-                      <a:noFill/>
-                      <a:prstDash val="solid"/>
-                    </a:lnT>
-                    <a:lnB algn="ctr" cmpd="sng" cap="flat" w="0">
-                      <a:noFill/>
-                      <a:prstDash val="solid"/>
-                    </a:lnB>
-                    <a:solidFill>
-                      <a:srgbClr val="FFFFFF">
-                        <a:alpha val="0"/>
-                      </a:srgbClr>
-                    </a:solidFill>
-                  </a:tcPr>
-                </a:tc>
-                <a:tc>
-                  <a:txBody>
-                    <a:bodyPr/>
-                    <a:lstStyle/>
-                    <a:p>
-                      <a:pPr algn="l" marL="63500" marR="63500">
-                        <a:lnSpc>
-                          <a:spcPct val="100000"/>
-                        </a:lnSpc>
-                        <a:spcBef>
-                          <a:spcPts val="500"/>
-                        </a:spcBef>
-                        <a:spcAft>
-                          <a:spcPts val="500"/>
-                        </a:spcAft>
-                        <a:buNone/>
-                      </a:pPr>
-                      <a:r>
-                        <a:rPr cap="none" sz="1100" i="0" b="0" u="none" strike="noStrike">
-                          <a:solidFill>
-                            <a:srgbClr val="000000">
-                              <a:alpha val="100000"/>
-                            </a:srgbClr>
-                          </a:solidFill>
-                          <a:latin typeface="DejaVu Sans"/>
-                          <a:cs typeface="DejaVu Sans"/>
-                          <a:ea typeface="DejaVu Sans"/>
-                          <a:sym typeface="DejaVu Sans"/>
-                        </a:rPr>
-                        <a:t>0.0547</a:t>
-                      </a:r>
-                    </a:p>
-                  </a:txBody>
-                  <a:tcPr anchor="ctr" marB="63500" marT="63500" marR="0" marL="0">
-                    <a:lnL algn="ctr" cmpd="sng" cap="flat" w="0">
-                      <a:noFill/>
-                      <a:prstDash val="solid"/>
-                    </a:lnL>
-                    <a:lnR algn="ctr" cmpd="sng" cap="flat" w="0">
-                      <a:noFill/>
-                      <a:prstDash val="solid"/>
-                    </a:lnR>
-                    <a:lnT algn="ctr" cmpd="sng" cap="flat" w="0">
-                      <a:noFill/>
-                      <a:prstDash val="solid"/>
-                    </a:lnT>
-                    <a:lnB algn="ctr" cmpd="sng" cap="flat" w="0">
-                      <a:noFill/>
-                      <a:prstDash val="solid"/>
-                    </a:lnB>
-                    <a:solidFill>
-                      <a:srgbClr val="FFFFFF">
-                        <a:alpha val="0"/>
-                      </a:srgbClr>
-                    </a:solidFill>
-                  </a:tcPr>
-                </a:tc>
-                <a:tc>
-                  <a:txBody>
-                    <a:bodyPr/>
-                    <a:lstStyle/>
-                    <a:p>
-                      <a:pPr algn="l" marL="63500" marR="63500">
-                        <a:lnSpc>
-                          <a:spcPct val="100000"/>
-                        </a:lnSpc>
-                        <a:spcBef>
-                          <a:spcPts val="500"/>
-                        </a:spcBef>
-                        <a:spcAft>
-                          <a:spcPts val="500"/>
-                        </a:spcAft>
-                        <a:buNone/>
-                      </a:pPr>
-                      <a:r>
-                        <a:rPr cap="none" sz="1100" i="0" b="0" u="none" strike="noStrike">
-                          <a:solidFill>
-                            <a:srgbClr val="000000">
-                              <a:alpha val="100000"/>
-                            </a:srgbClr>
-                          </a:solidFill>
-                          <a:latin typeface="DejaVu Sans"/>
-                          <a:cs typeface="DejaVu Sans"/>
-                          <a:ea typeface="DejaVu Sans"/>
-                          <a:sym typeface="DejaVu Sans"/>
-                        </a:rPr>
-                        <a:t>3.96</a:t>
-                      </a:r>
-                    </a:p>
-                  </a:txBody>
-                  <a:tcPr anchor="ctr" marB="63500" marT="63500" marR="0" marL="0">
-                    <a:lnL algn="ctr" cmpd="sng" cap="flat" w="0">
-                      <a:noFill/>
-                      <a:prstDash val="solid"/>
-                    </a:lnL>
-                    <a:lnR algn="ctr" cmpd="sng" cap="flat" w="0">
-                      <a:noFill/>
-                      <a:prstDash val="solid"/>
-                    </a:lnR>
-                    <a:lnT algn="ctr" cmpd="sng" cap="flat" w="0">
-                      <a:noFill/>
-                      <a:prstDash val="solid"/>
-                    </a:lnT>
-                    <a:lnB algn="ctr" cmpd="sng" cap="flat" w="0">
-                      <a:noFill/>
-                      <a:prstDash val="solid"/>
-                    </a:lnB>
-                    <a:solidFill>
-                      <a:srgbClr val="FFFFFF">
-                        <a:alpha val="0"/>
-                      </a:srgbClr>
-                    </a:solidFill>
-                  </a:tcPr>
-                </a:tc>
-                <a:tc>
-                  <a:txBody>
-                    <a:bodyPr/>
-                    <a:lstStyle/>
-                    <a:p>
-                      <a:pPr algn="l" marL="63500" marR="63500">
-                        <a:lnSpc>
-                          <a:spcPct val="100000"/>
-                        </a:lnSpc>
-                        <a:spcBef>
-                          <a:spcPts val="500"/>
-                        </a:spcBef>
-                        <a:spcAft>
-                          <a:spcPts val="500"/>
-                        </a:spcAft>
-                        <a:buNone/>
-                      </a:pPr>
-                      <a:r>
-                        <a:rPr cap="none" sz="1100" i="0" b="0" u="none" strike="noStrike">
-                          <a:solidFill>
-                            <a:srgbClr val="000000">
-                              <a:alpha val="100000"/>
-                            </a:srgbClr>
-                          </a:solidFill>
-                          <a:latin typeface="DejaVu Sans"/>
-                          <a:cs typeface="DejaVu Sans"/>
-                          <a:ea typeface="DejaVu Sans"/>
-                          <a:sym typeface="DejaVu Sans"/>
-                        </a:rPr>
-                        <a:t>3.98 (3.57, 4.42)</a:t>
-                      </a:r>
-                    </a:p>
-                  </a:txBody>
-                  <a:tcPr anchor="ctr" marB="63500" marT="63500" marR="0" marL="0">
-                    <a:lnL algn="ctr" cmpd="sng" cap="flat" w="0">
-                      <a:noFill/>
-                      <a:prstDash val="solid"/>
-                    </a:lnL>
-                    <a:lnR algn="ctr" cmpd="sng" cap="flat" w="0">
-                      <a:noFill/>
-                      <a:prstDash val="solid"/>
-                    </a:lnR>
-                    <a:lnT algn="ctr" cmpd="sng" cap="flat" w="0">
-                      <a:noFill/>
-                      <a:prstDash val="solid"/>
-                    </a:lnT>
-                    <a:lnB algn="ctr" cmpd="sng" cap="flat" w="0">
-                      <a:noFill/>
-                      <a:prstDash val="solid"/>
-                    </a:lnB>
-                    <a:solidFill>
-                      <a:srgbClr val="FFFFFF">
-                        <a:alpha val="0"/>
-                      </a:srgbClr>
-                    </a:solidFill>
-                  </a:tcPr>
-                </a:tc>
-                <a:tc>
-                  <a:txBody>
-                    <a:bodyPr/>
-                    <a:lstStyle/>
-                    <a:p>
-                      <a:pPr algn="l" marL="63500" marR="63500">
-                        <a:lnSpc>
-                          <a:spcPct val="100000"/>
-                        </a:lnSpc>
-                        <a:spcBef>
-                          <a:spcPts val="500"/>
-                        </a:spcBef>
-                        <a:spcAft>
-                          <a:spcPts val="500"/>
-                        </a:spcAft>
-                        <a:buNone/>
-                      </a:pPr>
-                      <a:r>
-                        <a:rPr cap="none" sz="1100" i="0" b="0" u="none" strike="noStrike">
-                          <a:solidFill>
-                            <a:srgbClr val="000000">
-                              <a:alpha val="100000"/>
-                            </a:srgbClr>
-                          </a:solidFill>
-                          <a:latin typeface="DejaVu Sans"/>
-                          <a:cs typeface="DejaVu Sans"/>
-                          <a:ea typeface="DejaVu Sans"/>
-                          <a:sym typeface="DejaVu Sans"/>
-                        </a:rPr>
-                        <a:t>32.7</a:t>
-                      </a:r>
-                    </a:p>
-                  </a:txBody>
-                  <a:tcPr anchor="ctr" marB="63500" marT="63500" marR="0" marL="0">
-                    <a:lnL algn="ctr" cmpd="sng" cap="flat" w="0">
-                      <a:noFill/>
-                      <a:prstDash val="solid"/>
-                    </a:lnL>
-                    <a:lnR algn="ctr" cmpd="sng" cap="flat" w="0">
-                      <a:noFill/>
-                      <a:prstDash val="solid"/>
-                    </a:lnR>
-                    <a:lnT algn="ctr" cmpd="sng" cap="flat" w="0">
-                      <a:noFill/>
-                      <a:prstDash val="solid"/>
-                    </a:lnT>
-                    <a:lnB algn="ctr" cmpd="sng" cap="flat" w="0">
-                      <a:noFill/>
-                      <a:prstDash val="solid"/>
-                    </a:lnB>
-                    <a:solidFill>
-                      <a:srgbClr val="FFFFFF">
-                        <a:alpha val="0"/>
-                      </a:srgbClr>
-                    </a:solidFill>
-                  </a:tcPr>
-                </a:tc>
-                <a:tc>
-                  <a:txBody>
-                    <a:bodyPr/>
-                    <a:lstStyle/>
-                    <a:p>
-                      <a:pPr algn="l" marL="63500" marR="63500">
-                        <a:lnSpc>
-                          <a:spcPct val="100000"/>
-                        </a:lnSpc>
-                        <a:spcBef>
-                          <a:spcPts val="500"/>
-                        </a:spcBef>
-                        <a:spcAft>
-                          <a:spcPts val="500"/>
-                        </a:spcAft>
-                        <a:buNone/>
-                      </a:pPr>
-                      <a:r>
-                        <a:rPr cap="none" sz="1100" i="0" b="0" u="none" strike="noStrike">
-                          <a:solidFill>
-                            <a:srgbClr val="000000">
-                              <a:alpha val="100000"/>
-                            </a:srgbClr>
-                          </a:solidFill>
-                          <a:latin typeface="DejaVu Sans"/>
-                          <a:cs typeface="DejaVu Sans"/>
-                          <a:ea typeface="DejaVu Sans"/>
-                          <a:sym typeface="DejaVu Sans"/>
-                        </a:rPr>
-                        <a:t>40.5&gt;</a:t>
-                      </a:r>
-                    </a:p>
-                  </a:txBody>
-                  <a:tcPr anchor="ctr" marB="63500" marT="63500" marR="0" marL="0">
-                    <a:lnL algn="ctr" cmpd="sng" cap="flat" w="0">
-                      <a:noFill/>
-                      <a:prstDash val="solid"/>
-                    </a:lnL>
-                    <a:lnR algn="ctr" cmpd="sng" cap="flat" w="0">
-                      <a:noFill/>
-                      <a:prstDash val="solid"/>
-                    </a:lnR>
-                    <a:lnT algn="ctr" cmpd="sng" cap="flat" w="0">
-                      <a:noFill/>
-                      <a:prstDash val="solid"/>
-                    </a:lnT>
-                    <a:lnB algn="ctr" cmpd="sng" cap="flat" w="0">
-                      <a:noFill/>
-                      <a:prstDash val="solid"/>
-                    </a:lnB>
-                    <a:solidFill>
-                      <a:srgbClr val="FFFFFF">
-                        <a:alpha val="0"/>
-                      </a:srgbClr>
-                    </a:solidFill>
-                  </a:tcPr>
-                </a:tc>
-              </a:tr>
-              <a:tr h="401320">
-                <a:tc>
-                  <a:txBody>
-                    <a:bodyPr/>
-                    <a:lstStyle/>
-                    <a:p>
-                      <a:pPr algn="l" marL="63500" marR="63500">
-                        <a:lnSpc>
-                          <a:spcPct val="100000"/>
-                        </a:lnSpc>
-                        <a:spcBef>
-                          <a:spcPts val="500"/>
-                        </a:spcBef>
-                        <a:spcAft>
-                          <a:spcPts val="500"/>
-                        </a:spcAft>
-                        <a:buNone/>
-                      </a:pPr>
-                      <a:r>
-                        <a:rPr cap="none" sz="1200" i="0" b="0" u="none" strike="noStrike">
-                          <a:solidFill>
-                            <a:srgbClr val="000000">
-                              <a:alpha val="100000"/>
-                            </a:srgbClr>
-                          </a:solidFill>
-                          <a:latin typeface="Helvetica"/>
-                          <a:cs typeface="Helvetica"/>
-                          <a:ea typeface="Helvetica"/>
-                          <a:sym typeface="Helvetica"/>
-                        </a:rPr>
-                        <a:t>log Vp</a:t>
-                      </a:r>
-                    </a:p>
-                  </a:txBody>
-                  <a:tcPr anchor="ctr" marB="63500" marT="63500" marR="0" marL="0">
-                    <a:lnL algn="ctr" cmpd="sng" cap="flat" w="0">
-                      <a:noFill/>
-                      <a:prstDash val="solid"/>
-                    </a:lnL>
-                    <a:lnR algn="ctr" cmpd="sng" cap="flat" w="0">
-                      <a:noFill/>
-                      <a:prstDash val="solid"/>
-                    </a:lnR>
-                    <a:lnT algn="ctr" cmpd="sng" cap="flat" w="0">
-                      <a:noFill/>
-                      <a:prstDash val="solid"/>
-                    </a:lnT>
-                    <a:lnB algn="ctr" cmpd="sng" cap="flat" w="0">
-                      <a:noFill/>
-                      <a:prstDash val="solid"/>
-                    </a:lnB>
-                    <a:solidFill>
-                      <a:srgbClr val="FFFFFF">
-                        <a:alpha val="0"/>
-                      </a:srgbClr>
-                    </a:solidFill>
-                  </a:tcPr>
-                </a:tc>
-                <a:tc>
-                  <a:txBody>
-                    <a:bodyPr/>
-                    <a:lstStyle/>
-                    <a:p>
-                      <a:pPr algn="l" marL="63500" marR="63500">
-                        <a:lnSpc>
-                          <a:spcPct val="100000"/>
-                        </a:lnSpc>
-                        <a:spcBef>
-                          <a:spcPts val="500"/>
-                        </a:spcBef>
-                        <a:spcAft>
-                          <a:spcPts val="500"/>
-                        </a:spcAft>
-                        <a:buNone/>
-                      </a:pPr>
-                      <a:r>
-                        <a:rPr cap="none" sz="1100" i="0" b="0" u="none" strike="noStrike">
-                          <a:solidFill>
-                            <a:srgbClr val="000000">
-                              <a:alpha val="100000"/>
-                            </a:srgbClr>
-                          </a:solidFill>
-                          <a:latin typeface="DejaVu Sans"/>
-                          <a:cs typeface="DejaVu Sans"/>
-                          <a:ea typeface="DejaVu Sans"/>
-                          <a:sym typeface="DejaVu Sans"/>
-                        </a:rPr>
-                        <a:t>3.88</a:t>
-                      </a:r>
-                    </a:p>
-                  </a:txBody>
-                  <a:tcPr anchor="ctr" marB="63500" marT="63500" marR="0" marL="0">
-                    <a:lnL algn="ctr" cmpd="sng" cap="flat" w="0">
-                      <a:noFill/>
-                      <a:prstDash val="solid"/>
-                    </a:lnL>
-                    <a:lnR algn="ctr" cmpd="sng" cap="flat" w="0">
-                      <a:noFill/>
-                      <a:prstDash val="solid"/>
-                    </a:lnR>
-                    <a:lnT algn="ctr" cmpd="sng" cap="flat" w="0">
-                      <a:noFill/>
-                      <a:prstDash val="solid"/>
-                    </a:lnT>
-                    <a:lnB algn="ctr" cmpd="sng" cap="flat" w="0">
-                      <a:noFill/>
-                      <a:prstDash val="solid"/>
-                    </a:lnB>
-                    <a:solidFill>
-                      <a:srgbClr val="FFFFFF">
-                        <a:alpha val="0"/>
-                      </a:srgbClr>
-                    </a:solidFill>
-                  </a:tcPr>
-                </a:tc>
-                <a:tc>
-                  <a:txBody>
-                    <a:bodyPr/>
-                    <a:lstStyle/>
-                    <a:p>
-                      <a:pPr algn="l" marL="63500" marR="63500">
-                        <a:lnSpc>
-                          <a:spcPct val="100000"/>
-                        </a:lnSpc>
-                        <a:spcBef>
-                          <a:spcPts val="500"/>
-                        </a:spcBef>
-                        <a:spcAft>
-                          <a:spcPts val="500"/>
-                        </a:spcAft>
-                        <a:buNone/>
-                      </a:pPr>
-                      <a:r>
-                        <a:rPr cap="none" sz="1100" i="0" b="0" u="none" strike="noStrike">
-                          <a:solidFill>
-                            <a:srgbClr val="000000">
-                              <a:alpha val="100000"/>
-                            </a:srgbClr>
-                          </a:solidFill>
-                          <a:latin typeface="DejaVu Sans"/>
-                          <a:cs typeface="DejaVu Sans"/>
-                          <a:ea typeface="DejaVu Sans"/>
-                          <a:sym typeface="DejaVu Sans"/>
-                        </a:rPr>
-                        <a:t>0.0348</a:t>
-                      </a:r>
-                    </a:p>
-                  </a:txBody>
-                  <a:tcPr anchor="ctr" marB="63500" marT="63500" marR="0" marL="0">
-                    <a:lnL algn="ctr" cmpd="sng" cap="flat" w="0">
-                      <a:noFill/>
-                      <a:prstDash val="solid"/>
-                    </a:lnL>
-                    <a:lnR algn="ctr" cmpd="sng" cap="flat" w="0">
-                      <a:noFill/>
-                      <a:prstDash val="solid"/>
-                    </a:lnR>
-                    <a:lnT algn="ctr" cmpd="sng" cap="flat" w="0">
-                      <a:noFill/>
-                      <a:prstDash val="solid"/>
-                    </a:lnT>
-                    <a:lnB algn="ctr" cmpd="sng" cap="flat" w="0">
-                      <a:noFill/>
-                      <a:prstDash val="solid"/>
-                    </a:lnB>
-                    <a:solidFill>
-                      <a:srgbClr val="FFFFFF">
-                        <a:alpha val="0"/>
-                      </a:srgbClr>
-                    </a:solidFill>
-                  </a:tcPr>
-                </a:tc>
-                <a:tc>
-                  <a:txBody>
-                    <a:bodyPr/>
-                    <a:lstStyle/>
-                    <a:p>
-                      <a:pPr algn="l" marL="63500" marR="63500">
-                        <a:lnSpc>
-                          <a:spcPct val="100000"/>
-                        </a:lnSpc>
-                        <a:spcBef>
-                          <a:spcPts val="500"/>
-                        </a:spcBef>
-                        <a:spcAft>
-                          <a:spcPts val="500"/>
-                        </a:spcAft>
-                        <a:buNone/>
-                      </a:pPr>
-                      <a:r>
-                        <a:rPr cap="none" sz="1100" i="0" b="0" u="none" strike="noStrike">
-                          <a:solidFill>
-                            <a:srgbClr val="000000">
-                              <a:alpha val="100000"/>
-                            </a:srgbClr>
-                          </a:solidFill>
-                          <a:latin typeface="DejaVu Sans"/>
-                          <a:cs typeface="DejaVu Sans"/>
-                          <a:ea typeface="DejaVu Sans"/>
-                          <a:sym typeface="DejaVu Sans"/>
-                        </a:rPr>
-                        <a:t>0.899</a:t>
-                      </a:r>
-                    </a:p>
-                  </a:txBody>
-                  <a:tcPr anchor="ctr" marB="63500" marT="63500" marR="0" marL="0">
-                    <a:lnL algn="ctr" cmpd="sng" cap="flat" w="0">
-                      <a:noFill/>
-                      <a:prstDash val="solid"/>
-                    </a:lnL>
-                    <a:lnR algn="ctr" cmpd="sng" cap="flat" w="0">
-                      <a:noFill/>
-                      <a:prstDash val="solid"/>
-                    </a:lnR>
-                    <a:lnT algn="ctr" cmpd="sng" cap="flat" w="0">
-                      <a:noFill/>
-                      <a:prstDash val="solid"/>
-                    </a:lnT>
-                    <a:lnB algn="ctr" cmpd="sng" cap="flat" w="0">
-                      <a:noFill/>
-                      <a:prstDash val="solid"/>
-                    </a:lnB>
-                    <a:solidFill>
-                      <a:srgbClr val="FFFFFF">
-                        <a:alpha val="0"/>
-                      </a:srgbClr>
-                    </a:solidFill>
-                  </a:tcPr>
-                </a:tc>
-                <a:tc>
-                  <a:txBody>
-                    <a:bodyPr/>
-                    <a:lstStyle/>
-                    <a:p>
-                      <a:pPr algn="l" marL="63500" marR="63500">
-                        <a:lnSpc>
-                          <a:spcPct val="100000"/>
-                        </a:lnSpc>
-                        <a:spcBef>
-                          <a:spcPts val="500"/>
-                        </a:spcBef>
-                        <a:spcAft>
-                          <a:spcPts val="500"/>
-                        </a:spcAft>
-                        <a:buNone/>
-                      </a:pPr>
-                      <a:r>
-                        <a:rPr cap="none" sz="1100" i="0" b="0" u="none" strike="noStrike">
-                          <a:solidFill>
-                            <a:srgbClr val="000000">
-                              <a:alpha val="100000"/>
-                            </a:srgbClr>
-                          </a:solidFill>
-                          <a:latin typeface="DejaVu Sans"/>
-                          <a:cs typeface="DejaVu Sans"/>
-                          <a:ea typeface="DejaVu Sans"/>
-                          <a:sym typeface="DejaVu Sans"/>
-                        </a:rPr>
-                        <a:t>48.3 (45.1, 51.7)</a:t>
-                      </a:r>
-                    </a:p>
-                  </a:txBody>
-                  <a:tcPr anchor="ctr" marB="63500" marT="63500" marR="0" marL="0">
-                    <a:lnL algn="ctr" cmpd="sng" cap="flat" w="0">
-                      <a:noFill/>
-                      <a:prstDash val="solid"/>
-                    </a:lnL>
-                    <a:lnR algn="ctr" cmpd="sng" cap="flat" w="0">
-                      <a:noFill/>
-                      <a:prstDash val="solid"/>
-                    </a:lnR>
-                    <a:lnT algn="ctr" cmpd="sng" cap="flat" w="0">
-                      <a:noFill/>
-                      <a:prstDash val="solid"/>
-                    </a:lnT>
-                    <a:lnB algn="ctr" cmpd="sng" cap="flat" w="0">
-                      <a:noFill/>
-                      <a:prstDash val="solid"/>
-                    </a:lnB>
-                    <a:solidFill>
-                      <a:srgbClr val="FFFFFF">
-                        <a:alpha val="0"/>
-                      </a:srgbClr>
-                    </a:solidFill>
-                  </a:tcPr>
-                </a:tc>
-                <a:tc>
-                  <a:txBody>
-                    <a:bodyPr/>
-                    <a:lstStyle/>
-                    <a:p>
-                      <a:pPr algn="l" marL="63500" marR="63500">
-                        <a:lnSpc>
-                          <a:spcPct val="100000"/>
-                        </a:lnSpc>
-                        <a:spcBef>
-                          <a:spcPts val="500"/>
-                        </a:spcBef>
-                        <a:spcAft>
-                          <a:spcPts val="500"/>
-                        </a:spcAft>
-                        <a:buNone/>
-                      </a:pPr>
-                      <a:r>
-                        <a:rPr cap="none" sz="1100" i="0" b="0" u="none" strike="noStrike">
-                          <a:solidFill>
-                            <a:srgbClr val="000000">
-                              <a:alpha val="100000"/>
-                            </a:srgbClr>
-                          </a:solidFill>
-                          <a:latin typeface="DejaVu Sans"/>
-                          <a:cs typeface="DejaVu Sans"/>
-                          <a:ea typeface="DejaVu Sans"/>
-                          <a:sym typeface="DejaVu Sans"/>
-                        </a:rPr>
-                        <a:t>27.5</a:t>
-                      </a:r>
-                    </a:p>
-                  </a:txBody>
-                  <a:tcPr anchor="ctr" marB="63500" marT="63500" marR="0" marL="0">
-                    <a:lnL algn="ctr" cmpd="sng" cap="flat" w="0">
-                      <a:noFill/>
-                      <a:prstDash val="solid"/>
-                    </a:lnL>
-                    <a:lnR algn="ctr" cmpd="sng" cap="flat" w="0">
-                      <a:noFill/>
-                      <a:prstDash val="solid"/>
-                    </a:lnR>
-                    <a:lnT algn="ctr" cmpd="sng" cap="flat" w="0">
-                      <a:noFill/>
-                      <a:prstDash val="solid"/>
-                    </a:lnT>
-                    <a:lnB algn="ctr" cmpd="sng" cap="flat" w="0">
-                      <a:noFill/>
-                      <a:prstDash val="solid"/>
-                    </a:lnB>
-                    <a:solidFill>
-                      <a:srgbClr val="FFFFFF">
-                        <a:alpha val="0"/>
-                      </a:srgbClr>
-                    </a:solidFill>
-                  </a:tcPr>
-                </a:tc>
-                <a:tc>
-                  <a:txBody>
-                    <a:bodyPr/>
-                    <a:lstStyle/>
-                    <a:p>
-                      <a:pPr algn="l" marL="63500" marR="63500">
-                        <a:lnSpc>
-                          <a:spcPct val="100000"/>
-                        </a:lnSpc>
-                        <a:spcBef>
-                          <a:spcPts val="500"/>
-                        </a:spcBef>
-                        <a:spcAft>
-                          <a:spcPts val="500"/>
-                        </a:spcAft>
-                        <a:buNone/>
-                      </a:pPr>
-                      <a:r>
-                        <a:rPr cap="none" sz="1100" i="0" b="0" u="none" strike="noStrike">
-                          <a:solidFill>
-                            <a:srgbClr val="000000">
-                              <a:alpha val="100000"/>
-                            </a:srgbClr>
-                          </a:solidFill>
-                          <a:latin typeface="DejaVu Sans"/>
-                          <a:cs typeface="DejaVu Sans"/>
-                          <a:ea typeface="DejaVu Sans"/>
-                          <a:sym typeface="DejaVu Sans"/>
-                        </a:rPr>
-                        <a:t>28.4=</a:t>
-                      </a:r>
-                    </a:p>
-                  </a:txBody>
-                  <a:tcPr anchor="ctr" marB="63500" marT="63500" marR="0" marL="0">
-                    <a:lnL algn="ctr" cmpd="sng" cap="flat" w="0">
-                      <a:noFill/>
-                      <a:prstDash val="solid"/>
-                    </a:lnL>
-                    <a:lnR algn="ctr" cmpd="sng" cap="flat" w="0">
-                      <a:noFill/>
-                      <a:prstDash val="solid"/>
-                    </a:lnR>
-                    <a:lnT algn="ctr" cmpd="sng" cap="flat" w="0">
-                      <a:noFill/>
-                      <a:prstDash val="solid"/>
-                    </a:lnT>
-                    <a:lnB algn="ctr" cmpd="sng" cap="flat" w="0">
-                      <a:noFill/>
-                      <a:prstDash val="solid"/>
-                    </a:lnB>
-                    <a:solidFill>
-                      <a:srgbClr val="FFFFFF">
-                        <a:alpha val="0"/>
-                      </a:srgbClr>
-                    </a:solidFill>
-                  </a:tcPr>
-                </a:tc>
-              </a:tr>
-              <a:tr h="410845">
-                <a:tc>
-                  <a:txBody>
-                    <a:bodyPr/>
-                    <a:lstStyle/>
-                    <a:p>
-                      <a:pPr algn="l" marL="63500" marR="63500">
-                        <a:lnSpc>
-                          <a:spcPct val="100000"/>
-                        </a:lnSpc>
-                        <a:spcBef>
-                          <a:spcPts val="500"/>
-                        </a:spcBef>
-                        <a:spcAft>
-                          <a:spcPts val="500"/>
-                        </a:spcAft>
-                        <a:buNone/>
-                      </a:pPr>
-                      <a:r>
-                        <a:rPr cap="none" sz="1200" i="0" b="0" u="none" strike="noStrike">
-                          <a:solidFill>
-                            <a:srgbClr val="000000">
-                              <a:alpha val="100000"/>
-                            </a:srgbClr>
-                          </a:solidFill>
-                          <a:latin typeface="Helvetica"/>
-                          <a:cs typeface="Helvetica"/>
-                          <a:ea typeface="Helvetica"/>
-                          <a:sym typeface="Helvetica"/>
-                        </a:rPr>
-                        <a:t>RSV</a:t>
-                      </a:r>
-                    </a:p>
-                  </a:txBody>
-                  <a:tcPr anchor="ctr" marB="63500" marT="63500" marR="0" marL="0">
-                    <a:lnL algn="ctr" cmpd="sng" cap="flat" w="0">
-                      <a:noFill/>
-                      <a:prstDash val="solid"/>
-                    </a:lnL>
-                    <a:lnR algn="ctr" cmpd="sng" cap="flat" w="0">
-                      <a:noFill/>
-                      <a:prstDash val="solid"/>
-                    </a:lnR>
-                    <a:lnT algn="ctr" cmpd="sng" cap="flat" w="0">
-                      <a:noFill/>
-                      <a:prstDash val="solid"/>
-                    </a:lnT>
-                    <a:lnB algn="ctr" cmpd="sng" cap="flat" w="19050">
-                      <a:solidFill>
-                        <a:srgbClr val="666666">
-                          <a:alpha val="100000"/>
-                        </a:srgbClr>
-                      </a:solidFill>
-                      <a:prstDash val="solid"/>
-                    </a:lnB>
-                    <a:solidFill>
-                      <a:srgbClr val="FFFFFF">
-                        <a:alpha val="0"/>
-                      </a:srgbClr>
-                    </a:solidFill>
-                  </a:tcPr>
-                </a:tc>
-                <a:tc>
-                  <a:txBody>
-                    <a:bodyPr/>
-                    <a:lstStyle/>
-                    <a:p>
-                      <a:pPr algn="l" marL="63500" marR="63500">
-                        <a:lnSpc>
-                          <a:spcPct val="100000"/>
-                        </a:lnSpc>
-                        <a:spcBef>
-                          <a:spcPts val="500"/>
-                        </a:spcBef>
-                        <a:spcAft>
-                          <a:spcPts val="500"/>
-                        </a:spcAft>
-                        <a:buNone/>
-                      </a:pPr>
-                      <a:r>
-                        <a:rPr cap="none" sz="1100" i="0" b="0" u="none" strike="noStrike">
-                          <a:solidFill>
-                            <a:srgbClr val="000000">
-                              <a:alpha val="100000"/>
-                            </a:srgbClr>
-                          </a:solidFill>
-                          <a:latin typeface="DejaVu Sans"/>
-                          <a:cs typeface="DejaVu Sans"/>
-                          <a:ea typeface="DejaVu Sans"/>
-                          <a:sym typeface="DejaVu Sans"/>
-                        </a:rPr>
-                        <a:t>0.196</a:t>
-                      </a:r>
-                    </a:p>
-                  </a:txBody>
-                  <a:tcPr anchor="ctr" marB="63500" marT="63500" marR="0" marL="0">
-                    <a:lnL algn="ctr" cmpd="sng" cap="flat" w="0">
-                      <a:noFill/>
-                      <a:prstDash val="solid"/>
-                    </a:lnL>
-                    <a:lnR algn="ctr" cmpd="sng" cap="flat" w="0">
-                      <a:noFill/>
-                      <a:prstDash val="solid"/>
-                    </a:lnR>
-                    <a:lnT algn="ctr" cmpd="sng" cap="flat" w="0">
-                      <a:noFill/>
-                      <a:prstDash val="solid"/>
-                    </a:lnT>
-                    <a:lnB algn="ctr" cmpd="sng" cap="flat" w="19050">
-                      <a:solidFill>
-                        <a:srgbClr val="666666">
-                          <a:alpha val="100000"/>
-                        </a:srgbClr>
-                      </a:solidFill>
-                      <a:prstDash val="solid"/>
-                    </a:lnB>
-                    <a:solidFill>
-                      <a:srgbClr val="FFFFFF">
-                        <a:alpha val="0"/>
-                      </a:srgbClr>
-                    </a:solidFill>
-                  </a:tcPr>
-                </a:tc>
-                <a:tc>
-                  <a:txBody>
-                    <a:bodyPr/>
-                    <a:lstStyle/>
-                    <a:p>
-                      <a:pPr algn="l" marL="63500" marR="63500">
-                        <a:lnSpc>
-                          <a:spcPct val="100000"/>
-                        </a:lnSpc>
-                        <a:spcBef>
-                          <a:spcPts val="500"/>
-                        </a:spcBef>
-                        <a:spcAft>
-                          <a:spcPts val="500"/>
-                        </a:spcAft>
-                        <a:buNone/>
-                      </a:pPr>
-                      <a:r>
-                        <a:rPr cap="none" sz="1100" i="0" b="0" u="none" strike="noStrike">
-                          <a:solidFill>
-                            <a:srgbClr val="000000">
-                              <a:alpha val="100000"/>
-                            </a:srgbClr>
-                          </a:solidFill>
-                          <a:latin typeface="DejaVu Sans"/>
-                          <a:cs typeface="DejaVu Sans"/>
-                          <a:ea typeface="DejaVu Sans"/>
-                          <a:sym typeface="DejaVu Sans"/>
-                        </a:rPr>
-                        <a:t>0.00315</a:t>
-                      </a:r>
-                    </a:p>
-                  </a:txBody>
-                  <a:tcPr anchor="ctr" marB="63500" marT="63500" marR="0" marL="0">
-                    <a:lnL algn="ctr" cmpd="sng" cap="flat" w="0">
-                      <a:noFill/>
-                      <a:prstDash val="solid"/>
-                    </a:lnL>
-                    <a:lnR algn="ctr" cmpd="sng" cap="flat" w="0">
-                      <a:noFill/>
-                      <a:prstDash val="solid"/>
-                    </a:lnR>
-                    <a:lnT algn="ctr" cmpd="sng" cap="flat" w="0">
-                      <a:noFill/>
-                      <a:prstDash val="solid"/>
-                    </a:lnT>
-                    <a:lnB algn="ctr" cmpd="sng" cap="flat" w="19050">
-                      <a:solidFill>
-                        <a:srgbClr val="666666">
-                          <a:alpha val="100000"/>
-                        </a:srgbClr>
-                      </a:solidFill>
-                      <a:prstDash val="solid"/>
-                    </a:lnB>
-                    <a:solidFill>
-                      <a:srgbClr val="FFFFFF">
-                        <a:alpha val="0"/>
-                      </a:srgbClr>
-                    </a:solidFill>
-                  </a:tcPr>
-                </a:tc>
-                <a:tc>
-                  <a:txBody>
-                    <a:bodyPr/>
-                    <a:lstStyle/>
-                    <a:p>
-                      <a:pPr algn="l" marL="63500" marR="63500">
-                        <a:lnSpc>
-                          <a:spcPct val="100000"/>
-                        </a:lnSpc>
-                        <a:spcBef>
-                          <a:spcPts val="500"/>
-                        </a:spcBef>
-                        <a:spcAft>
-                          <a:spcPts val="500"/>
-                        </a:spcAft>
-                        <a:buNone/>
-                      </a:pPr>
-                      <a:r>
-                        <a:rPr cap="none" sz="1100" i="0" b="0" u="none" strike="noStrike">
-                          <a:solidFill>
-                            <a:srgbClr val="000000">
-                              <a:alpha val="100000"/>
-                            </a:srgbClr>
-                          </a:solidFill>
-                          <a:latin typeface="DejaVu Sans"/>
-                          <a:cs typeface="DejaVu Sans"/>
-                          <a:ea typeface="DejaVu Sans"/>
-                          <a:sym typeface="DejaVu Sans"/>
-                        </a:rPr>
-                        <a:t>1.61</a:t>
-                      </a:r>
-                    </a:p>
-                  </a:txBody>
-                  <a:tcPr anchor="ctr" marB="63500" marT="63500" marR="0" marL="0">
-                    <a:lnL algn="ctr" cmpd="sng" cap="flat" w="0">
-                      <a:noFill/>
-                      <a:prstDash val="solid"/>
-                    </a:lnL>
-                    <a:lnR algn="ctr" cmpd="sng" cap="flat" w="0">
-                      <a:noFill/>
-                      <a:prstDash val="solid"/>
-                    </a:lnR>
-                    <a:lnT algn="ctr" cmpd="sng" cap="flat" w="0">
-                      <a:noFill/>
-                      <a:prstDash val="solid"/>
-                    </a:lnT>
-                    <a:lnB algn="ctr" cmpd="sng" cap="flat" w="19050">
-                      <a:solidFill>
-                        <a:srgbClr val="666666">
-                          <a:alpha val="100000"/>
-                        </a:srgbClr>
-                      </a:solidFill>
-                      <a:prstDash val="solid"/>
-                    </a:lnB>
-                    <a:solidFill>
-                      <a:srgbClr val="FFFFFF">
-                        <a:alpha val="0"/>
-                      </a:srgbClr>
-                    </a:solidFill>
-                  </a:tcPr>
-                </a:tc>
-                <a:tc>
-                  <a:txBody>
-                    <a:bodyPr/>
-                    <a:lstStyle/>
-                    <a:p>
-                      <a:pPr algn="l" marL="63500" marR="63500">
-                        <a:lnSpc>
-                          <a:spcPct val="100000"/>
-                        </a:lnSpc>
-                        <a:spcBef>
-                          <a:spcPts val="500"/>
-                        </a:spcBef>
-                        <a:spcAft>
-                          <a:spcPts val="500"/>
-                        </a:spcAft>
-                        <a:buNone/>
-                      </a:pPr>
-                      <a:r>
-                        <a:rPr cap="none" sz="1100" i="0" b="0" u="none" strike="noStrike">
-                          <a:solidFill>
-                            <a:srgbClr val="000000">
-                              <a:alpha val="100000"/>
-                            </a:srgbClr>
-                          </a:solidFill>
-                          <a:latin typeface="DejaVu Sans"/>
-                          <a:cs typeface="DejaVu Sans"/>
-                          <a:ea typeface="DejaVu Sans"/>
-                          <a:sym typeface="DejaVu Sans"/>
-                        </a:rPr>
-                        <a:t>0.196 (0.190, 0.203)</a:t>
-                      </a:r>
-                    </a:p>
-                  </a:txBody>
-                  <a:tcPr anchor="ctr" marB="63500" marT="63500" marR="0" marL="0">
-                    <a:lnL algn="ctr" cmpd="sng" cap="flat" w="0">
-                      <a:noFill/>
-                      <a:prstDash val="solid"/>
-                    </a:lnL>
-                    <a:lnR algn="ctr" cmpd="sng" cap="flat" w="0">
-                      <a:noFill/>
-                      <a:prstDash val="solid"/>
-                    </a:lnR>
-                    <a:lnT algn="ctr" cmpd="sng" cap="flat" w="0">
-                      <a:noFill/>
-                      <a:prstDash val="solid"/>
-                    </a:lnT>
-                    <a:lnB algn="ctr" cmpd="sng" cap="flat" w="19050">
-                      <a:solidFill>
-                        <a:srgbClr val="666666">
-                          <a:alpha val="100000"/>
-                        </a:srgbClr>
-                      </a:solidFill>
-                      <a:prstDash val="solid"/>
-                    </a:lnB>
-                    <a:solidFill>
-                      <a:srgbClr val="FFFFFF">
-                        <a:alpha val="0"/>
-                      </a:srgbClr>
-                    </a:solidFill>
-                  </a:tcPr>
-                </a:tc>
-                <a:tc>
-                  <a:txBody>
-                    <a:bodyPr/>
-                    <a:lstStyle/>
-                    <a:p>
-                      <a:pPr algn="l" marL="63500" marR="63500">
-                        <a:lnSpc>
-                          <a:spcPct val="100000"/>
-                        </a:lnSpc>
-                        <a:spcBef>
-                          <a:spcPts val="500"/>
-                        </a:spcBef>
-                        <a:spcAft>
-                          <a:spcPts val="500"/>
-                        </a:spcAft>
-                        <a:buNone/>
-                      </a:pPr>
-                      <a:endParaRPr cap="none" sz="1100" i="0" b="0" u="none" strike="noStrike">
-                        <a:solidFill>
-                          <a:srgbClr val="000000">
-                            <a:alpha val="100000"/>
-                          </a:srgbClr>
-                        </a:solidFill>
-                        <a:latin typeface="DejaVu Sans"/>
-                        <a:cs typeface="DejaVu Sans"/>
-                        <a:ea typeface="DejaVu Sans"/>
-                        <a:sym typeface="DejaVu Sans"/>
-                      </a:endParaRPr>
-                      <a:r>
-                        <a:rPr cap="none" sz="1100" i="0" b="0" u="none" strike="noStrike">
-                          <a:solidFill>
-                            <a:srgbClr val="000000">
-                              <a:alpha val="100000"/>
-                            </a:srgbClr>
-                          </a:solidFill>
-                          <a:latin typeface="DejaVu Sans"/>
-                          <a:cs typeface="DejaVu Sans"/>
-                          <a:ea typeface="DejaVu Sans"/>
-                          <a:sym typeface="DejaVu Sans"/>
-                        </a:rPr>
-                        <a:t/>
-                      </a:r>
-                    </a:p>
-                  </a:txBody>
-                  <a:tcPr anchor="ctr" marB="63500" marT="63500" marR="0" marL="0">
-                    <a:lnL algn="ctr" cmpd="sng" cap="flat" w="0">
-                      <a:noFill/>
-                      <a:prstDash val="solid"/>
-                    </a:lnL>
-                    <a:lnR algn="ctr" cmpd="sng" cap="flat" w="0">
-                      <a:noFill/>
-                      <a:prstDash val="solid"/>
-                    </a:lnR>
-                    <a:lnT algn="ctr" cmpd="sng" cap="flat" w="0">
-                      <a:noFill/>
-                      <a:prstDash val="solid"/>
-                    </a:lnT>
-                    <a:lnB algn="ctr" cmpd="sng" cap="flat" w="19050">
-                      <a:solidFill>
-                        <a:srgbClr val="666666">
-                          <a:alpha val="100000"/>
-                        </a:srgbClr>
-                      </a:solidFill>
-                      <a:prstDash val="solid"/>
-                    </a:lnB>
-                    <a:solidFill>
-                      <a:srgbClr val="FFFFFF">
-                        <a:alpha val="0"/>
-                      </a:srgbClr>
-                    </a:solidFill>
-                  </a:tcPr>
-                </a:tc>
-                <a:tc>
-                  <a:txBody>
-                    <a:bodyPr/>
-                    <a:lstStyle/>
-                    <a:p>
-                      <a:pPr algn="l" marL="63500" marR="63500">
-                        <a:lnSpc>
-                          <a:spcPct val="100000"/>
-                        </a:lnSpc>
-                        <a:spcBef>
-                          <a:spcPts val="500"/>
-                        </a:spcBef>
-                        <a:spcAft>
-                          <a:spcPts val="500"/>
-                        </a:spcAft>
-                        <a:buNone/>
-                      </a:pPr>
-                      <a:endParaRPr cap="none" sz="1100" i="0" b="0" u="none" strike="noStrike">
-                        <a:solidFill>
-                          <a:srgbClr val="000000">
-                            <a:alpha val="100000"/>
-                          </a:srgbClr>
-                        </a:solidFill>
-                        <a:latin typeface="DejaVu Sans"/>
-                        <a:cs typeface="DejaVu Sans"/>
-                        <a:ea typeface="DejaVu Sans"/>
-                        <a:sym typeface="DejaVu Sans"/>
-                      </a:endParaRPr>
-                      <a:r>
-                        <a:rPr cap="none" sz="1100" i="0" b="0" u="none" strike="noStrike">
-                          <a:solidFill>
-                            <a:srgbClr val="000000">
-                              <a:alpha val="100000"/>
-                            </a:srgbClr>
-                          </a:solidFill>
-                          <a:latin typeface="DejaVu Sans"/>
-                          <a:cs typeface="DejaVu Sans"/>
-                          <a:ea typeface="DejaVu Sans"/>
-                          <a:sym typeface="DejaVu Sans"/>
-                        </a:rPr>
-                        <a:t/>
-                      </a:r>
-                    </a:p>
-                  </a:txBody>
-                  <a:tcPr anchor="ctr" marB="63500" marT="63500" marR="0" marL="0">
-                    <a:lnL algn="ctr" cmpd="sng" cap="flat" w="0">
-                      <a:noFill/>
-                      <a:prstDash val="solid"/>
-                    </a:lnL>
-                    <a:lnR algn="ctr" cmpd="sng" cap="flat" w="0">
-                      <a:noFill/>
-                      <a:prstDash val="solid"/>
-                    </a:lnR>
-                    <a:lnT algn="ctr" cmpd="sng" cap="flat" w="0">
-                      <a:noFill/>
-                      <a:prstDash val="solid"/>
-                    </a:lnT>
-                    <a:lnB algn="ctr" cmpd="sng" cap="flat" w="19050">
-                      <a:solidFill>
-                        <a:srgbClr val="666666">
-                          <a:alpha val="100000"/>
-                        </a:srgbClr>
-                      </a:solidFill>
-                      <a:prstDash val="solid"/>
-                    </a:lnB>
-                    <a:solidFill>
-                      <a:srgbClr val="FFFFFF">
-                        <a:alpha val="0"/>
-                      </a:srgbClr>
-                    </a:solidFill>
-                  </a:tcPr>
-                </a:tc>
-              </a:tr>
-            </a:tbl>
-          </a:graphicData>
-        </a:graphic>
-      </p:graphicFrame>
+      <p:pic>
+        <p:nvPicPr>
+          <p:cNvPr id="3" name="Text Placeholder 2" descr=""/>
+          <p:cNvPicPr>
+            <a:picLocks noGrp="1"/>
+          </p:cNvPicPr>
+          <p:nvPr>
+            <p:ph idx="1"/>
+          </p:nvPr>
+        </p:nvPicPr>
+        <p:blipFill>
+          <a:blip r:embed="rId2"/>
+          <a:stretch>
+            <a:fillRect/>
+          </a:stretch>
+        </p:blipFill>
+        <p:spPr>
+          <a:xfrm>
+            <a:off x="623392" y="1196752"/>
+            <a:ext cx="10945216" cy="5184576"/>
+          </a:xfrm>
+          <a:prstGeom prst="rect">
+            <a:avLst/>
+          </a:prstGeom>
+        </p:spPr>
+      </p:pic>
     </p:spTree>
   </p:cSld>
   <p:clrMapOvr>
@@ -6408,6 +3895,162 @@
           <a:p>
             <a:r>
               <a:rPr/>
+              <a:t>Individual and population prediction overlay</a:t>
+            </a:r>
+          </a:p>
+        </p:txBody>
+      </p:sp>
+      <p:pic>
+        <p:nvPicPr>
+          <p:cNvPr id="3" name="Text Placeholder 2" descr=""/>
+          <p:cNvPicPr>
+            <a:picLocks noGrp="1"/>
+          </p:cNvPicPr>
+          <p:nvPr>
+            <p:ph idx="1"/>
+          </p:nvPr>
+        </p:nvPicPr>
+        <p:blipFill>
+          <a:blip r:embed="rId2"/>
+          <a:stretch>
+            <a:fillRect/>
+          </a:stretch>
+        </p:blipFill>
+        <p:spPr>
+          <a:xfrm>
+            <a:off x="623392" y="1196752"/>
+            <a:ext cx="10945216" cy="5184576"/>
+          </a:xfrm>
+          <a:prstGeom prst="rect">
+            <a:avLst/>
+          </a:prstGeom>
+        </p:spPr>
+      </p:pic>
+    </p:spTree>
+  </p:cSld>
+  <p:clrMapOvr>
+    <a:masterClrMapping/>
+  </p:clrMapOvr>
+</p:sld>
+</file>
+
+<file path=ppt/slides/slide13.xml><?xml version="1.0" encoding="utf-8"?>
+<p:sld xmlns:a="http://schemas.openxmlformats.org/drawingml/2006/main" xmlns:r="http://schemas.openxmlformats.org/officeDocument/2006/relationships" xmlns:p="http://schemas.openxmlformats.org/presentationml/2006/main">
+  <p:cSld>
+    <p:spTree>
+      <p:nvGrpSpPr>
+        <p:cNvPr id="1" name=""/>
+        <p:cNvGrpSpPr/>
+        <p:nvPr/>
+      </p:nvGrpSpPr>
+      <p:grpSpPr>
+        <a:xfrm>
+          <a:off x="0" y="0"/>
+          <a:ext cx="0" cy="0"/>
+          <a:chOff x="0" y="0"/>
+          <a:chExt cx="0" cy="0"/>
+        </a:xfrm>
+      </p:grpSpPr>
+      <p:sp>
+        <p:nvSpPr>
+          <p:cNvPr id="2" name="Title 1"/>
+          <p:cNvSpPr>
+            <a:spLocks noGrp="1"/>
+          </p:cNvSpPr>
+          <p:nvPr>
+            <p:ph type="title"/>
+          </p:nvPr>
+        </p:nvSpPr>
+        <p:spPr>
+          <a:xfrm>
+            <a:off x="623392" y="113388"/>
+            <a:ext cx="10945216" cy="985909"/>
+          </a:xfrm>
+        </p:spPr>
+        <p:txBody>
+          <a:bodyPr/>
+          <a:lstStyle/>
+          <a:p>
+            <a:r>
+              <a:rPr/>
+              <a:t>Individual and population prediction overlay</a:t>
+            </a:r>
+          </a:p>
+        </p:txBody>
+      </p:sp>
+      <p:pic>
+        <p:nvPicPr>
+          <p:cNvPr id="3" name="Text Placeholder 2" descr=""/>
+          <p:cNvPicPr>
+            <a:picLocks noGrp="1"/>
+          </p:cNvPicPr>
+          <p:nvPr>
+            <p:ph idx="1"/>
+          </p:nvPr>
+        </p:nvPicPr>
+        <p:blipFill>
+          <a:blip r:embed="rId2"/>
+          <a:stretch>
+            <a:fillRect/>
+          </a:stretch>
+        </p:blipFill>
+        <p:spPr>
+          <a:xfrm>
+            <a:off x="623392" y="1196752"/>
+            <a:ext cx="10945216" cy="5184576"/>
+          </a:xfrm>
+          <a:prstGeom prst="rect">
+            <a:avLst/>
+          </a:prstGeom>
+        </p:spPr>
+      </p:pic>
+    </p:spTree>
+  </p:cSld>
+  <p:clrMapOvr>
+    <a:masterClrMapping/>
+  </p:clrMapOvr>
+</p:sld>
+</file>
+
+<file path=ppt/slides/slide14.xml><?xml version="1.0" encoding="utf-8"?>
+<p:sld xmlns:a="http://schemas.openxmlformats.org/drawingml/2006/main" xmlns:r="http://schemas.openxmlformats.org/officeDocument/2006/relationships" xmlns:p="http://schemas.openxmlformats.org/presentationml/2006/main">
+  <p:cSld>
+    <p:spTree>
+      <p:nvGrpSpPr>
+        <p:cNvPr id="1" name=""/>
+        <p:cNvGrpSpPr/>
+        <p:nvPr/>
+      </p:nvGrpSpPr>
+      <p:grpSpPr>
+        <a:xfrm>
+          <a:off x="0" y="0"/>
+          <a:ext cx="0" cy="0"/>
+          <a:chOff x="0" y="0"/>
+          <a:chExt cx="0" cy="0"/>
+        </a:xfrm>
+      </p:grpSpPr>
+      <p:sp>
+        <p:nvSpPr>
+          <p:cNvPr id="2" name="Title 1"/>
+          <p:cNvSpPr>
+            <a:spLocks noGrp="1"/>
+          </p:cNvSpPr>
+          <p:nvPr>
+            <p:ph type="title"/>
+          </p:nvPr>
+        </p:nvSpPr>
+        <p:spPr>
+          <a:xfrm>
+            <a:off x="623392" y="113388"/>
+            <a:ext cx="10945216" cy="985909"/>
+          </a:xfrm>
+        </p:spPr>
+        <p:txBody>
+          <a:bodyPr/>
+          <a:lstStyle/>
+          <a:p>
+            <a:r>
+              <a:rPr/>
               <a:t>Observed vs Predicted</a:t>
             </a:r>
           </a:p>
@@ -6447,7 +4090,7 @@
 </p:sld>
 </file>
 
-<file path=ppt/slides/slide13.xml><?xml version="1.0" encoding="utf-8"?>
+<file path=ppt/slides/slide15.xml><?xml version="1.0" encoding="utf-8"?>
 <p:sld xmlns:a="http://schemas.openxmlformats.org/drawingml/2006/main" xmlns:r="http://schemas.openxmlformats.org/officeDocument/2006/relationships" xmlns:p="http://schemas.openxmlformats.org/presentationml/2006/main">
   <p:cSld>
     <p:spTree>
@@ -6564,37 +4207,1489 @@
           <a:p>
             <a:r>
               <a:rPr/>
-              <a:t>Individual and population prediction overlay</a:t>
+              <a:t>Model equations</a:t>
             </a:r>
           </a:p>
         </p:txBody>
       </p:sp>
-      <p:pic>
-        <p:nvPicPr>
-          <p:cNvPr id="3" name="Text Placeholder 2" descr=""/>
-          <p:cNvPicPr>
-            <a:picLocks noGrp="1"/>
-          </p:cNvPicPr>
-          <p:nvPr>
-            <p:ph idx="1"/>
-          </p:nvPr>
-        </p:nvPicPr>
-        <p:blipFill>
-          <a:blip r:embed="rId2"/>
-          <a:stretch>
-            <a:fillRect/>
-          </a:stretch>
-        </p:blipFill>
-        <p:spPr>
-          <a:xfrm>
-            <a:off x="623392" y="1196752"/>
-            <a:ext cx="10945216" cy="5184576"/>
-          </a:xfrm>
-          <a:prstGeom prst="rect">
-            <a:avLst/>
-          </a:prstGeom>
-        </p:spPr>
-      </p:pic>
+      <p:graphicFrame>
+        <p:nvGraphicFramePr>
+          <p:cNvPr id="3" name="Text Placeholder 2"/>
+          <p:cNvGraphicFramePr>
+            <a:graphicFrameLocks noGrp="true"/>
+          </p:cNvGraphicFramePr>
+          <p:nvPr/>
+        </p:nvGraphicFramePr>
+        <p:xfrm rot="0">
+          <a:off x="623392" y="1196752"/>
+          <a:ext cx="10945216" cy="5184576"/>
+        </p:xfrm>
+        <a:graphic>
+          <a:graphicData uri="http://schemas.openxmlformats.org/drawingml/2006/table">
+            <a:tbl>
+              <a:tblPr/>
+              <a:tblGrid>
+                <a:gridCol w="5486400"/>
+              </a:tblGrid>
+              <a:tr h="228600">
+                <a:tc>
+                  <a:txBody>
+                    <a:bodyPr/>
+                    <a:lstStyle/>
+                    <a:p>
+                      <a:pPr algn="l" marL="63500" marR="63500">
+                        <a:lnSpc>
+                          <a:spcPct val="100000"/>
+                        </a:lnSpc>
+                        <a:spcBef>
+                          <a:spcPts val="100"/>
+                        </a:spcBef>
+                        <a:spcAft>
+                          <a:spcPts val="100"/>
+                        </a:spcAft>
+                        <a:buNone/>
+                      </a:pPr>
+                      <a:rPr cap="none" sz="1100" i="0" b="0" u="none" strike="noStrike">
+                        <a:solidFill>
+                          <a:srgbClr val="000000">
+                            <a:alpha val="100000"/>
+                          </a:srgbClr>
+                        </a:solidFill>
+                        <a:latin typeface="DejaVu Sans"/>
+                        <a:cs typeface="DejaVu Sans"/>
+                        <a:ea typeface="DejaVu Sans"/>
+                        <a:sym typeface="DejaVu Sans"/>
+                      </a:rPr>
+                      <mc:AlternateContent xmlns:mc="http://schemas.openxmlformats.org/markup-compatibility/2006">
+                        <mc:Choice xmlns:a14="http://schemas.microsoft.com/office/drawing/2010/main" Requires="a14">
+                          <a14:m>
+                            <m:oMathPara xmlns:m="http://schemas.openxmlformats.org/officeDocument/2006/math">
+                              <m:oMathParaPr>
+                                <m:jc m:val="centerGroup"/>
+                              </m:oMathParaPr>
+                              <m:oMath xmlns:mml="http://www.w3.org/1998/Math/MathML">
+                                <m:r>
+                                  <m:t>cmt(</m:t>
+                                </m:r>
+                                <m:r>
+                                  <m:t>CENTRAL</m:t>
+                                </m:r>
+                                <m:r>
+                                  <m:t>)</m:t>
+                                </m:r>
+                              </m:oMath>
+                            </m:oMathPara>
+                          </a14:m>
+                        </mc:Choice>
+                      </mc:AlternateContent>
+                    </a:p>
+                  </a:txBody>
+                  <a:tcPr anchor="ctr" marB="12700" marT="12700" marR="0" marL="0">
+                    <a:lnL algn="ctr" cmpd="sng" cap="flat" w="0">
+                      <a:noFill/>
+                      <a:prstDash val="solid"/>
+                    </a:lnL>
+                    <a:lnR algn="ctr" cmpd="sng" cap="flat" w="0">
+                      <a:noFill/>
+                      <a:prstDash val="solid"/>
+                    </a:lnR>
+                    <a:lnT algn="ctr" cmpd="sng" cap="flat" w="0">
+                      <a:noFill/>
+                      <a:prstDash val="solid"/>
+                    </a:lnT>
+                    <a:lnB algn="ctr" cmpd="sng" cap="flat" w="0">
+                      <a:noFill/>
+                      <a:prstDash val="solid"/>
+                    </a:lnB>
+                    <a:solidFill>
+                      <a:srgbClr val="FFFFFF">
+                        <a:alpha val="0"/>
+                      </a:srgbClr>
+                    </a:solidFill>
+                  </a:tcPr>
+                </a:tc>
+              </a:tr>
+              <a:tr h="228600">
+                <a:tc>
+                  <a:txBody>
+                    <a:bodyPr/>
+                    <a:lstStyle/>
+                    <a:p>
+                      <a:pPr algn="l" marL="63500" marR="63500">
+                        <a:lnSpc>
+                          <a:spcPct val="100000"/>
+                        </a:lnSpc>
+                        <a:spcBef>
+                          <a:spcPts val="100"/>
+                        </a:spcBef>
+                        <a:spcAft>
+                          <a:spcPts val="100"/>
+                        </a:spcAft>
+                        <a:buNone/>
+                      </a:pPr>
+                      <a:rPr cap="none" sz="1100" i="0" b="0" u="none" strike="noStrike">
+                        <a:solidFill>
+                          <a:srgbClr val="000000">
+                            <a:alpha val="100000"/>
+                          </a:srgbClr>
+                        </a:solidFill>
+                        <a:latin typeface="DejaVu Sans"/>
+                        <a:cs typeface="DejaVu Sans"/>
+                        <a:ea typeface="DejaVu Sans"/>
+                        <a:sym typeface="DejaVu Sans"/>
+                      </a:rPr>
+                      <mc:AlternateContent xmlns:mc="http://schemas.openxmlformats.org/markup-compatibility/2006">
+                        <mc:Choice xmlns:a14="http://schemas.microsoft.com/office/drawing/2010/main" Requires="a14">
+                          <a14:m>
+                            <m:oMathPara xmlns:m="http://schemas.openxmlformats.org/officeDocument/2006/math">
+                              <m:oMathParaPr>
+                                <m:jc m:val="centerGroup"/>
+                              </m:oMathParaPr>
+                              <m:oMath xmlns:mml="http://www.w3.org/1998/Math/MathML">
+                                <m:r>
+                                  <m:t>cmt(</m:t>
+                                </m:r>
+                                <m:r>
+                                  <m:t>PERI</m:t>
+                                </m:r>
+                                <m:r>
+                                  <m:t>)</m:t>
+                                </m:r>
+                              </m:oMath>
+                            </m:oMathPara>
+                          </a14:m>
+                        </mc:Choice>
+                      </mc:AlternateContent>
+                    </a:p>
+                  </a:txBody>
+                  <a:tcPr anchor="ctr" marB="12700" marT="12700" marR="0" marL="0">
+                    <a:lnL algn="ctr" cmpd="sng" cap="flat" w="0">
+                      <a:noFill/>
+                      <a:prstDash val="solid"/>
+                    </a:lnL>
+                    <a:lnR algn="ctr" cmpd="sng" cap="flat" w="0">
+                      <a:noFill/>
+                      <a:prstDash val="solid"/>
+                    </a:lnR>
+                    <a:lnT algn="ctr" cmpd="sng" cap="flat" w="0">
+                      <a:noFill/>
+                      <a:prstDash val="solid"/>
+                    </a:lnT>
+                    <a:lnB algn="ctr" cmpd="sng" cap="flat" w="0">
+                      <a:noFill/>
+                      <a:prstDash val="solid"/>
+                    </a:lnB>
+                    <a:solidFill>
+                      <a:srgbClr val="FFFFFF">
+                        <a:alpha val="0"/>
+                      </a:srgbClr>
+                    </a:solidFill>
+                  </a:tcPr>
+                </a:tc>
+              </a:tr>
+              <a:tr h="228600">
+                <a:tc>
+                  <a:txBody>
+                    <a:bodyPr/>
+                    <a:lstStyle/>
+                    <a:p>
+                      <a:pPr algn="l" marL="63500" marR="63500">
+                        <a:lnSpc>
+                          <a:spcPct val="100000"/>
+                        </a:lnSpc>
+                        <a:spcBef>
+                          <a:spcPts val="100"/>
+                        </a:spcBef>
+                        <a:spcAft>
+                          <a:spcPts val="100"/>
+                        </a:spcAft>
+                        <a:buNone/>
+                      </a:pPr>
+                      <a:rPr cap="none" sz="1100" i="0" b="0" u="none" strike="noStrike">
+                        <a:solidFill>
+                          <a:srgbClr val="000000">
+                            <a:alpha val="100000"/>
+                          </a:srgbClr>
+                        </a:solidFill>
+                        <a:latin typeface="DejaVu Sans"/>
+                        <a:cs typeface="DejaVu Sans"/>
+                        <a:ea typeface="DejaVu Sans"/>
+                        <a:sym typeface="DejaVu Sans"/>
+                      </a:rPr>
+                      <mc:AlternateContent xmlns:mc="http://schemas.openxmlformats.org/markup-compatibility/2006">
+                        <mc:Choice xmlns:a14="http://schemas.microsoft.com/office/drawing/2010/main" Requires="a14">
+                          <a14:m>
+                            <m:oMathPara xmlns:m="http://schemas.openxmlformats.org/officeDocument/2006/math">
+                              <m:oMathParaPr>
+                                <m:jc m:val="centerGroup"/>
+                              </m:oMathParaPr>
+                              <m:oMath xmlns:mml="http://www.w3.org/1998/Math/MathML">
+                                <m:r>
+                                  <m:t>cl</m:t>
+                                </m:r>
+                                <m:r>
+                                  <m:t>=</m:t>
+                                </m:r>
+                                <m:r>
+                                  <m:rPr>
+                                    <m:sty m:val="p"/>
+                                  </m:rPr>
+                                  <m:t>exp</m:t>
+                                </m:r>
+                                <m:r>
+                                  <m:t>⁡</m:t>
+                                </m:r>
+                                <m:r>
+                                  <m:t>(</m:t>
+                                </m:r>
+                                <m:r>
+                                  <m:t>theta1</m:t>
+                                </m:r>
+                                <m:r>
+                                  <m:t>+</m:t>
+                                </m:r>
+                                <m:r>
+                                  <m:t>eta1</m:t>
+                                </m:r>
+                                <m:r>
+                                  <m:t>)</m:t>
+                                </m:r>
+                              </m:oMath>
+                            </m:oMathPara>
+                          </a14:m>
+                        </mc:Choice>
+                      </mc:AlternateContent>
+                    </a:p>
+                  </a:txBody>
+                  <a:tcPr anchor="ctr" marB="12700" marT="12700" marR="0" marL="0">
+                    <a:lnL algn="ctr" cmpd="sng" cap="flat" w="0">
+                      <a:noFill/>
+                      <a:prstDash val="solid"/>
+                    </a:lnL>
+                    <a:lnR algn="ctr" cmpd="sng" cap="flat" w="0">
+                      <a:noFill/>
+                      <a:prstDash val="solid"/>
+                    </a:lnR>
+                    <a:lnT algn="ctr" cmpd="sng" cap="flat" w="0">
+                      <a:noFill/>
+                      <a:prstDash val="solid"/>
+                    </a:lnT>
+                    <a:lnB algn="ctr" cmpd="sng" cap="flat" w="0">
+                      <a:noFill/>
+                      <a:prstDash val="solid"/>
+                    </a:lnB>
+                    <a:solidFill>
+                      <a:srgbClr val="FFFFFF">
+                        <a:alpha val="0"/>
+                      </a:srgbClr>
+                    </a:solidFill>
+                  </a:tcPr>
+                </a:tc>
+              </a:tr>
+              <a:tr h="228600">
+                <a:tc>
+                  <a:txBody>
+                    <a:bodyPr/>
+                    <a:lstStyle/>
+                    <a:p>
+                      <a:pPr algn="l" marL="63500" marR="63500">
+                        <a:lnSpc>
+                          <a:spcPct val="100000"/>
+                        </a:lnSpc>
+                        <a:spcBef>
+                          <a:spcPts val="100"/>
+                        </a:spcBef>
+                        <a:spcAft>
+                          <a:spcPts val="100"/>
+                        </a:spcAft>
+                        <a:buNone/>
+                      </a:pPr>
+                      <a:rPr cap="none" sz="1100" i="0" b="0" u="none" strike="noStrike">
+                        <a:solidFill>
+                          <a:srgbClr val="000000">
+                            <a:alpha val="100000"/>
+                          </a:srgbClr>
+                        </a:solidFill>
+                        <a:latin typeface="DejaVu Sans"/>
+                        <a:cs typeface="DejaVu Sans"/>
+                        <a:ea typeface="DejaVu Sans"/>
+                        <a:sym typeface="DejaVu Sans"/>
+                      </a:rPr>
+                      <mc:AlternateContent xmlns:mc="http://schemas.openxmlformats.org/markup-compatibility/2006">
+                        <mc:Choice xmlns:a14="http://schemas.microsoft.com/office/drawing/2010/main" Requires="a14">
+                          <a14:m>
+                            <m:oMathPara xmlns:m="http://schemas.openxmlformats.org/officeDocument/2006/math">
+                              <m:oMathParaPr>
+                                <m:jc m:val="centerGroup"/>
+                              </m:oMathParaPr>
+                              <m:oMath xmlns:mml="http://www.w3.org/1998/Math/MathML">
+                                <m:r>
+                                  <m:t>v=</m:t>
+                                </m:r>
+                                <m:r>
+                                  <m:rPr>
+                                    <m:sty m:val="p"/>
+                                  </m:rPr>
+                                  <m:t>exp</m:t>
+                                </m:r>
+                                <m:r>
+                                  <m:t>⁡</m:t>
+                                </m:r>
+                                <m:r>
+                                  <m:t>(</m:t>
+                                </m:r>
+                                <m:r>
+                                  <m:t>theta2</m:t>
+                                </m:r>
+                                <m:r>
+                                  <m:t>+</m:t>
+                                </m:r>
+                                <m:r>
+                                  <m:t>eta2</m:t>
+                                </m:r>
+                                <m:r>
+                                  <m:t>)</m:t>
+                                </m:r>
+                              </m:oMath>
+                            </m:oMathPara>
+                          </a14:m>
+                        </mc:Choice>
+                      </mc:AlternateContent>
+                    </a:p>
+                  </a:txBody>
+                  <a:tcPr anchor="ctr" marB="12700" marT="12700" marR="0" marL="0">
+                    <a:lnL algn="ctr" cmpd="sng" cap="flat" w="0">
+                      <a:noFill/>
+                      <a:prstDash val="solid"/>
+                    </a:lnL>
+                    <a:lnR algn="ctr" cmpd="sng" cap="flat" w="0">
+                      <a:noFill/>
+                      <a:prstDash val="solid"/>
+                    </a:lnR>
+                    <a:lnT algn="ctr" cmpd="sng" cap="flat" w="0">
+                      <a:noFill/>
+                      <a:prstDash val="solid"/>
+                    </a:lnT>
+                    <a:lnB algn="ctr" cmpd="sng" cap="flat" w="0">
+                      <a:noFill/>
+                      <a:prstDash val="solid"/>
+                    </a:lnB>
+                    <a:solidFill>
+                      <a:srgbClr val="FFFFFF">
+                        <a:alpha val="0"/>
+                      </a:srgbClr>
+                    </a:solidFill>
+                  </a:tcPr>
+                </a:tc>
+              </a:tr>
+              <a:tr h="228600">
+                <a:tc>
+                  <a:txBody>
+                    <a:bodyPr/>
+                    <a:lstStyle/>
+                    <a:p>
+                      <a:pPr algn="l" marL="63500" marR="63500">
+                        <a:lnSpc>
+                          <a:spcPct val="100000"/>
+                        </a:lnSpc>
+                        <a:spcBef>
+                          <a:spcPts val="100"/>
+                        </a:spcBef>
+                        <a:spcAft>
+                          <a:spcPts val="100"/>
+                        </a:spcAft>
+                        <a:buNone/>
+                      </a:pPr>
+                      <a:rPr cap="none" sz="1100" i="0" b="0" u="none" strike="noStrike">
+                        <a:solidFill>
+                          <a:srgbClr val="000000">
+                            <a:alpha val="100000"/>
+                          </a:srgbClr>
+                        </a:solidFill>
+                        <a:latin typeface="DejaVu Sans"/>
+                        <a:cs typeface="DejaVu Sans"/>
+                        <a:ea typeface="DejaVu Sans"/>
+                        <a:sym typeface="DejaVu Sans"/>
+                      </a:rPr>
+                      <mc:AlternateContent xmlns:mc="http://schemas.openxmlformats.org/markup-compatibility/2006">
+                        <mc:Choice xmlns:a14="http://schemas.microsoft.com/office/drawing/2010/main" Requires="a14">
+                          <a14:m>
+                            <m:oMathPara xmlns:m="http://schemas.openxmlformats.org/officeDocument/2006/math">
+                              <m:oMathParaPr>
+                                <m:jc m:val="centerGroup"/>
+                              </m:oMathParaPr>
+                              <m:oMath xmlns:mml="http://www.w3.org/1998/Math/MathML">
+                                <m:r>
+                                  <m:t>q=</m:t>
+                                </m:r>
+                                <m:r>
+                                  <m:rPr>
+                                    <m:sty m:val="p"/>
+                                  </m:rPr>
+                                  <m:t>exp</m:t>
+                                </m:r>
+                                <m:r>
+                                  <m:t>⁡</m:t>
+                                </m:r>
+                                <m:r>
+                                  <m:t>(</m:t>
+                                </m:r>
+                                <m:r>
+                                  <m:t>theta3</m:t>
+                                </m:r>
+                                <m:r>
+                                  <m:t>+</m:t>
+                                </m:r>
+                                <m:r>
+                                  <m:t>eta3</m:t>
+                                </m:r>
+                                <m:r>
+                                  <m:t>)</m:t>
+                                </m:r>
+                              </m:oMath>
+                            </m:oMathPara>
+                          </a14:m>
+                        </mc:Choice>
+                      </mc:AlternateContent>
+                    </a:p>
+                  </a:txBody>
+                  <a:tcPr anchor="ctr" marB="12700" marT="12700" marR="0" marL="0">
+                    <a:lnL algn="ctr" cmpd="sng" cap="flat" w="0">
+                      <a:noFill/>
+                      <a:prstDash val="solid"/>
+                    </a:lnL>
+                    <a:lnR algn="ctr" cmpd="sng" cap="flat" w="0">
+                      <a:noFill/>
+                      <a:prstDash val="solid"/>
+                    </a:lnR>
+                    <a:lnT algn="ctr" cmpd="sng" cap="flat" w="0">
+                      <a:noFill/>
+                      <a:prstDash val="solid"/>
+                    </a:lnT>
+                    <a:lnB algn="ctr" cmpd="sng" cap="flat" w="0">
+                      <a:noFill/>
+                      <a:prstDash val="solid"/>
+                    </a:lnB>
+                    <a:solidFill>
+                      <a:srgbClr val="FFFFFF">
+                        <a:alpha val="0"/>
+                      </a:srgbClr>
+                    </a:solidFill>
+                  </a:tcPr>
+                </a:tc>
+              </a:tr>
+              <a:tr h="228600">
+                <a:tc>
+                  <a:txBody>
+                    <a:bodyPr/>
+                    <a:lstStyle/>
+                    <a:p>
+                      <a:pPr algn="l" marL="63500" marR="63500">
+                        <a:lnSpc>
+                          <a:spcPct val="100000"/>
+                        </a:lnSpc>
+                        <a:spcBef>
+                          <a:spcPts val="100"/>
+                        </a:spcBef>
+                        <a:spcAft>
+                          <a:spcPts val="100"/>
+                        </a:spcAft>
+                        <a:buNone/>
+                      </a:pPr>
+                      <a:rPr cap="none" sz="1100" i="0" b="0" u="none" strike="noStrike">
+                        <a:solidFill>
+                          <a:srgbClr val="000000">
+                            <a:alpha val="100000"/>
+                          </a:srgbClr>
+                        </a:solidFill>
+                        <a:latin typeface="DejaVu Sans"/>
+                        <a:cs typeface="DejaVu Sans"/>
+                        <a:ea typeface="DejaVu Sans"/>
+                        <a:sym typeface="DejaVu Sans"/>
+                      </a:rPr>
+                      <mc:AlternateContent xmlns:mc="http://schemas.openxmlformats.org/markup-compatibility/2006">
+                        <mc:Choice xmlns:a14="http://schemas.microsoft.com/office/drawing/2010/main" Requires="a14">
+                          <a14:m>
+                            <m:oMathPara xmlns:m="http://schemas.openxmlformats.org/officeDocument/2006/math">
+                              <m:oMathParaPr>
+                                <m:jc m:val="centerGroup"/>
+                              </m:oMathParaPr>
+                              <m:oMath xmlns:mml="http://www.w3.org/1998/Math/MathML">
+                                <m:r>
+                                  <m:t>v2</m:t>
+                                </m:r>
+                                <m:r>
+                                  <m:t>=</m:t>
+                                </m:r>
+                                <m:r>
+                                  <m:rPr>
+                                    <m:sty m:val="p"/>
+                                  </m:rPr>
+                                  <m:t>exp</m:t>
+                                </m:r>
+                                <m:r>
+                                  <m:t>⁡</m:t>
+                                </m:r>
+                                <m:r>
+                                  <m:t>(</m:t>
+                                </m:r>
+                                <m:r>
+                                  <m:t>theta4</m:t>
+                                </m:r>
+                                <m:r>
+                                  <m:t>+</m:t>
+                                </m:r>
+                                <m:r>
+                                  <m:t>eta4</m:t>
+                                </m:r>
+                                <m:r>
+                                  <m:t>)</m:t>
+                                </m:r>
+                              </m:oMath>
+                            </m:oMathPara>
+                          </a14:m>
+                        </mc:Choice>
+                      </mc:AlternateContent>
+                    </a:p>
+                  </a:txBody>
+                  <a:tcPr anchor="ctr" marB="12700" marT="12700" marR="0" marL="0">
+                    <a:lnL algn="ctr" cmpd="sng" cap="flat" w="0">
+                      <a:noFill/>
+                      <a:prstDash val="solid"/>
+                    </a:lnL>
+                    <a:lnR algn="ctr" cmpd="sng" cap="flat" w="0">
+                      <a:noFill/>
+                      <a:prstDash val="solid"/>
+                    </a:lnR>
+                    <a:lnT algn="ctr" cmpd="sng" cap="flat" w="0">
+                      <a:noFill/>
+                      <a:prstDash val="solid"/>
+                    </a:lnT>
+                    <a:lnB algn="ctr" cmpd="sng" cap="flat" w="0">
+                      <a:noFill/>
+                      <a:prstDash val="solid"/>
+                    </a:lnB>
+                    <a:solidFill>
+                      <a:srgbClr val="FFFFFF">
+                        <a:alpha val="0"/>
+                      </a:srgbClr>
+                    </a:solidFill>
+                  </a:tcPr>
+                </a:tc>
+              </a:tr>
+              <a:tr h="228600">
+                <a:tc>
+                  <a:txBody>
+                    <a:bodyPr/>
+                    <a:lstStyle/>
+                    <a:p>
+                      <a:pPr algn="l" marL="63500" marR="63500">
+                        <a:lnSpc>
+                          <a:spcPct val="100000"/>
+                        </a:lnSpc>
+                        <a:spcBef>
+                          <a:spcPts val="100"/>
+                        </a:spcBef>
+                        <a:spcAft>
+                          <a:spcPts val="100"/>
+                        </a:spcAft>
+                        <a:buNone/>
+                      </a:pPr>
+                      <a:rPr cap="none" sz="1100" i="0" b="0" u="none" strike="noStrike">
+                        <a:solidFill>
+                          <a:srgbClr val="000000">
+                            <a:alpha val="100000"/>
+                          </a:srgbClr>
+                        </a:solidFill>
+                        <a:latin typeface="DejaVu Sans"/>
+                        <a:cs typeface="DejaVu Sans"/>
+                        <a:ea typeface="DejaVu Sans"/>
+                        <a:sym typeface="DejaVu Sans"/>
+                      </a:rPr>
+                      <mc:AlternateContent xmlns:mc="http://schemas.openxmlformats.org/markup-compatibility/2006">
+                        <mc:Choice xmlns:a14="http://schemas.microsoft.com/office/drawing/2010/main" Requires="a14">
+                          <a14:m>
+                            <m:oMathPara xmlns:m="http://schemas.openxmlformats.org/officeDocument/2006/math">
+                              <m:oMathParaPr>
+                                <m:jc m:val="centerGroup"/>
+                              </m:oMathParaPr>
+                              <m:oMath xmlns:mml="http://www.w3.org/1998/Math/MathML">
+                                <m:r>
+                                  <m:t>v1</m:t>
+                                </m:r>
+                                <m:r>
+                                  <m:t>=v</m:t>
+                                </m:r>
+                              </m:oMath>
+                            </m:oMathPara>
+                          </a14:m>
+                        </mc:Choice>
+                      </mc:AlternateContent>
+                    </a:p>
+                  </a:txBody>
+                  <a:tcPr anchor="ctr" marB="12700" marT="12700" marR="0" marL="0">
+                    <a:lnL algn="ctr" cmpd="sng" cap="flat" w="0">
+                      <a:noFill/>
+                      <a:prstDash val="solid"/>
+                    </a:lnL>
+                    <a:lnR algn="ctr" cmpd="sng" cap="flat" w="0">
+                      <a:noFill/>
+                      <a:prstDash val="solid"/>
+                    </a:lnR>
+                    <a:lnT algn="ctr" cmpd="sng" cap="flat" w="0">
+                      <a:noFill/>
+                      <a:prstDash val="solid"/>
+                    </a:lnT>
+                    <a:lnB algn="ctr" cmpd="sng" cap="flat" w="0">
+                      <a:noFill/>
+                      <a:prstDash val="solid"/>
+                    </a:lnB>
+                    <a:solidFill>
+                      <a:srgbClr val="FFFFFF">
+                        <a:alpha val="0"/>
+                      </a:srgbClr>
+                    </a:solidFill>
+                  </a:tcPr>
+                </a:tc>
+              </a:tr>
+              <a:tr h="228600">
+                <a:tc>
+                  <a:txBody>
+                    <a:bodyPr/>
+                    <a:lstStyle/>
+                    <a:p>
+                      <a:pPr algn="l" marL="63500" marR="63500">
+                        <a:lnSpc>
+                          <a:spcPct val="100000"/>
+                        </a:lnSpc>
+                        <a:spcBef>
+                          <a:spcPts val="100"/>
+                        </a:spcBef>
+                        <a:spcAft>
+                          <a:spcPts val="100"/>
+                        </a:spcAft>
+                        <a:buNone/>
+                      </a:pPr>
+                      <a:rPr cap="none" sz="1100" i="0" b="0" u="none" strike="noStrike">
+                        <a:solidFill>
+                          <a:srgbClr val="000000">
+                            <a:alpha val="100000"/>
+                          </a:srgbClr>
+                        </a:solidFill>
+                        <a:latin typeface="DejaVu Sans"/>
+                        <a:cs typeface="DejaVu Sans"/>
+                        <a:ea typeface="DejaVu Sans"/>
+                        <a:sym typeface="DejaVu Sans"/>
+                      </a:rPr>
+                      <mc:AlternateContent xmlns:mc="http://schemas.openxmlformats.org/markup-compatibility/2006">
+                        <mc:Choice xmlns:a14="http://schemas.microsoft.com/office/drawing/2010/main" Requires="a14">
+                          <a14:m>
+                            <m:oMathPara xmlns:m="http://schemas.openxmlformats.org/officeDocument/2006/math">
+                              <m:oMathParaPr>
+                                <m:jc m:val="centerGroup"/>
+                              </m:oMathParaPr>
+                              <m:oMath xmlns:mml="http://www.w3.org/1998/Math/MathML">
+                                <m:r>
+                                  <m:t>scale1</m:t>
+                                </m:r>
+                                <m:r>
+                                  <m:t>=v</m:t>
+                                </m:r>
+                              </m:oMath>
+                            </m:oMathPara>
+                          </a14:m>
+                        </mc:Choice>
+                      </mc:AlternateContent>
+                    </a:p>
+                  </a:txBody>
+                  <a:tcPr anchor="ctr" marB="12700" marT="12700" marR="0" marL="0">
+                    <a:lnL algn="ctr" cmpd="sng" cap="flat" w="0">
+                      <a:noFill/>
+                      <a:prstDash val="solid"/>
+                    </a:lnL>
+                    <a:lnR algn="ctr" cmpd="sng" cap="flat" w="0">
+                      <a:noFill/>
+                      <a:prstDash val="solid"/>
+                    </a:lnR>
+                    <a:lnT algn="ctr" cmpd="sng" cap="flat" w="0">
+                      <a:noFill/>
+                      <a:prstDash val="solid"/>
+                    </a:lnT>
+                    <a:lnB algn="ctr" cmpd="sng" cap="flat" w="0">
+                      <a:noFill/>
+                      <a:prstDash val="solid"/>
+                    </a:lnB>
+                    <a:solidFill>
+                      <a:srgbClr val="FFFFFF">
+                        <a:alpha val="0"/>
+                      </a:srgbClr>
+                    </a:solidFill>
+                  </a:tcPr>
+                </a:tc>
+              </a:tr>
+              <a:tr h="228600">
+                <a:tc>
+                  <a:txBody>
+                    <a:bodyPr/>
+                    <a:lstStyle/>
+                    <a:p>
+                      <a:pPr algn="l" marL="63500" marR="63500">
+                        <a:lnSpc>
+                          <a:spcPct val="100000"/>
+                        </a:lnSpc>
+                        <a:spcBef>
+                          <a:spcPts val="100"/>
+                        </a:spcBef>
+                        <a:spcAft>
+                          <a:spcPts val="100"/>
+                        </a:spcAft>
+                        <a:buNone/>
+                      </a:pPr>
+                      <a:rPr cap="none" sz="1100" i="0" b="0" u="none" strike="noStrike">
+                        <a:solidFill>
+                          <a:srgbClr val="000000">
+                            <a:alpha val="100000"/>
+                          </a:srgbClr>
+                        </a:solidFill>
+                        <a:latin typeface="DejaVu Sans"/>
+                        <a:cs typeface="DejaVu Sans"/>
+                        <a:ea typeface="DejaVu Sans"/>
+                        <a:sym typeface="DejaVu Sans"/>
+                      </a:rPr>
+                      <mc:AlternateContent xmlns:mc="http://schemas.openxmlformats.org/markup-compatibility/2006">
+                        <mc:Choice xmlns:a14="http://schemas.microsoft.com/office/drawing/2010/main" Requires="a14">
+                          <a14:m>
+                            <m:oMathPara xmlns:m="http://schemas.openxmlformats.org/officeDocument/2006/math">
+                              <m:oMathParaPr>
+                                <m:jc m:val="centerGroup"/>
+                              </m:oMathParaPr>
+                              <m:oMath xmlns:mml="http://www.w3.org/1998/Math/MathML">
+                                <m:r>
+                                  <m:t>k21</m:t>
+                                </m:r>
+                                <m:r>
+                                  <m:t>=</m:t>
+                                </m:r>
+                                <m:f>
+                                  <m:fPr>
+                                    <m:type m:val="bar"/>
+                                  </m:fPr>
+                                  <m:num>
+                                    <m:r>
+                                      <m:t>q</m:t>
+                                    </m:r>
+                                  </m:num>
+                                  <m:den>
+                                    <m:r>
+                                      <m:t>v2</m:t>
+                                    </m:r>
+                                  </m:den>
+                                </m:f>
+                              </m:oMath>
+                            </m:oMathPara>
+                          </a14:m>
+                        </mc:Choice>
+                      </mc:AlternateContent>
+                    </a:p>
+                  </a:txBody>
+                  <a:tcPr anchor="ctr" marB="12700" marT="12700" marR="0" marL="0">
+                    <a:lnL algn="ctr" cmpd="sng" cap="flat" w="0">
+                      <a:noFill/>
+                      <a:prstDash val="solid"/>
+                    </a:lnL>
+                    <a:lnR algn="ctr" cmpd="sng" cap="flat" w="0">
+                      <a:noFill/>
+                      <a:prstDash val="solid"/>
+                    </a:lnR>
+                    <a:lnT algn="ctr" cmpd="sng" cap="flat" w="0">
+                      <a:noFill/>
+                      <a:prstDash val="solid"/>
+                    </a:lnT>
+                    <a:lnB algn="ctr" cmpd="sng" cap="flat" w="0">
+                      <a:noFill/>
+                      <a:prstDash val="solid"/>
+                    </a:lnB>
+                    <a:solidFill>
+                      <a:srgbClr val="FFFFFF">
+                        <a:alpha val="0"/>
+                      </a:srgbClr>
+                    </a:solidFill>
+                  </a:tcPr>
+                </a:tc>
+              </a:tr>
+              <a:tr h="228600">
+                <a:tc>
+                  <a:txBody>
+                    <a:bodyPr/>
+                    <a:lstStyle/>
+                    <a:p>
+                      <a:pPr algn="l" marL="63500" marR="63500">
+                        <a:lnSpc>
+                          <a:spcPct val="100000"/>
+                        </a:lnSpc>
+                        <a:spcBef>
+                          <a:spcPts val="100"/>
+                        </a:spcBef>
+                        <a:spcAft>
+                          <a:spcPts val="100"/>
+                        </a:spcAft>
+                        <a:buNone/>
+                      </a:pPr>
+                      <a:rPr cap="none" sz="1100" i="0" b="0" u="none" strike="noStrike">
+                        <a:solidFill>
+                          <a:srgbClr val="000000">
+                            <a:alpha val="100000"/>
+                          </a:srgbClr>
+                        </a:solidFill>
+                        <a:latin typeface="DejaVu Sans"/>
+                        <a:cs typeface="DejaVu Sans"/>
+                        <a:ea typeface="DejaVu Sans"/>
+                        <a:sym typeface="DejaVu Sans"/>
+                      </a:rPr>
+                      <mc:AlternateContent xmlns:mc="http://schemas.openxmlformats.org/markup-compatibility/2006">
+                        <mc:Choice xmlns:a14="http://schemas.microsoft.com/office/drawing/2010/main" Requires="a14">
+                          <a14:m>
+                            <m:oMathPara xmlns:m="http://schemas.openxmlformats.org/officeDocument/2006/math">
+                              <m:oMathParaPr>
+                                <m:jc m:val="centerGroup"/>
+                              </m:oMathParaPr>
+                              <m:oMath xmlns:mml="http://www.w3.org/1998/Math/MathML">
+                                <m:r>
+                                  <m:t>k12</m:t>
+                                </m:r>
+                                <m:r>
+                                  <m:t>=</m:t>
+                                </m:r>
+                                <m:f>
+                                  <m:fPr>
+                                    <m:type m:val="bar"/>
+                                  </m:fPr>
+                                  <m:num>
+                                    <m:r>
+                                      <m:t>q</m:t>
+                                    </m:r>
+                                  </m:num>
+                                  <m:den>
+                                    <m:r>
+                                      <m:t>v</m:t>
+                                    </m:r>
+                                  </m:den>
+                                </m:f>
+                              </m:oMath>
+                            </m:oMathPara>
+                          </a14:m>
+                        </mc:Choice>
+                      </mc:AlternateContent>
+                    </a:p>
+                  </a:txBody>
+                  <a:tcPr anchor="ctr" marB="12700" marT="12700" marR="0" marL="0">
+                    <a:lnL algn="ctr" cmpd="sng" cap="flat" w="0">
+                      <a:noFill/>
+                      <a:prstDash val="solid"/>
+                    </a:lnL>
+                    <a:lnR algn="ctr" cmpd="sng" cap="flat" w="0">
+                      <a:noFill/>
+                      <a:prstDash val="solid"/>
+                    </a:lnR>
+                    <a:lnT algn="ctr" cmpd="sng" cap="flat" w="0">
+                      <a:noFill/>
+                      <a:prstDash val="solid"/>
+                    </a:lnT>
+                    <a:lnB algn="ctr" cmpd="sng" cap="flat" w="0">
+                      <a:noFill/>
+                      <a:prstDash val="solid"/>
+                    </a:lnB>
+                    <a:solidFill>
+                      <a:srgbClr val="FFFFFF">
+                        <a:alpha val="0"/>
+                      </a:srgbClr>
+                    </a:solidFill>
+                  </a:tcPr>
+                </a:tc>
+              </a:tr>
+              <a:tr h="228600">
+                <a:tc>
+                  <a:txBody>
+                    <a:bodyPr/>
+                    <a:lstStyle/>
+                    <a:p>
+                      <a:pPr algn="l" marL="63500" marR="63500">
+                        <a:lnSpc>
+                          <a:spcPct val="100000"/>
+                        </a:lnSpc>
+                        <a:spcBef>
+                          <a:spcPts val="100"/>
+                        </a:spcBef>
+                        <a:spcAft>
+                          <a:spcPts val="100"/>
+                        </a:spcAft>
+                        <a:buNone/>
+                      </a:pPr>
+                      <a:rPr cap="none" sz="1100" i="0" b="0" u="none" strike="noStrike">
+                        <a:solidFill>
+                          <a:srgbClr val="000000">
+                            <a:alpha val="100000"/>
+                          </a:srgbClr>
+                        </a:solidFill>
+                        <a:latin typeface="DejaVu Sans"/>
+                        <a:cs typeface="DejaVu Sans"/>
+                        <a:ea typeface="DejaVu Sans"/>
+                        <a:sym typeface="DejaVu Sans"/>
+                      </a:rPr>
+                      <mc:AlternateContent xmlns:mc="http://schemas.openxmlformats.org/markup-compatibility/2006">
+                        <mc:Choice xmlns:a14="http://schemas.microsoft.com/office/drawing/2010/main" Requires="a14">
+                          <a14:m>
+                            <m:oMathPara xmlns:m="http://schemas.openxmlformats.org/officeDocument/2006/math">
+                              <m:oMathParaPr>
+                                <m:jc m:val="centerGroup"/>
+                              </m:oMathParaPr>
+                              <m:oMath xmlns:mml="http://www.w3.org/1998/Math/MathML">
+                                <m:f>
+                                  <m:fPr>
+                                    <m:type m:val="bar"/>
+                                  </m:fPr>
+                                  <m:num>
+                                    <m:r>
+                                      <m:t>d</m:t>
+                                    </m:r>
+                                    <m:r>
+                                      <m:rPr>
+                                        <m:nor/>
+                                      </m:rPr>
+                                      <m:t> </m:t>
+                                    </m:r>
+                                    <m:r>
+                                      <m:t>CENTRAL</m:t>
+                                    </m:r>
+                                  </m:num>
+                                  <m:den>
+                                    <m:r>
+                                      <m:t>dt</m:t>
+                                    </m:r>
+                                  </m:den>
+                                </m:f>
+                                <m:r>
+                                  <m:t>=</m:t>
+                                </m:r>
+                                <m:r>
+                                  <m:t>k21</m:t>
+                                </m:r>
+                                <m:r>
+                                  <m:t>×</m:t>
+                                </m:r>
+                                <m:r>
+                                  <m:t>PERI</m:t>
+                                </m:r>
+                                <m:r>
+                                  <m:t>−</m:t>
+                                </m:r>
+                                <m:r>
+                                  <m:t>k12</m:t>
+                                </m:r>
+                                <m:r>
+                                  <m:t>×</m:t>
+                                </m:r>
+                                <m:r>
+                                  <m:t>CENTRAL</m:t>
+                                </m:r>
+                                <m:r>
+                                  <m:t>−</m:t>
+                                </m:r>
+                                <m:f>
+                                  <m:fPr>
+                                    <m:type m:val="bar"/>
+                                  </m:fPr>
+                                  <m:num>
+                                    <m:r>
+                                      <m:t>cl</m:t>
+                                    </m:r>
+                                    <m:r>
+                                      <m:t>×</m:t>
+                                    </m:r>
+                                    <m:r>
+                                      <m:t>CENTRAL</m:t>
+                                    </m:r>
+                                  </m:num>
+                                  <m:den>
+                                    <m:r>
+                                      <m:t>v1</m:t>
+                                    </m:r>
+                                  </m:den>
+                                </m:f>
+                              </m:oMath>
+                            </m:oMathPara>
+                          </a14:m>
+                        </mc:Choice>
+                      </mc:AlternateContent>
+                    </a:p>
+                  </a:txBody>
+                  <a:tcPr anchor="ctr" marB="12700" marT="12700" marR="0" marL="0">
+                    <a:lnL algn="ctr" cmpd="sng" cap="flat" w="0">
+                      <a:noFill/>
+                      <a:prstDash val="solid"/>
+                    </a:lnL>
+                    <a:lnR algn="ctr" cmpd="sng" cap="flat" w="0">
+                      <a:noFill/>
+                      <a:prstDash val="solid"/>
+                    </a:lnR>
+                    <a:lnT algn="ctr" cmpd="sng" cap="flat" w="0">
+                      <a:noFill/>
+                      <a:prstDash val="solid"/>
+                    </a:lnT>
+                    <a:lnB algn="ctr" cmpd="sng" cap="flat" w="0">
+                      <a:noFill/>
+                      <a:prstDash val="solid"/>
+                    </a:lnB>
+                    <a:solidFill>
+                      <a:srgbClr val="FFFFFF">
+                        <a:alpha val="0"/>
+                      </a:srgbClr>
+                    </a:solidFill>
+                  </a:tcPr>
+                </a:tc>
+              </a:tr>
+              <a:tr h="228600">
+                <a:tc>
+                  <a:txBody>
+                    <a:bodyPr/>
+                    <a:lstStyle/>
+                    <a:p>
+                      <a:pPr algn="l" marL="63500" marR="63500">
+                        <a:lnSpc>
+                          <a:spcPct val="100000"/>
+                        </a:lnSpc>
+                        <a:spcBef>
+                          <a:spcPts val="100"/>
+                        </a:spcBef>
+                        <a:spcAft>
+                          <a:spcPts val="100"/>
+                        </a:spcAft>
+                        <a:buNone/>
+                      </a:pPr>
+                      <a:rPr cap="none" sz="1100" i="0" b="0" u="none" strike="noStrike">
+                        <a:solidFill>
+                          <a:srgbClr val="000000">
+                            <a:alpha val="100000"/>
+                          </a:srgbClr>
+                        </a:solidFill>
+                        <a:latin typeface="DejaVu Sans"/>
+                        <a:cs typeface="DejaVu Sans"/>
+                        <a:ea typeface="DejaVu Sans"/>
+                        <a:sym typeface="DejaVu Sans"/>
+                      </a:rPr>
+                      <mc:AlternateContent xmlns:mc="http://schemas.openxmlformats.org/markup-compatibility/2006">
+                        <mc:Choice xmlns:a14="http://schemas.microsoft.com/office/drawing/2010/main" Requires="a14">
+                          <a14:m>
+                            <m:oMathPara xmlns:m="http://schemas.openxmlformats.org/officeDocument/2006/math">
+                              <m:oMathParaPr>
+                                <m:jc m:val="centerGroup"/>
+                              </m:oMathParaPr>
+                              <m:oMath xmlns:mml="http://www.w3.org/1998/Math/MathML">
+                                <m:f>
+                                  <m:fPr>
+                                    <m:type m:val="bar"/>
+                                  </m:fPr>
+                                  <m:num>
+                                    <m:r>
+                                      <m:t>d</m:t>
+                                    </m:r>
+                                    <m:r>
+                                      <m:rPr>
+                                        <m:nor/>
+                                      </m:rPr>
+                                      <m:t> </m:t>
+                                    </m:r>
+                                    <m:r>
+                                      <m:t>PERI</m:t>
+                                    </m:r>
+                                  </m:num>
+                                  <m:den>
+                                    <m:r>
+                                      <m:t>dt</m:t>
+                                    </m:r>
+                                  </m:den>
+                                </m:f>
+                                <m:r>
+                                  <m:t>=−</m:t>
+                                </m:r>
+                                <m:r>
+                                  <m:t>k21</m:t>
+                                </m:r>
+                                <m:r>
+                                  <m:t>×</m:t>
+                                </m:r>
+                                <m:r>
+                                  <m:t>PERI</m:t>
+                                </m:r>
+                                <m:r>
+                                  <m:t>+</m:t>
+                                </m:r>
+                                <m:r>
+                                  <m:t>k12</m:t>
+                                </m:r>
+                                <m:r>
+                                  <m:t>×</m:t>
+                                </m:r>
+                                <m:r>
+                                  <m:t>CENTRAL</m:t>
+                                </m:r>
+                              </m:oMath>
+                            </m:oMathPara>
+                          </a14:m>
+                        </mc:Choice>
+                      </mc:AlternateContent>
+                    </a:p>
+                  </a:txBody>
+                  <a:tcPr anchor="ctr" marB="12700" marT="12700" marR="0" marL="0">
+                    <a:lnL algn="ctr" cmpd="sng" cap="flat" w="0">
+                      <a:noFill/>
+                      <a:prstDash val="solid"/>
+                    </a:lnL>
+                    <a:lnR algn="ctr" cmpd="sng" cap="flat" w="0">
+                      <a:noFill/>
+                      <a:prstDash val="solid"/>
+                    </a:lnR>
+                    <a:lnT algn="ctr" cmpd="sng" cap="flat" w="0">
+                      <a:noFill/>
+                      <a:prstDash val="solid"/>
+                    </a:lnT>
+                    <a:lnB algn="ctr" cmpd="sng" cap="flat" w="0">
+                      <a:noFill/>
+                      <a:prstDash val="solid"/>
+                    </a:lnB>
+                    <a:solidFill>
+                      <a:srgbClr val="FFFFFF">
+                        <a:alpha val="0"/>
+                      </a:srgbClr>
+                    </a:solidFill>
+                  </a:tcPr>
+                </a:tc>
+              </a:tr>
+              <a:tr h="228600">
+                <a:tc>
+                  <a:txBody>
+                    <a:bodyPr/>
+                    <a:lstStyle/>
+                    <a:p>
+                      <a:pPr algn="l" marL="63500" marR="63500">
+                        <a:lnSpc>
+                          <a:spcPct val="100000"/>
+                        </a:lnSpc>
+                        <a:spcBef>
+                          <a:spcPts val="100"/>
+                        </a:spcBef>
+                        <a:spcAft>
+                          <a:spcPts val="100"/>
+                        </a:spcAft>
+                        <a:buNone/>
+                      </a:pPr>
+                      <a:rPr cap="none" sz="1100" i="0" b="0" u="none" strike="noStrike">
+                        <a:solidFill>
+                          <a:srgbClr val="000000">
+                            <a:alpha val="100000"/>
+                          </a:srgbClr>
+                        </a:solidFill>
+                        <a:latin typeface="DejaVu Sans"/>
+                        <a:cs typeface="DejaVu Sans"/>
+                        <a:ea typeface="DejaVu Sans"/>
+                        <a:sym typeface="DejaVu Sans"/>
+                      </a:rPr>
+                      <mc:AlternateContent xmlns:mc="http://schemas.openxmlformats.org/markup-compatibility/2006">
+                        <mc:Choice xmlns:a14="http://schemas.microsoft.com/office/drawing/2010/main" Requires="a14">
+                          <a14:m>
+                            <m:oMathPara xmlns:m="http://schemas.openxmlformats.org/officeDocument/2006/math">
+                              <m:oMathParaPr>
+                                <m:jc m:val="centerGroup"/>
+                              </m:oMathParaPr>
+                              <m:oMath xmlns:mml="http://www.w3.org/1998/Math/MathML">
+                                <m:r>
+                                  <m:t>f=</m:t>
+                                </m:r>
+                                <m:f>
+                                  <m:fPr>
+                                    <m:type m:val="bar"/>
+                                  </m:fPr>
+                                  <m:num>
+                                    <m:r>
+                                      <m:t>CENTRAL</m:t>
+                                    </m:r>
+                                  </m:num>
+                                  <m:den>
+                                    <m:r>
+                                      <m:t>scale1</m:t>
+                                    </m:r>
+                                  </m:den>
+                                </m:f>
+                              </m:oMath>
+                            </m:oMathPara>
+                          </a14:m>
+                        </mc:Choice>
+                      </mc:AlternateContent>
+                    </a:p>
+                  </a:txBody>
+                  <a:tcPr anchor="ctr" marB="12700" marT="12700" marR="0" marL="0">
+                    <a:lnL algn="ctr" cmpd="sng" cap="flat" w="0">
+                      <a:noFill/>
+                      <a:prstDash val="solid"/>
+                    </a:lnL>
+                    <a:lnR algn="ctr" cmpd="sng" cap="flat" w="0">
+                      <a:noFill/>
+                      <a:prstDash val="solid"/>
+                    </a:lnR>
+                    <a:lnT algn="ctr" cmpd="sng" cap="flat" w="0">
+                      <a:noFill/>
+                      <a:prstDash val="solid"/>
+                    </a:lnT>
+                    <a:lnB algn="ctr" cmpd="sng" cap="flat" w="0">
+                      <a:noFill/>
+                      <a:prstDash val="solid"/>
+                    </a:lnB>
+                    <a:solidFill>
+                      <a:srgbClr val="FFFFFF">
+                        <a:alpha val="0"/>
+                      </a:srgbClr>
+                    </a:solidFill>
+                  </a:tcPr>
+                </a:tc>
+              </a:tr>
+              <a:tr h="228600">
+                <a:tc>
+                  <a:txBody>
+                    <a:bodyPr/>
+                    <a:lstStyle/>
+                    <a:p>
+                      <a:pPr algn="l" marL="63500" marR="63500">
+                        <a:lnSpc>
+                          <a:spcPct val="100000"/>
+                        </a:lnSpc>
+                        <a:spcBef>
+                          <a:spcPts val="100"/>
+                        </a:spcBef>
+                        <a:spcAft>
+                          <a:spcPts val="100"/>
+                        </a:spcAft>
+                        <a:buNone/>
+                      </a:pPr>
+                      <a:rPr cap="none" sz="1100" i="0" b="0" u="none" strike="noStrike">
+                        <a:solidFill>
+                          <a:srgbClr val="000000">
+                            <a:alpha val="100000"/>
+                          </a:srgbClr>
+                        </a:solidFill>
+                        <a:latin typeface="DejaVu Sans"/>
+                        <a:cs typeface="DejaVu Sans"/>
+                        <a:ea typeface="DejaVu Sans"/>
+                        <a:sym typeface="DejaVu Sans"/>
+                      </a:rPr>
+                      <mc:AlternateContent xmlns:mc="http://schemas.openxmlformats.org/markup-compatibility/2006">
+                        <mc:Choice xmlns:a14="http://schemas.microsoft.com/office/drawing/2010/main" Requires="a14">
+                          <a14:m>
+                            <m:oMathPara xmlns:m="http://schemas.openxmlformats.org/officeDocument/2006/math">
+                              <m:oMathParaPr>
+                                <m:jc m:val="centerGroup"/>
+                              </m:oMathParaPr>
+                              <m:oMath xmlns:mml="http://www.w3.org/1998/Math/MathML">
+                                <m:r>
+                                  <m:t>ipred</m:t>
+                                </m:r>
+                                <m:r>
+                                  <m:t>=f</m:t>
+                                </m:r>
+                              </m:oMath>
+                            </m:oMathPara>
+                          </a14:m>
+                        </mc:Choice>
+                      </mc:AlternateContent>
+                    </a:p>
+                  </a:txBody>
+                  <a:tcPr anchor="ctr" marB="12700" marT="12700" marR="0" marL="0">
+                    <a:lnL algn="ctr" cmpd="sng" cap="flat" w="0">
+                      <a:noFill/>
+                      <a:prstDash val="solid"/>
+                    </a:lnL>
+                    <a:lnR algn="ctr" cmpd="sng" cap="flat" w="0">
+                      <a:noFill/>
+                      <a:prstDash val="solid"/>
+                    </a:lnR>
+                    <a:lnT algn="ctr" cmpd="sng" cap="flat" w="0">
+                      <a:noFill/>
+                      <a:prstDash val="solid"/>
+                    </a:lnT>
+                    <a:lnB algn="ctr" cmpd="sng" cap="flat" w="0">
+                      <a:noFill/>
+                      <a:prstDash val="solid"/>
+                    </a:lnB>
+                    <a:solidFill>
+                      <a:srgbClr val="FFFFFF">
+                        <a:alpha val="0"/>
+                      </a:srgbClr>
+                    </a:solidFill>
+                  </a:tcPr>
+                </a:tc>
+              </a:tr>
+              <a:tr h="228600">
+                <a:tc>
+                  <a:txBody>
+                    <a:bodyPr/>
+                    <a:lstStyle/>
+                    <a:p>
+                      <a:pPr algn="l" marL="63500" marR="63500">
+                        <a:lnSpc>
+                          <a:spcPct val="100000"/>
+                        </a:lnSpc>
+                        <a:spcBef>
+                          <a:spcPts val="100"/>
+                        </a:spcBef>
+                        <a:spcAft>
+                          <a:spcPts val="100"/>
+                        </a:spcAft>
+                        <a:buNone/>
+                      </a:pPr>
+                      <a:rPr cap="none" sz="1100" i="0" b="0" u="none" strike="noStrike">
+                        <a:solidFill>
+                          <a:srgbClr val="000000">
+                            <a:alpha val="100000"/>
+                          </a:srgbClr>
+                        </a:solidFill>
+                        <a:latin typeface="DejaVu Sans"/>
+                        <a:cs typeface="DejaVu Sans"/>
+                        <a:ea typeface="DejaVu Sans"/>
+                        <a:sym typeface="DejaVu Sans"/>
+                      </a:rPr>
+                      <mc:AlternateContent xmlns:mc="http://schemas.openxmlformats.org/markup-compatibility/2006">
+                        <mc:Choice xmlns:a14="http://schemas.microsoft.com/office/drawing/2010/main" Requires="a14">
+                          <a14:m>
+                            <m:oMathPara xmlns:m="http://schemas.openxmlformats.org/officeDocument/2006/math">
+                              <m:oMathParaPr>
+                                <m:jc m:val="centerGroup"/>
+                              </m:oMathParaPr>
+                              <m:oMath xmlns:mml="http://www.w3.org/1998/Math/MathML">
+                                <m:r>
+                                  <m:t>rescv</m:t>
+                                </m:r>
+                                <m:r>
+                                  <m:t>=</m:t>
+                                </m:r>
+                                <m:r>
+                                  <m:t>RSV</m:t>
+                                </m:r>
+                              </m:oMath>
+                            </m:oMathPara>
+                          </a14:m>
+                        </mc:Choice>
+                      </mc:AlternateContent>
+                    </a:p>
+                  </a:txBody>
+                  <a:tcPr anchor="ctr" marB="12700" marT="12700" marR="0" marL="0">
+                    <a:lnL algn="ctr" cmpd="sng" cap="flat" w="0">
+                      <a:noFill/>
+                      <a:prstDash val="solid"/>
+                    </a:lnL>
+                    <a:lnR algn="ctr" cmpd="sng" cap="flat" w="0">
+                      <a:noFill/>
+                      <a:prstDash val="solid"/>
+                    </a:lnR>
+                    <a:lnT algn="ctr" cmpd="sng" cap="flat" w="0">
+                      <a:noFill/>
+                      <a:prstDash val="solid"/>
+                    </a:lnT>
+                    <a:lnB algn="ctr" cmpd="sng" cap="flat" w="0">
+                      <a:noFill/>
+                      <a:prstDash val="solid"/>
+                    </a:lnB>
+                    <a:solidFill>
+                      <a:srgbClr val="FFFFFF">
+                        <a:alpha val="0"/>
+                      </a:srgbClr>
+                    </a:solidFill>
+                  </a:tcPr>
+                </a:tc>
+              </a:tr>
+              <a:tr h="228600">
+                <a:tc>
+                  <a:txBody>
+                    <a:bodyPr/>
+                    <a:lstStyle/>
+                    <a:p>
+                      <a:pPr algn="l" marL="63500" marR="63500">
+                        <a:lnSpc>
+                          <a:spcPct val="100000"/>
+                        </a:lnSpc>
+                        <a:spcBef>
+                          <a:spcPts val="100"/>
+                        </a:spcBef>
+                        <a:spcAft>
+                          <a:spcPts val="100"/>
+                        </a:spcAft>
+                        <a:buNone/>
+                      </a:pPr>
+                      <a:rPr cap="none" sz="1100" i="0" b="0" u="none" strike="noStrike">
+                        <a:solidFill>
+                          <a:srgbClr val="000000">
+                            <a:alpha val="100000"/>
+                          </a:srgbClr>
+                        </a:solidFill>
+                        <a:latin typeface="DejaVu Sans"/>
+                        <a:cs typeface="DejaVu Sans"/>
+                        <a:ea typeface="DejaVu Sans"/>
+                        <a:sym typeface="DejaVu Sans"/>
+                      </a:rPr>
+                      <mc:AlternateContent xmlns:mc="http://schemas.openxmlformats.org/markup-compatibility/2006">
+                        <mc:Choice xmlns:a14="http://schemas.microsoft.com/office/drawing/2010/main" Requires="a14">
+                          <a14:m>
+                            <m:oMathPara xmlns:m="http://schemas.openxmlformats.org/officeDocument/2006/math">
+                              <m:oMathParaPr>
+                                <m:jc m:val="centerGroup"/>
+                              </m:oMathParaPr>
+                              <m:oMath xmlns:mml="http://www.w3.org/1998/Math/MathML">
+                                <m:r>
+                                  <m:t>ipred</m:t>
+                                </m:r>
+                                <m:r>
+                                  <m:t>∼prop(</m:t>
+                                </m:r>
+                                <m:r>
+                                  <m:t>RSV</m:t>
+                                </m:r>
+                                <m:r>
+                                  <m:t>)</m:t>
+                                </m:r>
+                              </m:oMath>
+                            </m:oMathPara>
+                          </a14:m>
+                        </mc:Choice>
+                      </mc:AlternateContent>
+                    </a:p>
+                  </a:txBody>
+                  <a:tcPr anchor="ctr" marB="12700" marT="12700" marR="0" marL="0">
+                    <a:lnL algn="ctr" cmpd="sng" cap="flat" w="0">
+                      <a:noFill/>
+                      <a:prstDash val="solid"/>
+                    </a:lnL>
+                    <a:lnR algn="ctr" cmpd="sng" cap="flat" w="0">
+                      <a:noFill/>
+                      <a:prstDash val="solid"/>
+                    </a:lnR>
+                    <a:lnT algn="ctr" cmpd="sng" cap="flat" w="0">
+                      <a:noFill/>
+                      <a:prstDash val="solid"/>
+                    </a:lnT>
+                    <a:lnB algn="ctr" cmpd="sng" cap="flat" w="0">
+                      <a:noFill/>
+                      <a:prstDash val="solid"/>
+                    </a:lnB>
+                    <a:solidFill>
+                      <a:srgbClr val="FFFFFF">
+                        <a:alpha val="0"/>
+                      </a:srgbClr>
+                    </a:solidFill>
+                  </a:tcPr>
+                </a:tc>
+              </a:tr>
+            </a:tbl>
+          </a:graphicData>
+        </a:graphic>
+      </p:graphicFrame>
     </p:spTree>
   </p:cSld>
   <p:clrMapOvr>
@@ -6642,37 +5737,2552 @@
           <a:p>
             <a:r>
               <a:rPr/>
-              <a:t>Individual and population prediction overlay</a:t>
+              <a:t>Parameter Estimates</a:t>
             </a:r>
           </a:p>
         </p:txBody>
       </p:sp>
-      <p:pic>
-        <p:nvPicPr>
-          <p:cNvPr id="3" name="Text Placeholder 2" descr=""/>
-          <p:cNvPicPr>
-            <a:picLocks noGrp="1"/>
-          </p:cNvPicPr>
-          <p:nvPr>
-            <p:ph idx="1"/>
-          </p:nvPr>
-        </p:nvPicPr>
-        <p:blipFill>
-          <a:blip r:embed="rId2"/>
-          <a:stretch>
-            <a:fillRect/>
-          </a:stretch>
-        </p:blipFill>
-        <p:spPr>
-          <a:xfrm>
-            <a:off x="623392" y="1196752"/>
-            <a:ext cx="10945216" cy="5184576"/>
-          </a:xfrm>
-          <a:prstGeom prst="rect">
-            <a:avLst/>
-          </a:prstGeom>
-        </p:spPr>
-      </p:pic>
+      <p:graphicFrame>
+        <p:nvGraphicFramePr>
+          <p:cNvPr id="3" name="Text Placeholder 2"/>
+          <p:cNvGraphicFramePr>
+            <a:graphicFrameLocks noGrp="true"/>
+          </p:cNvGraphicFramePr>
+          <p:nvPr/>
+        </p:nvGraphicFramePr>
+        <p:xfrm rot="0">
+          <a:off x="623392" y="1196752"/>
+          <a:ext cx="10945216" cy="5184576"/>
+        </p:xfrm>
+        <a:graphic>
+          <a:graphicData uri="http://schemas.openxmlformats.org/drawingml/2006/table">
+            <a:tbl>
+              <a:tblPr/>
+              <a:tblGrid>
+                <a:gridCol w="993857"/>
+                <a:gridCol w="660706"/>
+                <a:gridCol w="838468"/>
+                <a:gridCol w="667527"/>
+                <a:gridCol w="2070530"/>
+                <a:gridCol w="975713"/>
+                <a:gridCol w="1141675"/>
+              </a:tblGrid>
+              <a:tr h="405130">
+                <a:tc>
+                  <a:txBody>
+                    <a:bodyPr/>
+                    <a:lstStyle/>
+                    <a:p>
+                      <a:pPr algn="l" marL="63500" marR="63500">
+                        <a:lnSpc>
+                          <a:spcPct val="100000"/>
+                        </a:lnSpc>
+                        <a:spcBef>
+                          <a:spcPts val="500"/>
+                        </a:spcBef>
+                        <a:spcAft>
+                          <a:spcPts val="500"/>
+                        </a:spcAft>
+                        <a:buNone/>
+                      </a:pPr>
+                      <a:r>
+                        <a:rPr cap="none" sz="1100" i="0" b="0" u="none" strike="noStrike">
+                          <a:solidFill>
+                            <a:srgbClr val="000000">
+                              <a:alpha val="100000"/>
+                            </a:srgbClr>
+                          </a:solidFill>
+                          <a:latin typeface="DejaVu Sans"/>
+                          <a:cs typeface="DejaVu Sans"/>
+                          <a:ea typeface="DejaVu Sans"/>
+                          <a:sym typeface="DejaVu Sans"/>
+                        </a:rPr>
+                        <a:t>Parameter</a:t>
+                      </a:r>
+                    </a:p>
+                  </a:txBody>
+                  <a:tcPr anchor="ctr" marB="63500" marT="63500" marR="0" marL="0">
+                    <a:lnL algn="ctr" cmpd="sng" cap="flat" w="0">
+                      <a:noFill/>
+                      <a:prstDash val="solid"/>
+                    </a:lnL>
+                    <a:lnR algn="ctr" cmpd="sng" cap="flat" w="0">
+                      <a:noFill/>
+                      <a:prstDash val="solid"/>
+                    </a:lnR>
+                    <a:lnT algn="ctr" cmpd="sng" cap="flat" w="19050">
+                      <a:solidFill>
+                        <a:srgbClr val="666666">
+                          <a:alpha val="100000"/>
+                        </a:srgbClr>
+                      </a:solidFill>
+                      <a:prstDash val="solid"/>
+                    </a:lnT>
+                    <a:lnB algn="ctr" cmpd="sng" cap="flat" w="19050">
+                      <a:solidFill>
+                        <a:srgbClr val="666666">
+                          <a:alpha val="100000"/>
+                        </a:srgbClr>
+                      </a:solidFill>
+                      <a:prstDash val="solid"/>
+                    </a:lnB>
+                    <a:solidFill>
+                      <a:srgbClr val="FFFFFF">
+                        <a:alpha val="0"/>
+                      </a:srgbClr>
+                    </a:solidFill>
+                  </a:tcPr>
+                </a:tc>
+                <a:tc>
+                  <a:txBody>
+                    <a:bodyPr/>
+                    <a:lstStyle/>
+                    <a:p>
+                      <a:pPr algn="l" marL="63500" marR="63500">
+                        <a:lnSpc>
+                          <a:spcPct val="100000"/>
+                        </a:lnSpc>
+                        <a:spcBef>
+                          <a:spcPts val="500"/>
+                        </a:spcBef>
+                        <a:spcAft>
+                          <a:spcPts val="500"/>
+                        </a:spcAft>
+                        <a:buNone/>
+                      </a:pPr>
+                      <a:r>
+                        <a:rPr cap="none" sz="1100" i="0" b="0" u="none" strike="noStrike">
+                          <a:solidFill>
+                            <a:srgbClr val="000000">
+                              <a:alpha val="100000"/>
+                            </a:srgbClr>
+                          </a:solidFill>
+                          <a:latin typeface="DejaVu Sans"/>
+                          <a:cs typeface="DejaVu Sans"/>
+                          <a:ea typeface="DejaVu Sans"/>
+                          <a:sym typeface="DejaVu Sans"/>
+                        </a:rPr>
+                        <a:t>Est.</a:t>
+                      </a:r>
+                    </a:p>
+                  </a:txBody>
+                  <a:tcPr anchor="ctr" marB="63500" marT="63500" marR="0" marL="0">
+                    <a:lnL algn="ctr" cmpd="sng" cap="flat" w="0">
+                      <a:noFill/>
+                      <a:prstDash val="solid"/>
+                    </a:lnL>
+                    <a:lnR algn="ctr" cmpd="sng" cap="flat" w="0">
+                      <a:noFill/>
+                      <a:prstDash val="solid"/>
+                    </a:lnR>
+                    <a:lnT algn="ctr" cmpd="sng" cap="flat" w="19050">
+                      <a:solidFill>
+                        <a:srgbClr val="666666">
+                          <a:alpha val="100000"/>
+                        </a:srgbClr>
+                      </a:solidFill>
+                      <a:prstDash val="solid"/>
+                    </a:lnT>
+                    <a:lnB algn="ctr" cmpd="sng" cap="flat" w="19050">
+                      <a:solidFill>
+                        <a:srgbClr val="666666">
+                          <a:alpha val="100000"/>
+                        </a:srgbClr>
+                      </a:solidFill>
+                      <a:prstDash val="solid"/>
+                    </a:lnB>
+                    <a:solidFill>
+                      <a:srgbClr val="FFFFFF">
+                        <a:alpha val="0"/>
+                      </a:srgbClr>
+                    </a:solidFill>
+                  </a:tcPr>
+                </a:tc>
+                <a:tc>
+                  <a:txBody>
+                    <a:bodyPr/>
+                    <a:lstStyle/>
+                    <a:p>
+                      <a:pPr algn="l" marL="63500" marR="63500">
+                        <a:lnSpc>
+                          <a:spcPct val="100000"/>
+                        </a:lnSpc>
+                        <a:spcBef>
+                          <a:spcPts val="500"/>
+                        </a:spcBef>
+                        <a:spcAft>
+                          <a:spcPts val="500"/>
+                        </a:spcAft>
+                        <a:buNone/>
+                      </a:pPr>
+                      <a:r>
+                        <a:rPr cap="none" sz="1100" i="0" b="0" u="none" strike="noStrike">
+                          <a:solidFill>
+                            <a:srgbClr val="000000">
+                              <a:alpha val="100000"/>
+                            </a:srgbClr>
+                          </a:solidFill>
+                          <a:latin typeface="DejaVu Sans"/>
+                          <a:cs typeface="DejaVu Sans"/>
+                          <a:ea typeface="DejaVu Sans"/>
+                          <a:sym typeface="DejaVu Sans"/>
+                        </a:rPr>
+                        <a:t>SE</a:t>
+                      </a:r>
+                    </a:p>
+                  </a:txBody>
+                  <a:tcPr anchor="ctr" marB="63500" marT="63500" marR="0" marL="0">
+                    <a:lnL algn="ctr" cmpd="sng" cap="flat" w="0">
+                      <a:noFill/>
+                      <a:prstDash val="solid"/>
+                    </a:lnL>
+                    <a:lnR algn="ctr" cmpd="sng" cap="flat" w="0">
+                      <a:noFill/>
+                      <a:prstDash val="solid"/>
+                    </a:lnR>
+                    <a:lnT algn="ctr" cmpd="sng" cap="flat" w="19050">
+                      <a:solidFill>
+                        <a:srgbClr val="666666">
+                          <a:alpha val="100000"/>
+                        </a:srgbClr>
+                      </a:solidFill>
+                      <a:prstDash val="solid"/>
+                    </a:lnT>
+                    <a:lnB algn="ctr" cmpd="sng" cap="flat" w="19050">
+                      <a:solidFill>
+                        <a:srgbClr val="666666">
+                          <a:alpha val="100000"/>
+                        </a:srgbClr>
+                      </a:solidFill>
+                      <a:prstDash val="solid"/>
+                    </a:lnB>
+                    <a:solidFill>
+                      <a:srgbClr val="FFFFFF">
+                        <a:alpha val="0"/>
+                      </a:srgbClr>
+                    </a:solidFill>
+                  </a:tcPr>
+                </a:tc>
+                <a:tc>
+                  <a:txBody>
+                    <a:bodyPr/>
+                    <a:lstStyle/>
+                    <a:p>
+                      <a:pPr algn="l" marL="63500" marR="63500">
+                        <a:lnSpc>
+                          <a:spcPct val="100000"/>
+                        </a:lnSpc>
+                        <a:spcBef>
+                          <a:spcPts val="500"/>
+                        </a:spcBef>
+                        <a:spcAft>
+                          <a:spcPts val="500"/>
+                        </a:spcAft>
+                        <a:buNone/>
+                      </a:pPr>
+                      <a:r>
+                        <a:rPr cap="none" sz="1100" i="0" b="0" u="none" strike="noStrike">
+                          <a:solidFill>
+                            <a:srgbClr val="000000">
+                              <a:alpha val="100000"/>
+                            </a:srgbClr>
+                          </a:solidFill>
+                          <a:latin typeface="DejaVu Sans"/>
+                          <a:cs typeface="DejaVu Sans"/>
+                          <a:ea typeface="DejaVu Sans"/>
+                          <a:sym typeface="DejaVu Sans"/>
+                        </a:rPr>
+                        <a:t>%RSE</a:t>
+                      </a:r>
+                    </a:p>
+                  </a:txBody>
+                  <a:tcPr anchor="ctr" marB="63500" marT="63500" marR="0" marL="0">
+                    <a:lnL algn="ctr" cmpd="sng" cap="flat" w="0">
+                      <a:noFill/>
+                      <a:prstDash val="solid"/>
+                    </a:lnL>
+                    <a:lnR algn="ctr" cmpd="sng" cap="flat" w="0">
+                      <a:noFill/>
+                      <a:prstDash val="solid"/>
+                    </a:lnR>
+                    <a:lnT algn="ctr" cmpd="sng" cap="flat" w="19050">
+                      <a:solidFill>
+                        <a:srgbClr val="666666">
+                          <a:alpha val="100000"/>
+                        </a:srgbClr>
+                      </a:solidFill>
+                      <a:prstDash val="solid"/>
+                    </a:lnT>
+                    <a:lnB algn="ctr" cmpd="sng" cap="flat" w="19050">
+                      <a:solidFill>
+                        <a:srgbClr val="666666">
+                          <a:alpha val="100000"/>
+                        </a:srgbClr>
+                      </a:solidFill>
+                      <a:prstDash val="solid"/>
+                    </a:lnB>
+                    <a:solidFill>
+                      <a:srgbClr val="FFFFFF">
+                        <a:alpha val="0"/>
+                      </a:srgbClr>
+                    </a:solidFill>
+                  </a:tcPr>
+                </a:tc>
+                <a:tc>
+                  <a:txBody>
+                    <a:bodyPr/>
+                    <a:lstStyle/>
+                    <a:p>
+                      <a:pPr algn="l" marL="63500" marR="63500">
+                        <a:lnSpc>
+                          <a:spcPct val="100000"/>
+                        </a:lnSpc>
+                        <a:spcBef>
+                          <a:spcPts val="500"/>
+                        </a:spcBef>
+                        <a:spcAft>
+                          <a:spcPts val="500"/>
+                        </a:spcAft>
+                        <a:buNone/>
+                      </a:pPr>
+                      <a:r>
+                        <a:rPr cap="none" sz="1100" i="0" b="0" u="none" strike="noStrike">
+                          <a:solidFill>
+                            <a:srgbClr val="000000">
+                              <a:alpha val="100000"/>
+                            </a:srgbClr>
+                          </a:solidFill>
+                          <a:latin typeface="DejaVu Sans"/>
+                          <a:cs typeface="DejaVu Sans"/>
+                          <a:ea typeface="DejaVu Sans"/>
+                          <a:sym typeface="DejaVu Sans"/>
+                        </a:rPr>
+                        <a:t>Back-transformed(95%CI)</a:t>
+                      </a:r>
+                    </a:p>
+                  </a:txBody>
+                  <a:tcPr anchor="ctr" marB="63500" marT="63500" marR="0" marL="0">
+                    <a:lnL algn="ctr" cmpd="sng" cap="flat" w="0">
+                      <a:noFill/>
+                      <a:prstDash val="solid"/>
+                    </a:lnL>
+                    <a:lnR algn="ctr" cmpd="sng" cap="flat" w="0">
+                      <a:noFill/>
+                      <a:prstDash val="solid"/>
+                    </a:lnR>
+                    <a:lnT algn="ctr" cmpd="sng" cap="flat" w="19050">
+                      <a:solidFill>
+                        <a:srgbClr val="666666">
+                          <a:alpha val="100000"/>
+                        </a:srgbClr>
+                      </a:solidFill>
+                      <a:prstDash val="solid"/>
+                    </a:lnT>
+                    <a:lnB algn="ctr" cmpd="sng" cap="flat" w="19050">
+                      <a:solidFill>
+                        <a:srgbClr val="666666">
+                          <a:alpha val="100000"/>
+                        </a:srgbClr>
+                      </a:solidFill>
+                      <a:prstDash val="solid"/>
+                    </a:lnB>
+                    <a:solidFill>
+                      <a:srgbClr val="FFFFFF">
+                        <a:alpha val="0"/>
+                      </a:srgbClr>
+                    </a:solidFill>
+                  </a:tcPr>
+                </a:tc>
+                <a:tc>
+                  <a:txBody>
+                    <a:bodyPr/>
+                    <a:lstStyle/>
+                    <a:p>
+                      <a:pPr algn="l" marL="63500" marR="63500">
+                        <a:lnSpc>
+                          <a:spcPct val="100000"/>
+                        </a:lnSpc>
+                        <a:spcBef>
+                          <a:spcPts val="500"/>
+                        </a:spcBef>
+                        <a:spcAft>
+                          <a:spcPts val="500"/>
+                        </a:spcAft>
+                        <a:buNone/>
+                      </a:pPr>
+                      <a:r>
+                        <a:rPr cap="none" sz="1100" i="0" b="0" u="none" strike="noStrike">
+                          <a:solidFill>
+                            <a:srgbClr val="000000">
+                              <a:alpha val="100000"/>
+                            </a:srgbClr>
+                          </a:solidFill>
+                          <a:latin typeface="DejaVu Sans"/>
+                          <a:cs typeface="DejaVu Sans"/>
+                          <a:ea typeface="DejaVu Sans"/>
+                          <a:sym typeface="DejaVu Sans"/>
+                        </a:rPr>
+                        <a:t>BSV(CV%)</a:t>
+                      </a:r>
+                    </a:p>
+                  </a:txBody>
+                  <a:tcPr anchor="ctr" marB="63500" marT="63500" marR="0" marL="0">
+                    <a:lnL algn="ctr" cmpd="sng" cap="flat" w="0">
+                      <a:noFill/>
+                      <a:prstDash val="solid"/>
+                    </a:lnL>
+                    <a:lnR algn="ctr" cmpd="sng" cap="flat" w="0">
+                      <a:noFill/>
+                      <a:prstDash val="solid"/>
+                    </a:lnR>
+                    <a:lnT algn="ctr" cmpd="sng" cap="flat" w="19050">
+                      <a:solidFill>
+                        <a:srgbClr val="666666">
+                          <a:alpha val="100000"/>
+                        </a:srgbClr>
+                      </a:solidFill>
+                      <a:prstDash val="solid"/>
+                    </a:lnT>
+                    <a:lnB algn="ctr" cmpd="sng" cap="flat" w="19050">
+                      <a:solidFill>
+                        <a:srgbClr val="666666">
+                          <a:alpha val="100000"/>
+                        </a:srgbClr>
+                      </a:solidFill>
+                      <a:prstDash val="solid"/>
+                    </a:lnB>
+                    <a:solidFill>
+                      <a:srgbClr val="FFFFFF">
+                        <a:alpha val="0"/>
+                      </a:srgbClr>
+                    </a:solidFill>
+                  </a:tcPr>
+                </a:tc>
+                <a:tc>
+                  <a:txBody>
+                    <a:bodyPr/>
+                    <a:lstStyle/>
+                    <a:p>
+                      <a:pPr algn="l" marL="63500" marR="63500">
+                        <a:lnSpc>
+                          <a:spcPct val="100000"/>
+                        </a:lnSpc>
+                        <a:spcBef>
+                          <a:spcPts val="500"/>
+                        </a:spcBef>
+                        <a:spcAft>
+                          <a:spcPts val="500"/>
+                        </a:spcAft>
+                        <a:buNone/>
+                      </a:pPr>
+                      <a:r>
+                        <a:rPr cap="none" sz="1100" i="0" b="0" u="none" strike="noStrike">
+                          <a:solidFill>
+                            <a:srgbClr val="000000">
+                              <a:alpha val="100000"/>
+                            </a:srgbClr>
+                          </a:solidFill>
+                          <a:latin typeface="DejaVu Sans"/>
+                          <a:cs typeface="DejaVu Sans"/>
+                          <a:ea typeface="DejaVu Sans"/>
+                          <a:sym typeface="DejaVu Sans"/>
+                        </a:rPr>
+                        <a:t>Shrink(SD)%</a:t>
+                      </a:r>
+                    </a:p>
+                  </a:txBody>
+                  <a:tcPr anchor="ctr" marB="63500" marT="63500" marR="0" marL="0">
+                    <a:lnL algn="ctr" cmpd="sng" cap="flat" w="0">
+                      <a:noFill/>
+                      <a:prstDash val="solid"/>
+                    </a:lnL>
+                    <a:lnR algn="ctr" cmpd="sng" cap="flat" w="0">
+                      <a:noFill/>
+                      <a:prstDash val="solid"/>
+                    </a:lnR>
+                    <a:lnT algn="ctr" cmpd="sng" cap="flat" w="19050">
+                      <a:solidFill>
+                        <a:srgbClr val="666666">
+                          <a:alpha val="100000"/>
+                        </a:srgbClr>
+                      </a:solidFill>
+                      <a:prstDash val="solid"/>
+                    </a:lnT>
+                    <a:lnB algn="ctr" cmpd="sng" cap="flat" w="19050">
+                      <a:solidFill>
+                        <a:srgbClr val="666666">
+                          <a:alpha val="100000"/>
+                        </a:srgbClr>
+                      </a:solidFill>
+                      <a:prstDash val="solid"/>
+                    </a:lnB>
+                    <a:solidFill>
+                      <a:srgbClr val="FFFFFF">
+                        <a:alpha val="0"/>
+                      </a:srgbClr>
+                    </a:solidFill>
+                  </a:tcPr>
+                </a:tc>
+              </a:tr>
+              <a:tr h="401320">
+                <a:tc>
+                  <a:txBody>
+                    <a:bodyPr/>
+                    <a:lstStyle/>
+                    <a:p>
+                      <a:pPr algn="l" marL="63500" marR="63500">
+                        <a:lnSpc>
+                          <a:spcPct val="100000"/>
+                        </a:lnSpc>
+                        <a:spcBef>
+                          <a:spcPts val="500"/>
+                        </a:spcBef>
+                        <a:spcAft>
+                          <a:spcPts val="500"/>
+                        </a:spcAft>
+                        <a:buNone/>
+                      </a:pPr>
+                      <a:r>
+                        <a:rPr cap="none" sz="1200" i="0" b="0" u="none" strike="noStrike">
+                          <a:solidFill>
+                            <a:srgbClr val="000000">
+                              <a:alpha val="100000"/>
+                            </a:srgbClr>
+                          </a:solidFill>
+                          <a:latin typeface="Helvetica"/>
+                          <a:cs typeface="Helvetica"/>
+                          <a:ea typeface="Helvetica"/>
+                          <a:sym typeface="Helvetica"/>
+                        </a:rPr>
+                        <a:t>log Cl</a:t>
+                      </a:r>
+                    </a:p>
+                  </a:txBody>
+                  <a:tcPr anchor="ctr" marB="63500" marT="63500" marR="0" marL="0">
+                    <a:lnL algn="ctr" cmpd="sng" cap="flat" w="0">
+                      <a:noFill/>
+                      <a:prstDash val="solid"/>
+                    </a:lnL>
+                    <a:lnR algn="ctr" cmpd="sng" cap="flat" w="0">
+                      <a:noFill/>
+                      <a:prstDash val="solid"/>
+                    </a:lnR>
+                    <a:lnT algn="ctr" cmpd="sng" cap="flat" w="0">
+                      <a:noFill/>
+                      <a:prstDash val="solid"/>
+                    </a:lnT>
+                    <a:lnB algn="ctr" cmpd="sng" cap="flat" w="0">
+                      <a:noFill/>
+                      <a:prstDash val="solid"/>
+                    </a:lnB>
+                    <a:solidFill>
+                      <a:srgbClr val="FFFFFF">
+                        <a:alpha val="0"/>
+                      </a:srgbClr>
+                    </a:solidFill>
+                  </a:tcPr>
+                </a:tc>
+                <a:tc>
+                  <a:txBody>
+                    <a:bodyPr/>
+                    <a:lstStyle/>
+                    <a:p>
+                      <a:pPr algn="l" marL="63500" marR="63500">
+                        <a:lnSpc>
+                          <a:spcPct val="100000"/>
+                        </a:lnSpc>
+                        <a:spcBef>
+                          <a:spcPts val="500"/>
+                        </a:spcBef>
+                        <a:spcAft>
+                          <a:spcPts val="500"/>
+                        </a:spcAft>
+                        <a:buNone/>
+                      </a:pPr>
+                      <a:r>
+                        <a:rPr cap="none" sz="1100" i="0" b="0" u="none" strike="noStrike">
+                          <a:solidFill>
+                            <a:srgbClr val="000000">
+                              <a:alpha val="100000"/>
+                            </a:srgbClr>
+                          </a:solidFill>
+                          <a:latin typeface="DejaVu Sans"/>
+                          <a:cs typeface="DejaVu Sans"/>
+                          <a:ea typeface="DejaVu Sans"/>
+                          <a:sym typeface="DejaVu Sans"/>
+                        </a:rPr>
+                        <a:t>1.37</a:t>
+                      </a:r>
+                    </a:p>
+                  </a:txBody>
+                  <a:tcPr anchor="ctr" marB="63500" marT="63500" marR="0" marL="0">
+                    <a:lnL algn="ctr" cmpd="sng" cap="flat" w="0">
+                      <a:noFill/>
+                      <a:prstDash val="solid"/>
+                    </a:lnL>
+                    <a:lnR algn="ctr" cmpd="sng" cap="flat" w="0">
+                      <a:noFill/>
+                      <a:prstDash val="solid"/>
+                    </a:lnR>
+                    <a:lnT algn="ctr" cmpd="sng" cap="flat" w="0">
+                      <a:noFill/>
+                      <a:prstDash val="solid"/>
+                    </a:lnT>
+                    <a:lnB algn="ctr" cmpd="sng" cap="flat" w="0">
+                      <a:noFill/>
+                      <a:prstDash val="solid"/>
+                    </a:lnB>
+                    <a:solidFill>
+                      <a:srgbClr val="FFFFFF">
+                        <a:alpha val="0"/>
+                      </a:srgbClr>
+                    </a:solidFill>
+                  </a:tcPr>
+                </a:tc>
+                <a:tc>
+                  <a:txBody>
+                    <a:bodyPr/>
+                    <a:lstStyle/>
+                    <a:p>
+                      <a:pPr algn="l" marL="63500" marR="63500">
+                        <a:lnSpc>
+                          <a:spcPct val="100000"/>
+                        </a:lnSpc>
+                        <a:spcBef>
+                          <a:spcPts val="500"/>
+                        </a:spcBef>
+                        <a:spcAft>
+                          <a:spcPts val="500"/>
+                        </a:spcAft>
+                        <a:buNone/>
+                      </a:pPr>
+                      <a:r>
+                        <a:rPr cap="none" sz="1100" i="0" b="0" u="none" strike="noStrike">
+                          <a:solidFill>
+                            <a:srgbClr val="000000">
+                              <a:alpha val="100000"/>
+                            </a:srgbClr>
+                          </a:solidFill>
+                          <a:latin typeface="DejaVu Sans"/>
+                          <a:cs typeface="DejaVu Sans"/>
+                          <a:ea typeface="DejaVu Sans"/>
+                          <a:sym typeface="DejaVu Sans"/>
+                        </a:rPr>
+                        <a:t>0.0298</a:t>
+                      </a:r>
+                    </a:p>
+                  </a:txBody>
+                  <a:tcPr anchor="ctr" marB="63500" marT="63500" marR="0" marL="0">
+                    <a:lnL algn="ctr" cmpd="sng" cap="flat" w="0">
+                      <a:noFill/>
+                      <a:prstDash val="solid"/>
+                    </a:lnL>
+                    <a:lnR algn="ctr" cmpd="sng" cap="flat" w="0">
+                      <a:noFill/>
+                      <a:prstDash val="solid"/>
+                    </a:lnR>
+                    <a:lnT algn="ctr" cmpd="sng" cap="flat" w="0">
+                      <a:noFill/>
+                      <a:prstDash val="solid"/>
+                    </a:lnT>
+                    <a:lnB algn="ctr" cmpd="sng" cap="flat" w="0">
+                      <a:noFill/>
+                      <a:prstDash val="solid"/>
+                    </a:lnB>
+                    <a:solidFill>
+                      <a:srgbClr val="FFFFFF">
+                        <a:alpha val="0"/>
+                      </a:srgbClr>
+                    </a:solidFill>
+                  </a:tcPr>
+                </a:tc>
+                <a:tc>
+                  <a:txBody>
+                    <a:bodyPr/>
+                    <a:lstStyle/>
+                    <a:p>
+                      <a:pPr algn="l" marL="63500" marR="63500">
+                        <a:lnSpc>
+                          <a:spcPct val="100000"/>
+                        </a:lnSpc>
+                        <a:spcBef>
+                          <a:spcPts val="500"/>
+                        </a:spcBef>
+                        <a:spcAft>
+                          <a:spcPts val="500"/>
+                        </a:spcAft>
+                        <a:buNone/>
+                      </a:pPr>
+                      <a:r>
+                        <a:rPr cap="none" sz="1100" i="0" b="0" u="none" strike="noStrike">
+                          <a:solidFill>
+                            <a:srgbClr val="000000">
+                              <a:alpha val="100000"/>
+                            </a:srgbClr>
+                          </a:solidFill>
+                          <a:latin typeface="DejaVu Sans"/>
+                          <a:cs typeface="DejaVu Sans"/>
+                          <a:ea typeface="DejaVu Sans"/>
+                          <a:sym typeface="DejaVu Sans"/>
+                        </a:rPr>
+                        <a:t>2.17</a:t>
+                      </a:r>
+                    </a:p>
+                  </a:txBody>
+                  <a:tcPr anchor="ctr" marB="63500" marT="63500" marR="0" marL="0">
+                    <a:lnL algn="ctr" cmpd="sng" cap="flat" w="0">
+                      <a:noFill/>
+                      <a:prstDash val="solid"/>
+                    </a:lnL>
+                    <a:lnR algn="ctr" cmpd="sng" cap="flat" w="0">
+                      <a:noFill/>
+                      <a:prstDash val="solid"/>
+                    </a:lnR>
+                    <a:lnT algn="ctr" cmpd="sng" cap="flat" w="0">
+                      <a:noFill/>
+                      <a:prstDash val="solid"/>
+                    </a:lnT>
+                    <a:lnB algn="ctr" cmpd="sng" cap="flat" w="0">
+                      <a:noFill/>
+                      <a:prstDash val="solid"/>
+                    </a:lnB>
+                    <a:solidFill>
+                      <a:srgbClr val="FFFFFF">
+                        <a:alpha val="0"/>
+                      </a:srgbClr>
+                    </a:solidFill>
+                  </a:tcPr>
+                </a:tc>
+                <a:tc>
+                  <a:txBody>
+                    <a:bodyPr/>
+                    <a:lstStyle/>
+                    <a:p>
+                      <a:pPr algn="l" marL="63500" marR="63500">
+                        <a:lnSpc>
+                          <a:spcPct val="100000"/>
+                        </a:lnSpc>
+                        <a:spcBef>
+                          <a:spcPts val="500"/>
+                        </a:spcBef>
+                        <a:spcAft>
+                          <a:spcPts val="500"/>
+                        </a:spcAft>
+                        <a:buNone/>
+                      </a:pPr>
+                      <a:r>
+                        <a:rPr cap="none" sz="1100" i="0" b="0" u="none" strike="noStrike">
+                          <a:solidFill>
+                            <a:srgbClr val="000000">
+                              <a:alpha val="100000"/>
+                            </a:srgbClr>
+                          </a:solidFill>
+                          <a:latin typeface="DejaVu Sans"/>
+                          <a:cs typeface="DejaVu Sans"/>
+                          <a:ea typeface="DejaVu Sans"/>
+                          <a:sym typeface="DejaVu Sans"/>
+                        </a:rPr>
+                        <a:t>3.94 (3.71, 4.17)</a:t>
+                      </a:r>
+                    </a:p>
+                  </a:txBody>
+                  <a:tcPr anchor="ctr" marB="63500" marT="63500" marR="0" marL="0">
+                    <a:lnL algn="ctr" cmpd="sng" cap="flat" w="0">
+                      <a:noFill/>
+                      <a:prstDash val="solid"/>
+                    </a:lnL>
+                    <a:lnR algn="ctr" cmpd="sng" cap="flat" w="0">
+                      <a:noFill/>
+                      <a:prstDash val="solid"/>
+                    </a:lnR>
+                    <a:lnT algn="ctr" cmpd="sng" cap="flat" w="0">
+                      <a:noFill/>
+                      <a:prstDash val="solid"/>
+                    </a:lnT>
+                    <a:lnB algn="ctr" cmpd="sng" cap="flat" w="0">
+                      <a:noFill/>
+                      <a:prstDash val="solid"/>
+                    </a:lnB>
+                    <a:solidFill>
+                      <a:srgbClr val="FFFFFF">
+                        <a:alpha val="0"/>
+                      </a:srgbClr>
+                    </a:solidFill>
+                  </a:tcPr>
+                </a:tc>
+                <a:tc>
+                  <a:txBody>
+                    <a:bodyPr/>
+                    <a:lstStyle/>
+                    <a:p>
+                      <a:pPr algn="l" marL="63500" marR="63500">
+                        <a:lnSpc>
+                          <a:spcPct val="100000"/>
+                        </a:lnSpc>
+                        <a:spcBef>
+                          <a:spcPts val="500"/>
+                        </a:spcBef>
+                        <a:spcAft>
+                          <a:spcPts val="500"/>
+                        </a:spcAft>
+                        <a:buNone/>
+                      </a:pPr>
+                      <a:r>
+                        <a:rPr cap="none" sz="1100" i="0" b="0" u="none" strike="noStrike">
+                          <a:solidFill>
+                            <a:srgbClr val="000000">
+                              <a:alpha val="100000"/>
+                            </a:srgbClr>
+                          </a:solidFill>
+                          <a:latin typeface="DejaVu Sans"/>
+                          <a:cs typeface="DejaVu Sans"/>
+                          <a:ea typeface="DejaVu Sans"/>
+                          <a:sym typeface="DejaVu Sans"/>
+                        </a:rPr>
+                        <a:t>32.6</a:t>
+                      </a:r>
+                    </a:p>
+                  </a:txBody>
+                  <a:tcPr anchor="ctr" marB="63500" marT="63500" marR="0" marL="0">
+                    <a:lnL algn="ctr" cmpd="sng" cap="flat" w="0">
+                      <a:noFill/>
+                      <a:prstDash val="solid"/>
+                    </a:lnL>
+                    <a:lnR algn="ctr" cmpd="sng" cap="flat" w="0">
+                      <a:noFill/>
+                      <a:prstDash val="solid"/>
+                    </a:lnR>
+                    <a:lnT algn="ctr" cmpd="sng" cap="flat" w="0">
+                      <a:noFill/>
+                      <a:prstDash val="solid"/>
+                    </a:lnT>
+                    <a:lnB algn="ctr" cmpd="sng" cap="flat" w="0">
+                      <a:noFill/>
+                      <a:prstDash val="solid"/>
+                    </a:lnB>
+                    <a:solidFill>
+                      <a:srgbClr val="FFFFFF">
+                        <a:alpha val="0"/>
+                      </a:srgbClr>
+                    </a:solidFill>
+                  </a:tcPr>
+                </a:tc>
+                <a:tc>
+                  <a:txBody>
+                    <a:bodyPr/>
+                    <a:lstStyle/>
+                    <a:p>
+                      <a:pPr algn="l" marL="63500" marR="63500">
+                        <a:lnSpc>
+                          <a:spcPct val="100000"/>
+                        </a:lnSpc>
+                        <a:spcBef>
+                          <a:spcPts val="500"/>
+                        </a:spcBef>
+                        <a:spcAft>
+                          <a:spcPts val="500"/>
+                        </a:spcAft>
+                        <a:buNone/>
+                      </a:pPr>
+                      <a:r>
+                        <a:rPr cap="none" sz="1100" i="0" b="0" u="none" strike="noStrike">
+                          <a:solidFill>
+                            <a:srgbClr val="000000">
+                              <a:alpha val="100000"/>
+                            </a:srgbClr>
+                          </a:solidFill>
+                          <a:latin typeface="DejaVu Sans"/>
+                          <a:cs typeface="DejaVu Sans"/>
+                          <a:ea typeface="DejaVu Sans"/>
+                          <a:sym typeface="DejaVu Sans"/>
+                        </a:rPr>
+                        <a:t>1.94&lt;</a:t>
+                      </a:r>
+                    </a:p>
+                  </a:txBody>
+                  <a:tcPr anchor="ctr" marB="63500" marT="63500" marR="0" marL="0">
+                    <a:lnL algn="ctr" cmpd="sng" cap="flat" w="0">
+                      <a:noFill/>
+                      <a:prstDash val="solid"/>
+                    </a:lnL>
+                    <a:lnR algn="ctr" cmpd="sng" cap="flat" w="0">
+                      <a:noFill/>
+                      <a:prstDash val="solid"/>
+                    </a:lnR>
+                    <a:lnT algn="ctr" cmpd="sng" cap="flat" w="0">
+                      <a:noFill/>
+                      <a:prstDash val="solid"/>
+                    </a:lnT>
+                    <a:lnB algn="ctr" cmpd="sng" cap="flat" w="0">
+                      <a:noFill/>
+                      <a:prstDash val="solid"/>
+                    </a:lnB>
+                    <a:solidFill>
+                      <a:srgbClr val="FFFFFF">
+                        <a:alpha val="0"/>
+                      </a:srgbClr>
+                    </a:solidFill>
+                  </a:tcPr>
+                </a:tc>
+              </a:tr>
+              <a:tr h="401320">
+                <a:tc>
+                  <a:txBody>
+                    <a:bodyPr/>
+                    <a:lstStyle/>
+                    <a:p>
+                      <a:pPr algn="l" marL="63500" marR="63500">
+                        <a:lnSpc>
+                          <a:spcPct val="100000"/>
+                        </a:lnSpc>
+                        <a:spcBef>
+                          <a:spcPts val="500"/>
+                        </a:spcBef>
+                        <a:spcAft>
+                          <a:spcPts val="500"/>
+                        </a:spcAft>
+                        <a:buNone/>
+                      </a:pPr>
+                      <a:r>
+                        <a:rPr cap="none" sz="1200" i="0" b="0" u="none" strike="noStrike">
+                          <a:solidFill>
+                            <a:srgbClr val="000000">
+                              <a:alpha val="100000"/>
+                            </a:srgbClr>
+                          </a:solidFill>
+                          <a:latin typeface="Helvetica"/>
+                          <a:cs typeface="Helvetica"/>
+                          <a:ea typeface="Helvetica"/>
+                          <a:sym typeface="Helvetica"/>
+                        </a:rPr>
+                        <a:t>log Vc</a:t>
+                      </a:r>
+                    </a:p>
+                  </a:txBody>
+                  <a:tcPr anchor="ctr" marB="63500" marT="63500" marR="0" marL="0">
+                    <a:lnL algn="ctr" cmpd="sng" cap="flat" w="0">
+                      <a:noFill/>
+                      <a:prstDash val="solid"/>
+                    </a:lnL>
+                    <a:lnR algn="ctr" cmpd="sng" cap="flat" w="0">
+                      <a:noFill/>
+                      <a:prstDash val="solid"/>
+                    </a:lnR>
+                    <a:lnT algn="ctr" cmpd="sng" cap="flat" w="0">
+                      <a:noFill/>
+                      <a:prstDash val="solid"/>
+                    </a:lnT>
+                    <a:lnB algn="ctr" cmpd="sng" cap="flat" w="0">
+                      <a:noFill/>
+                      <a:prstDash val="solid"/>
+                    </a:lnB>
+                    <a:solidFill>
+                      <a:srgbClr val="FFFFFF">
+                        <a:alpha val="0"/>
+                      </a:srgbClr>
+                    </a:solidFill>
+                  </a:tcPr>
+                </a:tc>
+                <a:tc>
+                  <a:txBody>
+                    <a:bodyPr/>
+                    <a:lstStyle/>
+                    <a:p>
+                      <a:pPr algn="l" marL="63500" marR="63500">
+                        <a:lnSpc>
+                          <a:spcPct val="100000"/>
+                        </a:lnSpc>
+                        <a:spcBef>
+                          <a:spcPts val="500"/>
+                        </a:spcBef>
+                        <a:spcAft>
+                          <a:spcPts val="500"/>
+                        </a:spcAft>
+                        <a:buNone/>
+                      </a:pPr>
+                      <a:r>
+                        <a:rPr cap="none" sz="1100" i="0" b="0" u="none" strike="noStrike">
+                          <a:solidFill>
+                            <a:srgbClr val="000000">
+                              <a:alpha val="100000"/>
+                            </a:srgbClr>
+                          </a:solidFill>
+                          <a:latin typeface="DejaVu Sans"/>
+                          <a:cs typeface="DejaVu Sans"/>
+                          <a:ea typeface="DejaVu Sans"/>
+                          <a:sym typeface="DejaVu Sans"/>
+                        </a:rPr>
+                        <a:t>4.20</a:t>
+                      </a:r>
+                    </a:p>
+                  </a:txBody>
+                  <a:tcPr anchor="ctr" marB="63500" marT="63500" marR="0" marL="0">
+                    <a:lnL algn="ctr" cmpd="sng" cap="flat" w="0">
+                      <a:noFill/>
+                      <a:prstDash val="solid"/>
+                    </a:lnL>
+                    <a:lnR algn="ctr" cmpd="sng" cap="flat" w="0">
+                      <a:noFill/>
+                      <a:prstDash val="solid"/>
+                    </a:lnR>
+                    <a:lnT algn="ctr" cmpd="sng" cap="flat" w="0">
+                      <a:noFill/>
+                      <a:prstDash val="solid"/>
+                    </a:lnT>
+                    <a:lnB algn="ctr" cmpd="sng" cap="flat" w="0">
+                      <a:noFill/>
+                      <a:prstDash val="solid"/>
+                    </a:lnB>
+                    <a:solidFill>
+                      <a:srgbClr val="FFFFFF">
+                        <a:alpha val="0"/>
+                      </a:srgbClr>
+                    </a:solidFill>
+                  </a:tcPr>
+                </a:tc>
+                <a:tc>
+                  <a:txBody>
+                    <a:bodyPr/>
+                    <a:lstStyle/>
+                    <a:p>
+                      <a:pPr algn="l" marL="63500" marR="63500">
+                        <a:lnSpc>
+                          <a:spcPct val="100000"/>
+                        </a:lnSpc>
+                        <a:spcBef>
+                          <a:spcPts val="500"/>
+                        </a:spcBef>
+                        <a:spcAft>
+                          <a:spcPts val="500"/>
+                        </a:spcAft>
+                        <a:buNone/>
+                      </a:pPr>
+                      <a:r>
+                        <a:rPr cap="none" sz="1100" i="0" b="0" u="none" strike="noStrike">
+                          <a:solidFill>
+                            <a:srgbClr val="000000">
+                              <a:alpha val="100000"/>
+                            </a:srgbClr>
+                          </a:solidFill>
+                          <a:latin typeface="DejaVu Sans"/>
+                          <a:cs typeface="DejaVu Sans"/>
+                          <a:ea typeface="DejaVu Sans"/>
+                          <a:sym typeface="DejaVu Sans"/>
+                        </a:rPr>
+                        <a:t>0.0295</a:t>
+                      </a:r>
+                    </a:p>
+                  </a:txBody>
+                  <a:tcPr anchor="ctr" marB="63500" marT="63500" marR="0" marL="0">
+                    <a:lnL algn="ctr" cmpd="sng" cap="flat" w="0">
+                      <a:noFill/>
+                      <a:prstDash val="solid"/>
+                    </a:lnL>
+                    <a:lnR algn="ctr" cmpd="sng" cap="flat" w="0">
+                      <a:noFill/>
+                      <a:prstDash val="solid"/>
+                    </a:lnR>
+                    <a:lnT algn="ctr" cmpd="sng" cap="flat" w="0">
+                      <a:noFill/>
+                      <a:prstDash val="solid"/>
+                    </a:lnT>
+                    <a:lnB algn="ctr" cmpd="sng" cap="flat" w="0">
+                      <a:noFill/>
+                      <a:prstDash val="solid"/>
+                    </a:lnB>
+                    <a:solidFill>
+                      <a:srgbClr val="FFFFFF">
+                        <a:alpha val="0"/>
+                      </a:srgbClr>
+                    </a:solidFill>
+                  </a:tcPr>
+                </a:tc>
+                <a:tc>
+                  <a:txBody>
+                    <a:bodyPr/>
+                    <a:lstStyle/>
+                    <a:p>
+                      <a:pPr algn="l" marL="63500" marR="63500">
+                        <a:lnSpc>
+                          <a:spcPct val="100000"/>
+                        </a:lnSpc>
+                        <a:spcBef>
+                          <a:spcPts val="500"/>
+                        </a:spcBef>
+                        <a:spcAft>
+                          <a:spcPts val="500"/>
+                        </a:spcAft>
+                        <a:buNone/>
+                      </a:pPr>
+                      <a:r>
+                        <a:rPr cap="none" sz="1100" i="0" b="0" u="none" strike="noStrike">
+                          <a:solidFill>
+                            <a:srgbClr val="000000">
+                              <a:alpha val="100000"/>
+                            </a:srgbClr>
+                          </a:solidFill>
+                          <a:latin typeface="DejaVu Sans"/>
+                          <a:cs typeface="DejaVu Sans"/>
+                          <a:ea typeface="DejaVu Sans"/>
+                          <a:sym typeface="DejaVu Sans"/>
+                        </a:rPr>
+                        <a:t>0.703</a:t>
+                      </a:r>
+                    </a:p>
+                  </a:txBody>
+                  <a:tcPr anchor="ctr" marB="63500" marT="63500" marR="0" marL="0">
+                    <a:lnL algn="ctr" cmpd="sng" cap="flat" w="0">
+                      <a:noFill/>
+                      <a:prstDash val="solid"/>
+                    </a:lnL>
+                    <a:lnR algn="ctr" cmpd="sng" cap="flat" w="0">
+                      <a:noFill/>
+                      <a:prstDash val="solid"/>
+                    </a:lnR>
+                    <a:lnT algn="ctr" cmpd="sng" cap="flat" w="0">
+                      <a:noFill/>
+                      <a:prstDash val="solid"/>
+                    </a:lnT>
+                    <a:lnB algn="ctr" cmpd="sng" cap="flat" w="0">
+                      <a:noFill/>
+                      <a:prstDash val="solid"/>
+                    </a:lnB>
+                    <a:solidFill>
+                      <a:srgbClr val="FFFFFF">
+                        <a:alpha val="0"/>
+                      </a:srgbClr>
+                    </a:solidFill>
+                  </a:tcPr>
+                </a:tc>
+                <a:tc>
+                  <a:txBody>
+                    <a:bodyPr/>
+                    <a:lstStyle/>
+                    <a:p>
+                      <a:pPr algn="l" marL="63500" marR="63500">
+                        <a:lnSpc>
+                          <a:spcPct val="100000"/>
+                        </a:lnSpc>
+                        <a:spcBef>
+                          <a:spcPts val="500"/>
+                        </a:spcBef>
+                        <a:spcAft>
+                          <a:spcPts val="500"/>
+                        </a:spcAft>
+                        <a:buNone/>
+                      </a:pPr>
+                      <a:r>
+                        <a:rPr cap="none" sz="1100" i="0" b="0" u="none" strike="noStrike">
+                          <a:solidFill>
+                            <a:srgbClr val="000000">
+                              <a:alpha val="100000"/>
+                            </a:srgbClr>
+                          </a:solidFill>
+                          <a:latin typeface="DejaVu Sans"/>
+                          <a:cs typeface="DejaVu Sans"/>
+                          <a:ea typeface="DejaVu Sans"/>
+                          <a:sym typeface="DejaVu Sans"/>
+                        </a:rPr>
+                        <a:t>66.6 (62.8, 70.5)</a:t>
+                      </a:r>
+                    </a:p>
+                  </a:txBody>
+                  <a:tcPr anchor="ctr" marB="63500" marT="63500" marR="0" marL="0">
+                    <a:lnL algn="ctr" cmpd="sng" cap="flat" w="0">
+                      <a:noFill/>
+                      <a:prstDash val="solid"/>
+                    </a:lnL>
+                    <a:lnR algn="ctr" cmpd="sng" cap="flat" w="0">
+                      <a:noFill/>
+                      <a:prstDash val="solid"/>
+                    </a:lnR>
+                    <a:lnT algn="ctr" cmpd="sng" cap="flat" w="0">
+                      <a:noFill/>
+                      <a:prstDash val="solid"/>
+                    </a:lnT>
+                    <a:lnB algn="ctr" cmpd="sng" cap="flat" w="0">
+                      <a:noFill/>
+                      <a:prstDash val="solid"/>
+                    </a:lnB>
+                    <a:solidFill>
+                      <a:srgbClr val="FFFFFF">
+                        <a:alpha val="0"/>
+                      </a:srgbClr>
+                    </a:solidFill>
+                  </a:tcPr>
+                </a:tc>
+                <a:tc>
+                  <a:txBody>
+                    <a:bodyPr/>
+                    <a:lstStyle/>
+                    <a:p>
+                      <a:pPr algn="l" marL="63500" marR="63500">
+                        <a:lnSpc>
+                          <a:spcPct val="100000"/>
+                        </a:lnSpc>
+                        <a:spcBef>
+                          <a:spcPts val="500"/>
+                        </a:spcBef>
+                        <a:spcAft>
+                          <a:spcPts val="500"/>
+                        </a:spcAft>
+                        <a:buNone/>
+                      </a:pPr>
+                      <a:r>
+                        <a:rPr cap="none" sz="1100" i="0" b="0" u="none" strike="noStrike">
+                          <a:solidFill>
+                            <a:srgbClr val="000000">
+                              <a:alpha val="100000"/>
+                            </a:srgbClr>
+                          </a:solidFill>
+                          <a:latin typeface="DejaVu Sans"/>
+                          <a:cs typeface="DejaVu Sans"/>
+                          <a:ea typeface="DejaVu Sans"/>
+                          <a:sym typeface="DejaVu Sans"/>
+                        </a:rPr>
+                        <a:t>32.3</a:t>
+                      </a:r>
+                    </a:p>
+                  </a:txBody>
+                  <a:tcPr anchor="ctr" marB="63500" marT="63500" marR="0" marL="0">
+                    <a:lnL algn="ctr" cmpd="sng" cap="flat" w="0">
+                      <a:noFill/>
+                      <a:prstDash val="solid"/>
+                    </a:lnL>
+                    <a:lnR algn="ctr" cmpd="sng" cap="flat" w="0">
+                      <a:noFill/>
+                      <a:prstDash val="solid"/>
+                    </a:lnR>
+                    <a:lnT algn="ctr" cmpd="sng" cap="flat" w="0">
+                      <a:noFill/>
+                      <a:prstDash val="solid"/>
+                    </a:lnT>
+                    <a:lnB algn="ctr" cmpd="sng" cap="flat" w="0">
+                      <a:noFill/>
+                      <a:prstDash val="solid"/>
+                    </a:lnB>
+                    <a:solidFill>
+                      <a:srgbClr val="FFFFFF">
+                        <a:alpha val="0"/>
+                      </a:srgbClr>
+                    </a:solidFill>
+                  </a:tcPr>
+                </a:tc>
+                <a:tc>
+                  <a:txBody>
+                    <a:bodyPr/>
+                    <a:lstStyle/>
+                    <a:p>
+                      <a:pPr algn="l" marL="63500" marR="63500">
+                        <a:lnSpc>
+                          <a:spcPct val="100000"/>
+                        </a:lnSpc>
+                        <a:spcBef>
+                          <a:spcPts val="500"/>
+                        </a:spcBef>
+                        <a:spcAft>
+                          <a:spcPts val="500"/>
+                        </a:spcAft>
+                        <a:buNone/>
+                      </a:pPr>
+                      <a:r>
+                        <a:rPr cap="none" sz="1100" i="0" b="0" u="none" strike="noStrike">
+                          <a:solidFill>
+                            <a:srgbClr val="000000">
+                              <a:alpha val="100000"/>
+                            </a:srgbClr>
+                          </a:solidFill>
+                          <a:latin typeface="DejaVu Sans"/>
+                          <a:cs typeface="DejaVu Sans"/>
+                          <a:ea typeface="DejaVu Sans"/>
+                          <a:sym typeface="DejaVu Sans"/>
+                        </a:rPr>
+                        <a:t>2.46&lt;</a:t>
+                      </a:r>
+                    </a:p>
+                  </a:txBody>
+                  <a:tcPr anchor="ctr" marB="63500" marT="63500" marR="0" marL="0">
+                    <a:lnL algn="ctr" cmpd="sng" cap="flat" w="0">
+                      <a:noFill/>
+                      <a:prstDash val="solid"/>
+                    </a:lnL>
+                    <a:lnR algn="ctr" cmpd="sng" cap="flat" w="0">
+                      <a:noFill/>
+                      <a:prstDash val="solid"/>
+                    </a:lnR>
+                    <a:lnT algn="ctr" cmpd="sng" cap="flat" w="0">
+                      <a:noFill/>
+                      <a:prstDash val="solid"/>
+                    </a:lnT>
+                    <a:lnB algn="ctr" cmpd="sng" cap="flat" w="0">
+                      <a:noFill/>
+                      <a:prstDash val="solid"/>
+                    </a:lnB>
+                    <a:solidFill>
+                      <a:srgbClr val="FFFFFF">
+                        <a:alpha val="0"/>
+                      </a:srgbClr>
+                    </a:solidFill>
+                  </a:tcPr>
+                </a:tc>
+              </a:tr>
+              <a:tr h="401320">
+                <a:tc>
+                  <a:txBody>
+                    <a:bodyPr/>
+                    <a:lstStyle/>
+                    <a:p>
+                      <a:pPr algn="l" marL="63500" marR="63500">
+                        <a:lnSpc>
+                          <a:spcPct val="100000"/>
+                        </a:lnSpc>
+                        <a:spcBef>
+                          <a:spcPts val="500"/>
+                        </a:spcBef>
+                        <a:spcAft>
+                          <a:spcPts val="500"/>
+                        </a:spcAft>
+                        <a:buNone/>
+                      </a:pPr>
+                      <a:r>
+                        <a:rPr cap="none" sz="1200" i="0" b="0" u="none" strike="noStrike">
+                          <a:solidFill>
+                            <a:srgbClr val="000000">
+                              <a:alpha val="100000"/>
+                            </a:srgbClr>
+                          </a:solidFill>
+                          <a:latin typeface="Helvetica"/>
+                          <a:cs typeface="Helvetica"/>
+                          <a:ea typeface="Helvetica"/>
+                          <a:sym typeface="Helvetica"/>
+                        </a:rPr>
+                        <a:t>log Q</a:t>
+                      </a:r>
+                    </a:p>
+                  </a:txBody>
+                  <a:tcPr anchor="ctr" marB="63500" marT="63500" marR="0" marL="0">
+                    <a:lnL algn="ctr" cmpd="sng" cap="flat" w="0">
+                      <a:noFill/>
+                      <a:prstDash val="solid"/>
+                    </a:lnL>
+                    <a:lnR algn="ctr" cmpd="sng" cap="flat" w="0">
+                      <a:noFill/>
+                      <a:prstDash val="solid"/>
+                    </a:lnR>
+                    <a:lnT algn="ctr" cmpd="sng" cap="flat" w="0">
+                      <a:noFill/>
+                      <a:prstDash val="solid"/>
+                    </a:lnT>
+                    <a:lnB algn="ctr" cmpd="sng" cap="flat" w="0">
+                      <a:noFill/>
+                      <a:prstDash val="solid"/>
+                    </a:lnB>
+                    <a:solidFill>
+                      <a:srgbClr val="FFFFFF">
+                        <a:alpha val="0"/>
+                      </a:srgbClr>
+                    </a:solidFill>
+                  </a:tcPr>
+                </a:tc>
+                <a:tc>
+                  <a:txBody>
+                    <a:bodyPr/>
+                    <a:lstStyle/>
+                    <a:p>
+                      <a:pPr algn="l" marL="63500" marR="63500">
+                        <a:lnSpc>
+                          <a:spcPct val="100000"/>
+                        </a:lnSpc>
+                        <a:spcBef>
+                          <a:spcPts val="500"/>
+                        </a:spcBef>
+                        <a:spcAft>
+                          <a:spcPts val="500"/>
+                        </a:spcAft>
+                        <a:buNone/>
+                      </a:pPr>
+                      <a:r>
+                        <a:rPr cap="none" sz="1100" i="0" b="0" u="none" strike="noStrike">
+                          <a:solidFill>
+                            <a:srgbClr val="000000">
+                              <a:alpha val="100000"/>
+                            </a:srgbClr>
+                          </a:solidFill>
+                          <a:latin typeface="DejaVu Sans"/>
+                          <a:cs typeface="DejaVu Sans"/>
+                          <a:ea typeface="DejaVu Sans"/>
+                          <a:sym typeface="DejaVu Sans"/>
+                        </a:rPr>
+                        <a:t>1.38</a:t>
+                      </a:r>
+                    </a:p>
+                  </a:txBody>
+                  <a:tcPr anchor="ctr" marB="63500" marT="63500" marR="0" marL="0">
+                    <a:lnL algn="ctr" cmpd="sng" cap="flat" w="0">
+                      <a:noFill/>
+                      <a:prstDash val="solid"/>
+                    </a:lnL>
+                    <a:lnR algn="ctr" cmpd="sng" cap="flat" w="0">
+                      <a:noFill/>
+                      <a:prstDash val="solid"/>
+                    </a:lnR>
+                    <a:lnT algn="ctr" cmpd="sng" cap="flat" w="0">
+                      <a:noFill/>
+                      <a:prstDash val="solid"/>
+                    </a:lnT>
+                    <a:lnB algn="ctr" cmpd="sng" cap="flat" w="0">
+                      <a:noFill/>
+                      <a:prstDash val="solid"/>
+                    </a:lnB>
+                    <a:solidFill>
+                      <a:srgbClr val="FFFFFF">
+                        <a:alpha val="0"/>
+                      </a:srgbClr>
+                    </a:solidFill>
+                  </a:tcPr>
+                </a:tc>
+                <a:tc>
+                  <a:txBody>
+                    <a:bodyPr/>
+                    <a:lstStyle/>
+                    <a:p>
+                      <a:pPr algn="l" marL="63500" marR="63500">
+                        <a:lnSpc>
+                          <a:spcPct val="100000"/>
+                        </a:lnSpc>
+                        <a:spcBef>
+                          <a:spcPts val="500"/>
+                        </a:spcBef>
+                        <a:spcAft>
+                          <a:spcPts val="500"/>
+                        </a:spcAft>
+                        <a:buNone/>
+                      </a:pPr>
+                      <a:r>
+                        <a:rPr cap="none" sz="1100" i="0" b="0" u="none" strike="noStrike">
+                          <a:solidFill>
+                            <a:srgbClr val="000000">
+                              <a:alpha val="100000"/>
+                            </a:srgbClr>
+                          </a:solidFill>
+                          <a:latin typeface="DejaVu Sans"/>
+                          <a:cs typeface="DejaVu Sans"/>
+                          <a:ea typeface="DejaVu Sans"/>
+                          <a:sym typeface="DejaVu Sans"/>
+                        </a:rPr>
+                        <a:t>0.0547</a:t>
+                      </a:r>
+                    </a:p>
+                  </a:txBody>
+                  <a:tcPr anchor="ctr" marB="63500" marT="63500" marR="0" marL="0">
+                    <a:lnL algn="ctr" cmpd="sng" cap="flat" w="0">
+                      <a:noFill/>
+                      <a:prstDash val="solid"/>
+                    </a:lnL>
+                    <a:lnR algn="ctr" cmpd="sng" cap="flat" w="0">
+                      <a:noFill/>
+                      <a:prstDash val="solid"/>
+                    </a:lnR>
+                    <a:lnT algn="ctr" cmpd="sng" cap="flat" w="0">
+                      <a:noFill/>
+                      <a:prstDash val="solid"/>
+                    </a:lnT>
+                    <a:lnB algn="ctr" cmpd="sng" cap="flat" w="0">
+                      <a:noFill/>
+                      <a:prstDash val="solid"/>
+                    </a:lnB>
+                    <a:solidFill>
+                      <a:srgbClr val="FFFFFF">
+                        <a:alpha val="0"/>
+                      </a:srgbClr>
+                    </a:solidFill>
+                  </a:tcPr>
+                </a:tc>
+                <a:tc>
+                  <a:txBody>
+                    <a:bodyPr/>
+                    <a:lstStyle/>
+                    <a:p>
+                      <a:pPr algn="l" marL="63500" marR="63500">
+                        <a:lnSpc>
+                          <a:spcPct val="100000"/>
+                        </a:lnSpc>
+                        <a:spcBef>
+                          <a:spcPts val="500"/>
+                        </a:spcBef>
+                        <a:spcAft>
+                          <a:spcPts val="500"/>
+                        </a:spcAft>
+                        <a:buNone/>
+                      </a:pPr>
+                      <a:r>
+                        <a:rPr cap="none" sz="1100" i="0" b="0" u="none" strike="noStrike">
+                          <a:solidFill>
+                            <a:srgbClr val="000000">
+                              <a:alpha val="100000"/>
+                            </a:srgbClr>
+                          </a:solidFill>
+                          <a:latin typeface="DejaVu Sans"/>
+                          <a:cs typeface="DejaVu Sans"/>
+                          <a:ea typeface="DejaVu Sans"/>
+                          <a:sym typeface="DejaVu Sans"/>
+                        </a:rPr>
+                        <a:t>3.96</a:t>
+                      </a:r>
+                    </a:p>
+                  </a:txBody>
+                  <a:tcPr anchor="ctr" marB="63500" marT="63500" marR="0" marL="0">
+                    <a:lnL algn="ctr" cmpd="sng" cap="flat" w="0">
+                      <a:noFill/>
+                      <a:prstDash val="solid"/>
+                    </a:lnL>
+                    <a:lnR algn="ctr" cmpd="sng" cap="flat" w="0">
+                      <a:noFill/>
+                      <a:prstDash val="solid"/>
+                    </a:lnR>
+                    <a:lnT algn="ctr" cmpd="sng" cap="flat" w="0">
+                      <a:noFill/>
+                      <a:prstDash val="solid"/>
+                    </a:lnT>
+                    <a:lnB algn="ctr" cmpd="sng" cap="flat" w="0">
+                      <a:noFill/>
+                      <a:prstDash val="solid"/>
+                    </a:lnB>
+                    <a:solidFill>
+                      <a:srgbClr val="FFFFFF">
+                        <a:alpha val="0"/>
+                      </a:srgbClr>
+                    </a:solidFill>
+                  </a:tcPr>
+                </a:tc>
+                <a:tc>
+                  <a:txBody>
+                    <a:bodyPr/>
+                    <a:lstStyle/>
+                    <a:p>
+                      <a:pPr algn="l" marL="63500" marR="63500">
+                        <a:lnSpc>
+                          <a:spcPct val="100000"/>
+                        </a:lnSpc>
+                        <a:spcBef>
+                          <a:spcPts val="500"/>
+                        </a:spcBef>
+                        <a:spcAft>
+                          <a:spcPts val="500"/>
+                        </a:spcAft>
+                        <a:buNone/>
+                      </a:pPr>
+                      <a:r>
+                        <a:rPr cap="none" sz="1100" i="0" b="0" u="none" strike="noStrike">
+                          <a:solidFill>
+                            <a:srgbClr val="000000">
+                              <a:alpha val="100000"/>
+                            </a:srgbClr>
+                          </a:solidFill>
+                          <a:latin typeface="DejaVu Sans"/>
+                          <a:cs typeface="DejaVu Sans"/>
+                          <a:ea typeface="DejaVu Sans"/>
+                          <a:sym typeface="DejaVu Sans"/>
+                        </a:rPr>
+                        <a:t>3.98 (3.57, 4.42)</a:t>
+                      </a:r>
+                    </a:p>
+                  </a:txBody>
+                  <a:tcPr anchor="ctr" marB="63500" marT="63500" marR="0" marL="0">
+                    <a:lnL algn="ctr" cmpd="sng" cap="flat" w="0">
+                      <a:noFill/>
+                      <a:prstDash val="solid"/>
+                    </a:lnL>
+                    <a:lnR algn="ctr" cmpd="sng" cap="flat" w="0">
+                      <a:noFill/>
+                      <a:prstDash val="solid"/>
+                    </a:lnR>
+                    <a:lnT algn="ctr" cmpd="sng" cap="flat" w="0">
+                      <a:noFill/>
+                      <a:prstDash val="solid"/>
+                    </a:lnT>
+                    <a:lnB algn="ctr" cmpd="sng" cap="flat" w="0">
+                      <a:noFill/>
+                      <a:prstDash val="solid"/>
+                    </a:lnB>
+                    <a:solidFill>
+                      <a:srgbClr val="FFFFFF">
+                        <a:alpha val="0"/>
+                      </a:srgbClr>
+                    </a:solidFill>
+                  </a:tcPr>
+                </a:tc>
+                <a:tc>
+                  <a:txBody>
+                    <a:bodyPr/>
+                    <a:lstStyle/>
+                    <a:p>
+                      <a:pPr algn="l" marL="63500" marR="63500">
+                        <a:lnSpc>
+                          <a:spcPct val="100000"/>
+                        </a:lnSpc>
+                        <a:spcBef>
+                          <a:spcPts val="500"/>
+                        </a:spcBef>
+                        <a:spcAft>
+                          <a:spcPts val="500"/>
+                        </a:spcAft>
+                        <a:buNone/>
+                      </a:pPr>
+                      <a:r>
+                        <a:rPr cap="none" sz="1100" i="0" b="0" u="none" strike="noStrike">
+                          <a:solidFill>
+                            <a:srgbClr val="000000">
+                              <a:alpha val="100000"/>
+                            </a:srgbClr>
+                          </a:solidFill>
+                          <a:latin typeface="DejaVu Sans"/>
+                          <a:cs typeface="DejaVu Sans"/>
+                          <a:ea typeface="DejaVu Sans"/>
+                          <a:sym typeface="DejaVu Sans"/>
+                        </a:rPr>
+                        <a:t>32.7</a:t>
+                      </a:r>
+                    </a:p>
+                  </a:txBody>
+                  <a:tcPr anchor="ctr" marB="63500" marT="63500" marR="0" marL="0">
+                    <a:lnL algn="ctr" cmpd="sng" cap="flat" w="0">
+                      <a:noFill/>
+                      <a:prstDash val="solid"/>
+                    </a:lnL>
+                    <a:lnR algn="ctr" cmpd="sng" cap="flat" w="0">
+                      <a:noFill/>
+                      <a:prstDash val="solid"/>
+                    </a:lnR>
+                    <a:lnT algn="ctr" cmpd="sng" cap="flat" w="0">
+                      <a:noFill/>
+                      <a:prstDash val="solid"/>
+                    </a:lnT>
+                    <a:lnB algn="ctr" cmpd="sng" cap="flat" w="0">
+                      <a:noFill/>
+                      <a:prstDash val="solid"/>
+                    </a:lnB>
+                    <a:solidFill>
+                      <a:srgbClr val="FFFFFF">
+                        <a:alpha val="0"/>
+                      </a:srgbClr>
+                    </a:solidFill>
+                  </a:tcPr>
+                </a:tc>
+                <a:tc>
+                  <a:txBody>
+                    <a:bodyPr/>
+                    <a:lstStyle/>
+                    <a:p>
+                      <a:pPr algn="l" marL="63500" marR="63500">
+                        <a:lnSpc>
+                          <a:spcPct val="100000"/>
+                        </a:lnSpc>
+                        <a:spcBef>
+                          <a:spcPts val="500"/>
+                        </a:spcBef>
+                        <a:spcAft>
+                          <a:spcPts val="500"/>
+                        </a:spcAft>
+                        <a:buNone/>
+                      </a:pPr>
+                      <a:r>
+                        <a:rPr cap="none" sz="1100" i="0" b="0" u="none" strike="noStrike">
+                          <a:solidFill>
+                            <a:srgbClr val="000000">
+                              <a:alpha val="100000"/>
+                            </a:srgbClr>
+                          </a:solidFill>
+                          <a:latin typeface="DejaVu Sans"/>
+                          <a:cs typeface="DejaVu Sans"/>
+                          <a:ea typeface="DejaVu Sans"/>
+                          <a:sym typeface="DejaVu Sans"/>
+                        </a:rPr>
+                        <a:t>40.5&gt;</a:t>
+                      </a:r>
+                    </a:p>
+                  </a:txBody>
+                  <a:tcPr anchor="ctr" marB="63500" marT="63500" marR="0" marL="0">
+                    <a:lnL algn="ctr" cmpd="sng" cap="flat" w="0">
+                      <a:noFill/>
+                      <a:prstDash val="solid"/>
+                    </a:lnL>
+                    <a:lnR algn="ctr" cmpd="sng" cap="flat" w="0">
+                      <a:noFill/>
+                      <a:prstDash val="solid"/>
+                    </a:lnR>
+                    <a:lnT algn="ctr" cmpd="sng" cap="flat" w="0">
+                      <a:noFill/>
+                      <a:prstDash val="solid"/>
+                    </a:lnT>
+                    <a:lnB algn="ctr" cmpd="sng" cap="flat" w="0">
+                      <a:noFill/>
+                      <a:prstDash val="solid"/>
+                    </a:lnB>
+                    <a:solidFill>
+                      <a:srgbClr val="FFFFFF">
+                        <a:alpha val="0"/>
+                      </a:srgbClr>
+                    </a:solidFill>
+                  </a:tcPr>
+                </a:tc>
+              </a:tr>
+              <a:tr h="401320">
+                <a:tc>
+                  <a:txBody>
+                    <a:bodyPr/>
+                    <a:lstStyle/>
+                    <a:p>
+                      <a:pPr algn="l" marL="63500" marR="63500">
+                        <a:lnSpc>
+                          <a:spcPct val="100000"/>
+                        </a:lnSpc>
+                        <a:spcBef>
+                          <a:spcPts val="500"/>
+                        </a:spcBef>
+                        <a:spcAft>
+                          <a:spcPts val="500"/>
+                        </a:spcAft>
+                        <a:buNone/>
+                      </a:pPr>
+                      <a:r>
+                        <a:rPr cap="none" sz="1200" i="0" b="0" u="none" strike="noStrike">
+                          <a:solidFill>
+                            <a:srgbClr val="000000">
+                              <a:alpha val="100000"/>
+                            </a:srgbClr>
+                          </a:solidFill>
+                          <a:latin typeface="Helvetica"/>
+                          <a:cs typeface="Helvetica"/>
+                          <a:ea typeface="Helvetica"/>
+                          <a:sym typeface="Helvetica"/>
+                        </a:rPr>
+                        <a:t>log Vp</a:t>
+                      </a:r>
+                    </a:p>
+                  </a:txBody>
+                  <a:tcPr anchor="ctr" marB="63500" marT="63500" marR="0" marL="0">
+                    <a:lnL algn="ctr" cmpd="sng" cap="flat" w="0">
+                      <a:noFill/>
+                      <a:prstDash val="solid"/>
+                    </a:lnL>
+                    <a:lnR algn="ctr" cmpd="sng" cap="flat" w="0">
+                      <a:noFill/>
+                      <a:prstDash val="solid"/>
+                    </a:lnR>
+                    <a:lnT algn="ctr" cmpd="sng" cap="flat" w="0">
+                      <a:noFill/>
+                      <a:prstDash val="solid"/>
+                    </a:lnT>
+                    <a:lnB algn="ctr" cmpd="sng" cap="flat" w="0">
+                      <a:noFill/>
+                      <a:prstDash val="solid"/>
+                    </a:lnB>
+                    <a:solidFill>
+                      <a:srgbClr val="FFFFFF">
+                        <a:alpha val="0"/>
+                      </a:srgbClr>
+                    </a:solidFill>
+                  </a:tcPr>
+                </a:tc>
+                <a:tc>
+                  <a:txBody>
+                    <a:bodyPr/>
+                    <a:lstStyle/>
+                    <a:p>
+                      <a:pPr algn="l" marL="63500" marR="63500">
+                        <a:lnSpc>
+                          <a:spcPct val="100000"/>
+                        </a:lnSpc>
+                        <a:spcBef>
+                          <a:spcPts val="500"/>
+                        </a:spcBef>
+                        <a:spcAft>
+                          <a:spcPts val="500"/>
+                        </a:spcAft>
+                        <a:buNone/>
+                      </a:pPr>
+                      <a:r>
+                        <a:rPr cap="none" sz="1100" i="0" b="0" u="none" strike="noStrike">
+                          <a:solidFill>
+                            <a:srgbClr val="000000">
+                              <a:alpha val="100000"/>
+                            </a:srgbClr>
+                          </a:solidFill>
+                          <a:latin typeface="DejaVu Sans"/>
+                          <a:cs typeface="DejaVu Sans"/>
+                          <a:ea typeface="DejaVu Sans"/>
+                          <a:sym typeface="DejaVu Sans"/>
+                        </a:rPr>
+                        <a:t>3.88</a:t>
+                      </a:r>
+                    </a:p>
+                  </a:txBody>
+                  <a:tcPr anchor="ctr" marB="63500" marT="63500" marR="0" marL="0">
+                    <a:lnL algn="ctr" cmpd="sng" cap="flat" w="0">
+                      <a:noFill/>
+                      <a:prstDash val="solid"/>
+                    </a:lnL>
+                    <a:lnR algn="ctr" cmpd="sng" cap="flat" w="0">
+                      <a:noFill/>
+                      <a:prstDash val="solid"/>
+                    </a:lnR>
+                    <a:lnT algn="ctr" cmpd="sng" cap="flat" w="0">
+                      <a:noFill/>
+                      <a:prstDash val="solid"/>
+                    </a:lnT>
+                    <a:lnB algn="ctr" cmpd="sng" cap="flat" w="0">
+                      <a:noFill/>
+                      <a:prstDash val="solid"/>
+                    </a:lnB>
+                    <a:solidFill>
+                      <a:srgbClr val="FFFFFF">
+                        <a:alpha val="0"/>
+                      </a:srgbClr>
+                    </a:solidFill>
+                  </a:tcPr>
+                </a:tc>
+                <a:tc>
+                  <a:txBody>
+                    <a:bodyPr/>
+                    <a:lstStyle/>
+                    <a:p>
+                      <a:pPr algn="l" marL="63500" marR="63500">
+                        <a:lnSpc>
+                          <a:spcPct val="100000"/>
+                        </a:lnSpc>
+                        <a:spcBef>
+                          <a:spcPts val="500"/>
+                        </a:spcBef>
+                        <a:spcAft>
+                          <a:spcPts val="500"/>
+                        </a:spcAft>
+                        <a:buNone/>
+                      </a:pPr>
+                      <a:r>
+                        <a:rPr cap="none" sz="1100" i="0" b="0" u="none" strike="noStrike">
+                          <a:solidFill>
+                            <a:srgbClr val="000000">
+                              <a:alpha val="100000"/>
+                            </a:srgbClr>
+                          </a:solidFill>
+                          <a:latin typeface="DejaVu Sans"/>
+                          <a:cs typeface="DejaVu Sans"/>
+                          <a:ea typeface="DejaVu Sans"/>
+                          <a:sym typeface="DejaVu Sans"/>
+                        </a:rPr>
+                        <a:t>0.0348</a:t>
+                      </a:r>
+                    </a:p>
+                  </a:txBody>
+                  <a:tcPr anchor="ctr" marB="63500" marT="63500" marR="0" marL="0">
+                    <a:lnL algn="ctr" cmpd="sng" cap="flat" w="0">
+                      <a:noFill/>
+                      <a:prstDash val="solid"/>
+                    </a:lnL>
+                    <a:lnR algn="ctr" cmpd="sng" cap="flat" w="0">
+                      <a:noFill/>
+                      <a:prstDash val="solid"/>
+                    </a:lnR>
+                    <a:lnT algn="ctr" cmpd="sng" cap="flat" w="0">
+                      <a:noFill/>
+                      <a:prstDash val="solid"/>
+                    </a:lnT>
+                    <a:lnB algn="ctr" cmpd="sng" cap="flat" w="0">
+                      <a:noFill/>
+                      <a:prstDash val="solid"/>
+                    </a:lnB>
+                    <a:solidFill>
+                      <a:srgbClr val="FFFFFF">
+                        <a:alpha val="0"/>
+                      </a:srgbClr>
+                    </a:solidFill>
+                  </a:tcPr>
+                </a:tc>
+                <a:tc>
+                  <a:txBody>
+                    <a:bodyPr/>
+                    <a:lstStyle/>
+                    <a:p>
+                      <a:pPr algn="l" marL="63500" marR="63500">
+                        <a:lnSpc>
+                          <a:spcPct val="100000"/>
+                        </a:lnSpc>
+                        <a:spcBef>
+                          <a:spcPts val="500"/>
+                        </a:spcBef>
+                        <a:spcAft>
+                          <a:spcPts val="500"/>
+                        </a:spcAft>
+                        <a:buNone/>
+                      </a:pPr>
+                      <a:r>
+                        <a:rPr cap="none" sz="1100" i="0" b="0" u="none" strike="noStrike">
+                          <a:solidFill>
+                            <a:srgbClr val="000000">
+                              <a:alpha val="100000"/>
+                            </a:srgbClr>
+                          </a:solidFill>
+                          <a:latin typeface="DejaVu Sans"/>
+                          <a:cs typeface="DejaVu Sans"/>
+                          <a:ea typeface="DejaVu Sans"/>
+                          <a:sym typeface="DejaVu Sans"/>
+                        </a:rPr>
+                        <a:t>0.899</a:t>
+                      </a:r>
+                    </a:p>
+                  </a:txBody>
+                  <a:tcPr anchor="ctr" marB="63500" marT="63500" marR="0" marL="0">
+                    <a:lnL algn="ctr" cmpd="sng" cap="flat" w="0">
+                      <a:noFill/>
+                      <a:prstDash val="solid"/>
+                    </a:lnL>
+                    <a:lnR algn="ctr" cmpd="sng" cap="flat" w="0">
+                      <a:noFill/>
+                      <a:prstDash val="solid"/>
+                    </a:lnR>
+                    <a:lnT algn="ctr" cmpd="sng" cap="flat" w="0">
+                      <a:noFill/>
+                      <a:prstDash val="solid"/>
+                    </a:lnT>
+                    <a:lnB algn="ctr" cmpd="sng" cap="flat" w="0">
+                      <a:noFill/>
+                      <a:prstDash val="solid"/>
+                    </a:lnB>
+                    <a:solidFill>
+                      <a:srgbClr val="FFFFFF">
+                        <a:alpha val="0"/>
+                      </a:srgbClr>
+                    </a:solidFill>
+                  </a:tcPr>
+                </a:tc>
+                <a:tc>
+                  <a:txBody>
+                    <a:bodyPr/>
+                    <a:lstStyle/>
+                    <a:p>
+                      <a:pPr algn="l" marL="63500" marR="63500">
+                        <a:lnSpc>
+                          <a:spcPct val="100000"/>
+                        </a:lnSpc>
+                        <a:spcBef>
+                          <a:spcPts val="500"/>
+                        </a:spcBef>
+                        <a:spcAft>
+                          <a:spcPts val="500"/>
+                        </a:spcAft>
+                        <a:buNone/>
+                      </a:pPr>
+                      <a:r>
+                        <a:rPr cap="none" sz="1100" i="0" b="0" u="none" strike="noStrike">
+                          <a:solidFill>
+                            <a:srgbClr val="000000">
+                              <a:alpha val="100000"/>
+                            </a:srgbClr>
+                          </a:solidFill>
+                          <a:latin typeface="DejaVu Sans"/>
+                          <a:cs typeface="DejaVu Sans"/>
+                          <a:ea typeface="DejaVu Sans"/>
+                          <a:sym typeface="DejaVu Sans"/>
+                        </a:rPr>
+                        <a:t>48.3 (45.1, 51.7)</a:t>
+                      </a:r>
+                    </a:p>
+                  </a:txBody>
+                  <a:tcPr anchor="ctr" marB="63500" marT="63500" marR="0" marL="0">
+                    <a:lnL algn="ctr" cmpd="sng" cap="flat" w="0">
+                      <a:noFill/>
+                      <a:prstDash val="solid"/>
+                    </a:lnL>
+                    <a:lnR algn="ctr" cmpd="sng" cap="flat" w="0">
+                      <a:noFill/>
+                      <a:prstDash val="solid"/>
+                    </a:lnR>
+                    <a:lnT algn="ctr" cmpd="sng" cap="flat" w="0">
+                      <a:noFill/>
+                      <a:prstDash val="solid"/>
+                    </a:lnT>
+                    <a:lnB algn="ctr" cmpd="sng" cap="flat" w="0">
+                      <a:noFill/>
+                      <a:prstDash val="solid"/>
+                    </a:lnB>
+                    <a:solidFill>
+                      <a:srgbClr val="FFFFFF">
+                        <a:alpha val="0"/>
+                      </a:srgbClr>
+                    </a:solidFill>
+                  </a:tcPr>
+                </a:tc>
+                <a:tc>
+                  <a:txBody>
+                    <a:bodyPr/>
+                    <a:lstStyle/>
+                    <a:p>
+                      <a:pPr algn="l" marL="63500" marR="63500">
+                        <a:lnSpc>
+                          <a:spcPct val="100000"/>
+                        </a:lnSpc>
+                        <a:spcBef>
+                          <a:spcPts val="500"/>
+                        </a:spcBef>
+                        <a:spcAft>
+                          <a:spcPts val="500"/>
+                        </a:spcAft>
+                        <a:buNone/>
+                      </a:pPr>
+                      <a:r>
+                        <a:rPr cap="none" sz="1100" i="0" b="0" u="none" strike="noStrike">
+                          <a:solidFill>
+                            <a:srgbClr val="000000">
+                              <a:alpha val="100000"/>
+                            </a:srgbClr>
+                          </a:solidFill>
+                          <a:latin typeface="DejaVu Sans"/>
+                          <a:cs typeface="DejaVu Sans"/>
+                          <a:ea typeface="DejaVu Sans"/>
+                          <a:sym typeface="DejaVu Sans"/>
+                        </a:rPr>
+                        <a:t>27.5</a:t>
+                      </a:r>
+                    </a:p>
+                  </a:txBody>
+                  <a:tcPr anchor="ctr" marB="63500" marT="63500" marR="0" marL="0">
+                    <a:lnL algn="ctr" cmpd="sng" cap="flat" w="0">
+                      <a:noFill/>
+                      <a:prstDash val="solid"/>
+                    </a:lnL>
+                    <a:lnR algn="ctr" cmpd="sng" cap="flat" w="0">
+                      <a:noFill/>
+                      <a:prstDash val="solid"/>
+                    </a:lnR>
+                    <a:lnT algn="ctr" cmpd="sng" cap="flat" w="0">
+                      <a:noFill/>
+                      <a:prstDash val="solid"/>
+                    </a:lnT>
+                    <a:lnB algn="ctr" cmpd="sng" cap="flat" w="0">
+                      <a:noFill/>
+                      <a:prstDash val="solid"/>
+                    </a:lnB>
+                    <a:solidFill>
+                      <a:srgbClr val="FFFFFF">
+                        <a:alpha val="0"/>
+                      </a:srgbClr>
+                    </a:solidFill>
+                  </a:tcPr>
+                </a:tc>
+                <a:tc>
+                  <a:txBody>
+                    <a:bodyPr/>
+                    <a:lstStyle/>
+                    <a:p>
+                      <a:pPr algn="l" marL="63500" marR="63500">
+                        <a:lnSpc>
+                          <a:spcPct val="100000"/>
+                        </a:lnSpc>
+                        <a:spcBef>
+                          <a:spcPts val="500"/>
+                        </a:spcBef>
+                        <a:spcAft>
+                          <a:spcPts val="500"/>
+                        </a:spcAft>
+                        <a:buNone/>
+                      </a:pPr>
+                      <a:r>
+                        <a:rPr cap="none" sz="1100" i="0" b="0" u="none" strike="noStrike">
+                          <a:solidFill>
+                            <a:srgbClr val="000000">
+                              <a:alpha val="100000"/>
+                            </a:srgbClr>
+                          </a:solidFill>
+                          <a:latin typeface="DejaVu Sans"/>
+                          <a:cs typeface="DejaVu Sans"/>
+                          <a:ea typeface="DejaVu Sans"/>
+                          <a:sym typeface="DejaVu Sans"/>
+                        </a:rPr>
+                        <a:t>28.4=</a:t>
+                      </a:r>
+                    </a:p>
+                  </a:txBody>
+                  <a:tcPr anchor="ctr" marB="63500" marT="63500" marR="0" marL="0">
+                    <a:lnL algn="ctr" cmpd="sng" cap="flat" w="0">
+                      <a:noFill/>
+                      <a:prstDash val="solid"/>
+                    </a:lnL>
+                    <a:lnR algn="ctr" cmpd="sng" cap="flat" w="0">
+                      <a:noFill/>
+                      <a:prstDash val="solid"/>
+                    </a:lnR>
+                    <a:lnT algn="ctr" cmpd="sng" cap="flat" w="0">
+                      <a:noFill/>
+                      <a:prstDash val="solid"/>
+                    </a:lnT>
+                    <a:lnB algn="ctr" cmpd="sng" cap="flat" w="0">
+                      <a:noFill/>
+                      <a:prstDash val="solid"/>
+                    </a:lnB>
+                    <a:solidFill>
+                      <a:srgbClr val="FFFFFF">
+                        <a:alpha val="0"/>
+                      </a:srgbClr>
+                    </a:solidFill>
+                  </a:tcPr>
+                </a:tc>
+              </a:tr>
+              <a:tr h="410845">
+                <a:tc>
+                  <a:txBody>
+                    <a:bodyPr/>
+                    <a:lstStyle/>
+                    <a:p>
+                      <a:pPr algn="l" marL="63500" marR="63500">
+                        <a:lnSpc>
+                          <a:spcPct val="100000"/>
+                        </a:lnSpc>
+                        <a:spcBef>
+                          <a:spcPts val="500"/>
+                        </a:spcBef>
+                        <a:spcAft>
+                          <a:spcPts val="500"/>
+                        </a:spcAft>
+                        <a:buNone/>
+                      </a:pPr>
+                      <a:r>
+                        <a:rPr cap="none" sz="1200" i="0" b="0" u="none" strike="noStrike">
+                          <a:solidFill>
+                            <a:srgbClr val="000000">
+                              <a:alpha val="100000"/>
+                            </a:srgbClr>
+                          </a:solidFill>
+                          <a:latin typeface="Helvetica"/>
+                          <a:cs typeface="Helvetica"/>
+                          <a:ea typeface="Helvetica"/>
+                          <a:sym typeface="Helvetica"/>
+                        </a:rPr>
+                        <a:t>RSV</a:t>
+                      </a:r>
+                    </a:p>
+                  </a:txBody>
+                  <a:tcPr anchor="ctr" marB="63500" marT="63500" marR="0" marL="0">
+                    <a:lnL algn="ctr" cmpd="sng" cap="flat" w="0">
+                      <a:noFill/>
+                      <a:prstDash val="solid"/>
+                    </a:lnL>
+                    <a:lnR algn="ctr" cmpd="sng" cap="flat" w="0">
+                      <a:noFill/>
+                      <a:prstDash val="solid"/>
+                    </a:lnR>
+                    <a:lnT algn="ctr" cmpd="sng" cap="flat" w="0">
+                      <a:noFill/>
+                      <a:prstDash val="solid"/>
+                    </a:lnT>
+                    <a:lnB algn="ctr" cmpd="sng" cap="flat" w="19050">
+                      <a:solidFill>
+                        <a:srgbClr val="666666">
+                          <a:alpha val="100000"/>
+                        </a:srgbClr>
+                      </a:solidFill>
+                      <a:prstDash val="solid"/>
+                    </a:lnB>
+                    <a:solidFill>
+                      <a:srgbClr val="FFFFFF">
+                        <a:alpha val="0"/>
+                      </a:srgbClr>
+                    </a:solidFill>
+                  </a:tcPr>
+                </a:tc>
+                <a:tc>
+                  <a:txBody>
+                    <a:bodyPr/>
+                    <a:lstStyle/>
+                    <a:p>
+                      <a:pPr algn="l" marL="63500" marR="63500">
+                        <a:lnSpc>
+                          <a:spcPct val="100000"/>
+                        </a:lnSpc>
+                        <a:spcBef>
+                          <a:spcPts val="500"/>
+                        </a:spcBef>
+                        <a:spcAft>
+                          <a:spcPts val="500"/>
+                        </a:spcAft>
+                        <a:buNone/>
+                      </a:pPr>
+                      <a:r>
+                        <a:rPr cap="none" sz="1100" i="0" b="0" u="none" strike="noStrike">
+                          <a:solidFill>
+                            <a:srgbClr val="000000">
+                              <a:alpha val="100000"/>
+                            </a:srgbClr>
+                          </a:solidFill>
+                          <a:latin typeface="DejaVu Sans"/>
+                          <a:cs typeface="DejaVu Sans"/>
+                          <a:ea typeface="DejaVu Sans"/>
+                          <a:sym typeface="DejaVu Sans"/>
+                        </a:rPr>
+                        <a:t>0.196</a:t>
+                      </a:r>
+                    </a:p>
+                  </a:txBody>
+                  <a:tcPr anchor="ctr" marB="63500" marT="63500" marR="0" marL="0">
+                    <a:lnL algn="ctr" cmpd="sng" cap="flat" w="0">
+                      <a:noFill/>
+                      <a:prstDash val="solid"/>
+                    </a:lnL>
+                    <a:lnR algn="ctr" cmpd="sng" cap="flat" w="0">
+                      <a:noFill/>
+                      <a:prstDash val="solid"/>
+                    </a:lnR>
+                    <a:lnT algn="ctr" cmpd="sng" cap="flat" w="0">
+                      <a:noFill/>
+                      <a:prstDash val="solid"/>
+                    </a:lnT>
+                    <a:lnB algn="ctr" cmpd="sng" cap="flat" w="19050">
+                      <a:solidFill>
+                        <a:srgbClr val="666666">
+                          <a:alpha val="100000"/>
+                        </a:srgbClr>
+                      </a:solidFill>
+                      <a:prstDash val="solid"/>
+                    </a:lnB>
+                    <a:solidFill>
+                      <a:srgbClr val="FFFFFF">
+                        <a:alpha val="0"/>
+                      </a:srgbClr>
+                    </a:solidFill>
+                  </a:tcPr>
+                </a:tc>
+                <a:tc>
+                  <a:txBody>
+                    <a:bodyPr/>
+                    <a:lstStyle/>
+                    <a:p>
+                      <a:pPr algn="l" marL="63500" marR="63500">
+                        <a:lnSpc>
+                          <a:spcPct val="100000"/>
+                        </a:lnSpc>
+                        <a:spcBef>
+                          <a:spcPts val="500"/>
+                        </a:spcBef>
+                        <a:spcAft>
+                          <a:spcPts val="500"/>
+                        </a:spcAft>
+                        <a:buNone/>
+                      </a:pPr>
+                      <a:r>
+                        <a:rPr cap="none" sz="1100" i="0" b="0" u="none" strike="noStrike">
+                          <a:solidFill>
+                            <a:srgbClr val="000000">
+                              <a:alpha val="100000"/>
+                            </a:srgbClr>
+                          </a:solidFill>
+                          <a:latin typeface="DejaVu Sans"/>
+                          <a:cs typeface="DejaVu Sans"/>
+                          <a:ea typeface="DejaVu Sans"/>
+                          <a:sym typeface="DejaVu Sans"/>
+                        </a:rPr>
+                        <a:t>0.00315</a:t>
+                      </a:r>
+                    </a:p>
+                  </a:txBody>
+                  <a:tcPr anchor="ctr" marB="63500" marT="63500" marR="0" marL="0">
+                    <a:lnL algn="ctr" cmpd="sng" cap="flat" w="0">
+                      <a:noFill/>
+                      <a:prstDash val="solid"/>
+                    </a:lnL>
+                    <a:lnR algn="ctr" cmpd="sng" cap="flat" w="0">
+                      <a:noFill/>
+                      <a:prstDash val="solid"/>
+                    </a:lnR>
+                    <a:lnT algn="ctr" cmpd="sng" cap="flat" w="0">
+                      <a:noFill/>
+                      <a:prstDash val="solid"/>
+                    </a:lnT>
+                    <a:lnB algn="ctr" cmpd="sng" cap="flat" w="19050">
+                      <a:solidFill>
+                        <a:srgbClr val="666666">
+                          <a:alpha val="100000"/>
+                        </a:srgbClr>
+                      </a:solidFill>
+                      <a:prstDash val="solid"/>
+                    </a:lnB>
+                    <a:solidFill>
+                      <a:srgbClr val="FFFFFF">
+                        <a:alpha val="0"/>
+                      </a:srgbClr>
+                    </a:solidFill>
+                  </a:tcPr>
+                </a:tc>
+                <a:tc>
+                  <a:txBody>
+                    <a:bodyPr/>
+                    <a:lstStyle/>
+                    <a:p>
+                      <a:pPr algn="l" marL="63500" marR="63500">
+                        <a:lnSpc>
+                          <a:spcPct val="100000"/>
+                        </a:lnSpc>
+                        <a:spcBef>
+                          <a:spcPts val="500"/>
+                        </a:spcBef>
+                        <a:spcAft>
+                          <a:spcPts val="500"/>
+                        </a:spcAft>
+                        <a:buNone/>
+                      </a:pPr>
+                      <a:r>
+                        <a:rPr cap="none" sz="1100" i="0" b="0" u="none" strike="noStrike">
+                          <a:solidFill>
+                            <a:srgbClr val="000000">
+                              <a:alpha val="100000"/>
+                            </a:srgbClr>
+                          </a:solidFill>
+                          <a:latin typeface="DejaVu Sans"/>
+                          <a:cs typeface="DejaVu Sans"/>
+                          <a:ea typeface="DejaVu Sans"/>
+                          <a:sym typeface="DejaVu Sans"/>
+                        </a:rPr>
+                        <a:t>1.61</a:t>
+                      </a:r>
+                    </a:p>
+                  </a:txBody>
+                  <a:tcPr anchor="ctr" marB="63500" marT="63500" marR="0" marL="0">
+                    <a:lnL algn="ctr" cmpd="sng" cap="flat" w="0">
+                      <a:noFill/>
+                      <a:prstDash val="solid"/>
+                    </a:lnL>
+                    <a:lnR algn="ctr" cmpd="sng" cap="flat" w="0">
+                      <a:noFill/>
+                      <a:prstDash val="solid"/>
+                    </a:lnR>
+                    <a:lnT algn="ctr" cmpd="sng" cap="flat" w="0">
+                      <a:noFill/>
+                      <a:prstDash val="solid"/>
+                    </a:lnT>
+                    <a:lnB algn="ctr" cmpd="sng" cap="flat" w="19050">
+                      <a:solidFill>
+                        <a:srgbClr val="666666">
+                          <a:alpha val="100000"/>
+                        </a:srgbClr>
+                      </a:solidFill>
+                      <a:prstDash val="solid"/>
+                    </a:lnB>
+                    <a:solidFill>
+                      <a:srgbClr val="FFFFFF">
+                        <a:alpha val="0"/>
+                      </a:srgbClr>
+                    </a:solidFill>
+                  </a:tcPr>
+                </a:tc>
+                <a:tc>
+                  <a:txBody>
+                    <a:bodyPr/>
+                    <a:lstStyle/>
+                    <a:p>
+                      <a:pPr algn="l" marL="63500" marR="63500">
+                        <a:lnSpc>
+                          <a:spcPct val="100000"/>
+                        </a:lnSpc>
+                        <a:spcBef>
+                          <a:spcPts val="500"/>
+                        </a:spcBef>
+                        <a:spcAft>
+                          <a:spcPts val="500"/>
+                        </a:spcAft>
+                        <a:buNone/>
+                      </a:pPr>
+                      <a:r>
+                        <a:rPr cap="none" sz="1100" i="0" b="0" u="none" strike="noStrike">
+                          <a:solidFill>
+                            <a:srgbClr val="000000">
+                              <a:alpha val="100000"/>
+                            </a:srgbClr>
+                          </a:solidFill>
+                          <a:latin typeface="DejaVu Sans"/>
+                          <a:cs typeface="DejaVu Sans"/>
+                          <a:ea typeface="DejaVu Sans"/>
+                          <a:sym typeface="DejaVu Sans"/>
+                        </a:rPr>
+                        <a:t>0.196 (0.190, 0.203)</a:t>
+                      </a:r>
+                    </a:p>
+                  </a:txBody>
+                  <a:tcPr anchor="ctr" marB="63500" marT="63500" marR="0" marL="0">
+                    <a:lnL algn="ctr" cmpd="sng" cap="flat" w="0">
+                      <a:noFill/>
+                      <a:prstDash val="solid"/>
+                    </a:lnL>
+                    <a:lnR algn="ctr" cmpd="sng" cap="flat" w="0">
+                      <a:noFill/>
+                      <a:prstDash val="solid"/>
+                    </a:lnR>
+                    <a:lnT algn="ctr" cmpd="sng" cap="flat" w="0">
+                      <a:noFill/>
+                      <a:prstDash val="solid"/>
+                    </a:lnT>
+                    <a:lnB algn="ctr" cmpd="sng" cap="flat" w="19050">
+                      <a:solidFill>
+                        <a:srgbClr val="666666">
+                          <a:alpha val="100000"/>
+                        </a:srgbClr>
+                      </a:solidFill>
+                      <a:prstDash val="solid"/>
+                    </a:lnB>
+                    <a:solidFill>
+                      <a:srgbClr val="FFFFFF">
+                        <a:alpha val="0"/>
+                      </a:srgbClr>
+                    </a:solidFill>
+                  </a:tcPr>
+                </a:tc>
+                <a:tc>
+                  <a:txBody>
+                    <a:bodyPr/>
+                    <a:lstStyle/>
+                    <a:p>
+                      <a:pPr algn="l" marL="63500" marR="63500">
+                        <a:lnSpc>
+                          <a:spcPct val="100000"/>
+                        </a:lnSpc>
+                        <a:spcBef>
+                          <a:spcPts val="500"/>
+                        </a:spcBef>
+                        <a:spcAft>
+                          <a:spcPts val="500"/>
+                        </a:spcAft>
+                        <a:buNone/>
+                      </a:pPr>
+                      <a:endParaRPr cap="none" sz="1100" i="0" b="0" u="none" strike="noStrike">
+                        <a:solidFill>
+                          <a:srgbClr val="000000">
+                            <a:alpha val="100000"/>
+                          </a:srgbClr>
+                        </a:solidFill>
+                        <a:latin typeface="DejaVu Sans"/>
+                        <a:cs typeface="DejaVu Sans"/>
+                        <a:ea typeface="DejaVu Sans"/>
+                        <a:sym typeface="DejaVu Sans"/>
+                      </a:endParaRPr>
+                      <a:r>
+                        <a:rPr cap="none" sz="1100" i="0" b="0" u="none" strike="noStrike">
+                          <a:solidFill>
+                            <a:srgbClr val="000000">
+                              <a:alpha val="100000"/>
+                            </a:srgbClr>
+                          </a:solidFill>
+                          <a:latin typeface="DejaVu Sans"/>
+                          <a:cs typeface="DejaVu Sans"/>
+                          <a:ea typeface="DejaVu Sans"/>
+                          <a:sym typeface="DejaVu Sans"/>
+                        </a:rPr>
+                        <a:t/>
+                      </a:r>
+                    </a:p>
+                  </a:txBody>
+                  <a:tcPr anchor="ctr" marB="63500" marT="63500" marR="0" marL="0">
+                    <a:lnL algn="ctr" cmpd="sng" cap="flat" w="0">
+                      <a:noFill/>
+                      <a:prstDash val="solid"/>
+                    </a:lnL>
+                    <a:lnR algn="ctr" cmpd="sng" cap="flat" w="0">
+                      <a:noFill/>
+                      <a:prstDash val="solid"/>
+                    </a:lnR>
+                    <a:lnT algn="ctr" cmpd="sng" cap="flat" w="0">
+                      <a:noFill/>
+                      <a:prstDash val="solid"/>
+                    </a:lnT>
+                    <a:lnB algn="ctr" cmpd="sng" cap="flat" w="19050">
+                      <a:solidFill>
+                        <a:srgbClr val="666666">
+                          <a:alpha val="100000"/>
+                        </a:srgbClr>
+                      </a:solidFill>
+                      <a:prstDash val="solid"/>
+                    </a:lnB>
+                    <a:solidFill>
+                      <a:srgbClr val="FFFFFF">
+                        <a:alpha val="0"/>
+                      </a:srgbClr>
+                    </a:solidFill>
+                  </a:tcPr>
+                </a:tc>
+                <a:tc>
+                  <a:txBody>
+                    <a:bodyPr/>
+                    <a:lstStyle/>
+                    <a:p>
+                      <a:pPr algn="l" marL="63500" marR="63500">
+                        <a:lnSpc>
+                          <a:spcPct val="100000"/>
+                        </a:lnSpc>
+                        <a:spcBef>
+                          <a:spcPts val="500"/>
+                        </a:spcBef>
+                        <a:spcAft>
+                          <a:spcPts val="500"/>
+                        </a:spcAft>
+                        <a:buNone/>
+                      </a:pPr>
+                      <a:endParaRPr cap="none" sz="1100" i="0" b="0" u="none" strike="noStrike">
+                        <a:solidFill>
+                          <a:srgbClr val="000000">
+                            <a:alpha val="100000"/>
+                          </a:srgbClr>
+                        </a:solidFill>
+                        <a:latin typeface="DejaVu Sans"/>
+                        <a:cs typeface="DejaVu Sans"/>
+                        <a:ea typeface="DejaVu Sans"/>
+                        <a:sym typeface="DejaVu Sans"/>
+                      </a:endParaRPr>
+                      <a:r>
+                        <a:rPr cap="none" sz="1100" i="0" b="0" u="none" strike="noStrike">
+                          <a:solidFill>
+                            <a:srgbClr val="000000">
+                              <a:alpha val="100000"/>
+                            </a:srgbClr>
+                          </a:solidFill>
+                          <a:latin typeface="DejaVu Sans"/>
+                          <a:cs typeface="DejaVu Sans"/>
+                          <a:ea typeface="DejaVu Sans"/>
+                          <a:sym typeface="DejaVu Sans"/>
+                        </a:rPr>
+                        <a:t/>
+                      </a:r>
+                    </a:p>
+                  </a:txBody>
+                  <a:tcPr anchor="ctr" marB="63500" marT="63500" marR="0" marL="0">
+                    <a:lnL algn="ctr" cmpd="sng" cap="flat" w="0">
+                      <a:noFill/>
+                      <a:prstDash val="solid"/>
+                    </a:lnL>
+                    <a:lnR algn="ctr" cmpd="sng" cap="flat" w="0">
+                      <a:noFill/>
+                      <a:prstDash val="solid"/>
+                    </a:lnR>
+                    <a:lnT algn="ctr" cmpd="sng" cap="flat" w="0">
+                      <a:noFill/>
+                      <a:prstDash val="solid"/>
+                    </a:lnT>
+                    <a:lnB algn="ctr" cmpd="sng" cap="flat" w="19050">
+                      <a:solidFill>
+                        <a:srgbClr val="666666">
+                          <a:alpha val="100000"/>
+                        </a:srgbClr>
+                      </a:solidFill>
+                      <a:prstDash val="solid"/>
+                    </a:lnB>
+                    <a:solidFill>
+                      <a:srgbClr val="FFFFFF">
+                        <a:alpha val="0"/>
+                      </a:srgbClr>
+                    </a:solidFill>
+                  </a:tcPr>
+                </a:tc>
+              </a:tr>
+            </a:tbl>
+          </a:graphicData>
+        </a:graphic>
+      </p:graphicFrame>
     </p:spTree>
   </p:cSld>
   <p:clrMapOvr>
